--- a/VAE_NoiseFix_Final_Presentation.pptx
+++ b/VAE_NoiseFix_Final_Presentation.pptx
@@ -693,10 +693,68 @@
           <a:lstStyle/>
           <a:p>
             <a:r>
-              <a:rPr lang="zh-TW" altLang="en-US"/>
-              <a:t>此處只須強調最後的選擇即可</a:t>
-            </a:r>
-            <a:endParaRPr lang="en-US" dirty="0"/>
+              <a:rPr lang="en-US" altLang="zh-TW" dirty="0"/>
+              <a:t>Here, I chose the </a:t>
+            </a:r>
+            <a:r>
+              <a:rPr lang="en-US" altLang="zh-TW" b="1" dirty="0" err="1"/>
+              <a:t>Telea</a:t>
+            </a:r>
+            <a:r>
+              <a:rPr lang="en-US" altLang="zh-TW" b="1" dirty="0"/>
+              <a:t> FMM</a:t>
+            </a:r>
+            <a:r>
+              <a:rPr lang="en-US" altLang="zh-TW" dirty="0"/>
+              <a:t> algorithm for the inpainting process. </a:t>
+            </a:r>
+          </a:p>
+          <a:p>
+            <a:r>
+              <a:rPr lang="en-US" altLang="zh-TW" dirty="0"/>
+              <a:t>Compared to the other two methods, it is significantly more lightweight and faster.</a:t>
+            </a:r>
+          </a:p>
+          <a:p>
+            <a:endParaRPr lang="en-US" altLang="zh-TW" dirty="0"/>
+          </a:p>
+          <a:p>
+            <a:endParaRPr lang="en-US" altLang="zh-TW" dirty="0"/>
+          </a:p>
+          <a:p>
+            <a:endParaRPr lang="en-US" altLang="zh-TW" dirty="0"/>
+          </a:p>
+          <a:p>
+            <a:endParaRPr lang="en-US" altLang="zh-TW" dirty="0"/>
+          </a:p>
+          <a:p>
+            <a:r>
+              <a:rPr lang="zh-TW" altLang="en-US" dirty="0"/>
+              <a:t>此處選使用</a:t>
+            </a:r>
+            <a:r>
+              <a:rPr lang="en-US" altLang="zh-TW" dirty="0" err="1"/>
+              <a:t>Telea</a:t>
+            </a:r>
+            <a:r>
+              <a:rPr lang="en-US" altLang="zh-TW" dirty="0"/>
+              <a:t> FMM</a:t>
+            </a:r>
+            <a:r>
+              <a:rPr lang="zh-TW" altLang="en-US" dirty="0"/>
+              <a:t>進行修補</a:t>
+            </a:r>
+            <a:endParaRPr lang="en-US" altLang="zh-TW" dirty="0"/>
+          </a:p>
+          <a:p>
+            <a:r>
+              <a:rPr lang="zh-TW" altLang="en-US" dirty="0"/>
+              <a:t>因為其相較其他兩種方法更為輕便、快捷</a:t>
+            </a:r>
+            <a:endParaRPr lang="en-US" altLang="zh-TW" dirty="0"/>
+          </a:p>
+          <a:p>
+            <a:endParaRPr lang="en-US" altLang="zh-TW" dirty="0"/>
           </a:p>
         </p:txBody>
       </p:sp>
@@ -779,6 +837,13 @@
         <p:txBody>
           <a:bodyPr/>
           <a:lstStyle/>
+          <a:p>
+            <a:r>
+              <a:rPr lang="zh-TW" altLang="en-US" dirty="0"/>
+              <a:t>需要優化流程圖的可讀性</a:t>
+            </a:r>
+            <a:endParaRPr lang="en-US" altLang="zh-TW"/>
+          </a:p>
           <a:p>
             <a:endParaRPr lang="en-US" dirty="0"/>
           </a:p>
@@ -4321,7 +4386,29 @@
                 <a:ea typeface="Trebuchet MS" pitchFamily="34" charset="-122"/>
                 <a:cs typeface="Trebuchet MS" pitchFamily="34" charset="-120"/>
               </a:rPr>
-              <a:t>Why Not Deep Learning?</a:t>
+              <a:t>Why </a:t>
+            </a:r>
+            <a:r>
+              <a:rPr lang="en-US" sz="3000" b="1" dirty="0" err="1">
+                <a:solidFill>
+                  <a:srgbClr val="1E2A4A"/>
+                </a:solidFill>
+                <a:latin typeface="Trebuchet MS" pitchFamily="34" charset="0"/>
+                <a:ea typeface="Trebuchet MS" pitchFamily="34" charset="-122"/>
+                <a:cs typeface="Trebuchet MS" pitchFamily="34" charset="-120"/>
+              </a:rPr>
+              <a:t>Telea</a:t>
+            </a:r>
+            <a:r>
+              <a:rPr lang="en-US" sz="3000" b="1" dirty="0">
+                <a:solidFill>
+                  <a:srgbClr val="1E2A4A"/>
+                </a:solidFill>
+                <a:latin typeface="Trebuchet MS" pitchFamily="34" charset="0"/>
+                <a:ea typeface="Trebuchet MS" pitchFamily="34" charset="-122"/>
+                <a:cs typeface="Trebuchet MS" pitchFamily="34" charset="-120"/>
+              </a:rPr>
+              <a:t> FMM?</a:t>
             </a:r>
             <a:endParaRPr lang="en-US" sz="3000" dirty="0"/>
           </a:p>
@@ -4335,8 +4422,8 @@
         </p:nvSpPr>
         <p:spPr>
           <a:xfrm>
-            <a:off x="566928" y="1536192"/>
-            <a:ext cx="11055096" cy="548640"/>
+            <a:off x="566928" y="1434010"/>
+            <a:ext cx="11486388" cy="868939"/>
           </a:xfrm>
           <a:prstGeom prst="rect">
             <a:avLst/>
@@ -4352,7 +4439,7 @@
               <a:buNone/>
             </a:pPr>
             <a:r>
-              <a:rPr lang="en-US" sz="1450" b="1" dirty="0">
+              <a:rPr lang="en-US" sz="2400" b="1" dirty="0">
                 <a:solidFill>
                   <a:srgbClr val="059669"/>
                 </a:solidFill>
@@ -4360,10 +4447,15 @@
                 <a:ea typeface="Calibri" pitchFamily="34" charset="-122"/>
                 <a:cs typeface="Calibri" pitchFamily="34" charset="-120"/>
               </a:rPr>
-              <a:t>Covered in the proposal.  </a:t>
-            </a:r>
-            <a:r>
-              <a:rPr lang="en-US" sz="1450" dirty="0">
+              <a:t>Covered in the proposal</a:t>
+            </a:r>
+          </a:p>
+          <a:p>
+            <a:pPr marL="0" indent="0">
+              <a:buNone/>
+            </a:pPr>
+            <a:r>
+              <a:rPr lang="en-US" dirty="0">
                 <a:solidFill>
                   <a:srgbClr val="475569"/>
                 </a:solidFill>
@@ -4373,86 +4465,20 @@
               </a:rPr>
               <a:t>A 3-pixel hole shouldn’t cost a full diffusion pass — of three inpainting paradigms, Telea FMM fits micro-scale repair best.</a:t>
             </a:r>
-            <a:endParaRPr lang="en-US" sz="1450" dirty="0"/>
-          </a:p>
-        </p:txBody>
-      </p:sp>
-      <p:sp>
-        <p:nvSpPr>
-          <p:cNvPr id="5" name="Shape 3"/>
-          <p:cNvSpPr/>
-          <p:nvPr/>
-        </p:nvSpPr>
-        <p:spPr>
-          <a:xfrm>
-            <a:off x="566928" y="2331720"/>
-            <a:ext cx="3502152" cy="2697480"/>
-          </a:xfrm>
-          <a:prstGeom prst="rect">
-            <a:avLst/>
-          </a:prstGeom>
-          <a:solidFill>
-            <a:srgbClr val="FFFFFF"/>
-          </a:solidFill>
-          <a:ln w="12700">
-            <a:solidFill>
-              <a:srgbClr val="E2E8F0"/>
-            </a:solidFill>
-            <a:prstDash val="solid"/>
-          </a:ln>
-          <a:effectLst>
-            <a:outerShdw blurRad="88900" dist="38100" dir="8100000" algn="bl" rotWithShape="0">
-              <a:srgbClr val="000000">
-                <a:alpha val="10000"/>
-              </a:srgbClr>
-            </a:outerShdw>
-          </a:effectLst>
-        </p:spPr>
-        <p:txBody>
-          <a:bodyPr/>
-          <a:lstStyle/>
-          <a:p>
-            <a:endParaRPr lang="zh-TW" altLang="en-US"/>
-          </a:p>
-        </p:txBody>
-      </p:sp>
-      <p:sp>
-        <p:nvSpPr>
-          <p:cNvPr id="6" name="Shape 4"/>
-          <p:cNvSpPr/>
-          <p:nvPr/>
-        </p:nvSpPr>
-        <p:spPr>
-          <a:xfrm>
-            <a:off x="566928" y="2331720"/>
-            <a:ext cx="82296" cy="2697480"/>
-          </a:xfrm>
-          <a:prstGeom prst="rect">
-            <a:avLst/>
-          </a:prstGeom>
-          <a:solidFill>
-            <a:srgbClr val="B91C1C"/>
-          </a:solidFill>
-          <a:ln/>
-        </p:spPr>
-        <p:txBody>
-          <a:bodyPr/>
-          <a:lstStyle/>
-          <a:p>
-            <a:endParaRPr lang="zh-TW" altLang="en-US"/>
-          </a:p>
-        </p:txBody>
-      </p:sp>
-      <p:sp>
-        <p:nvSpPr>
-          <p:cNvPr id="7" name="Text 5"/>
-          <p:cNvSpPr/>
-          <p:nvPr/>
-        </p:nvSpPr>
-        <p:spPr>
-          <a:xfrm>
-            <a:off x="804672" y="2532888"/>
-            <a:ext cx="3044952" cy="256032"/>
+            <a:endParaRPr lang="en-US" dirty="0"/>
+          </a:p>
+        </p:txBody>
+      </p:sp>
+      <p:sp>
+        <p:nvSpPr>
+          <p:cNvPr id="26" name="Text 24"/>
+          <p:cNvSpPr/>
+          <p:nvPr/>
+        </p:nvSpPr>
+        <p:spPr>
+          <a:xfrm>
+            <a:off x="566928" y="6473952"/>
+            <a:ext cx="7315200" cy="274320"/>
           </a:xfrm>
           <a:prstGeom prst="rect">
             <a:avLst/>
@@ -4468,137 +4494,30 @@
               <a:buNone/>
             </a:pPr>
             <a:r>
-              <a:rPr lang="en-US" sz="1050" b="1" kern="0" spc="150" dirty="0">
+              <a:rPr lang="en-US" sz="900" dirty="0">
                 <a:solidFill>
                   <a:srgbClr val="64748B"/>
-                </a:solidFill>
-                <a:latin typeface="Trebuchet MS" pitchFamily="34" charset="0"/>
-                <a:ea typeface="Trebuchet MS" pitchFamily="34" charset="-122"/>
-                <a:cs typeface="Trebuchet MS" pitchFamily="34" charset="-120"/>
-              </a:rPr>
-              <a:t>CVPR 2022</a:t>
-            </a:r>
-            <a:endParaRPr lang="en-US" sz="1050" dirty="0"/>
-          </a:p>
-        </p:txBody>
-      </p:sp>
-      <p:sp>
-        <p:nvSpPr>
-          <p:cNvPr id="8" name="Text 6"/>
-          <p:cNvSpPr/>
-          <p:nvPr/>
-        </p:nvSpPr>
-        <p:spPr>
-          <a:xfrm>
-            <a:off x="804672" y="2788920"/>
-            <a:ext cx="3044952" cy="384048"/>
-          </a:xfrm>
-          <a:prstGeom prst="rect">
-            <a:avLst/>
-          </a:prstGeom>
-          <a:noFill/>
-          <a:ln/>
-        </p:spPr>
-        <p:txBody>
-          <a:bodyPr wrap="square" lIns="0" tIns="0" rIns="0" bIns="0" rtlCol="0" anchor="ctr"/>
-          <a:lstStyle/>
-          <a:p>
-            <a:pPr marL="0" indent="0">
-              <a:buNone/>
-            </a:pPr>
-            <a:r>
-              <a:rPr lang="en-US" sz="1900" b="1" dirty="0">
-                <a:solidFill>
-                  <a:srgbClr val="1E2A4A"/>
-                </a:solidFill>
-                <a:latin typeface="Trebuchet MS" pitchFamily="34" charset="0"/>
-                <a:ea typeface="Trebuchet MS" pitchFamily="34" charset="-122"/>
-                <a:cs typeface="Trebuchet MS" pitchFamily="34" charset="-120"/>
-              </a:rPr>
-              <a:t>RePaint (DDPM)</a:t>
-            </a:r>
-            <a:endParaRPr lang="en-US" sz="1900" dirty="0"/>
-          </a:p>
-        </p:txBody>
-      </p:sp>
-      <p:sp>
-        <p:nvSpPr>
-          <p:cNvPr id="9" name="Text 7"/>
-          <p:cNvSpPr/>
-          <p:nvPr/>
-        </p:nvSpPr>
-        <p:spPr>
-          <a:xfrm>
-            <a:off x="804672" y="3264408"/>
-            <a:ext cx="3044952" cy="1097280"/>
-          </a:xfrm>
-          <a:prstGeom prst="rect">
-            <a:avLst/>
-          </a:prstGeom>
-          <a:noFill/>
-          <a:ln/>
-        </p:spPr>
-        <p:txBody>
-          <a:bodyPr wrap="square" lIns="0" tIns="0" rIns="0" bIns="0" rtlCol="0" anchor="t"/>
-          <a:lstStyle/>
-          <a:p>
-            <a:pPr marL="0" indent="0">
-              <a:buNone/>
-            </a:pPr>
-            <a:r>
-              <a:rPr lang="en-US" sz="1300" dirty="0">
-                <a:solidFill>
-                  <a:srgbClr val="475569"/>
                 </a:solidFill>
                 <a:latin typeface="Calibri" pitchFamily="34" charset="0"/>
                 <a:ea typeface="Calibri" pitchFamily="34" charset="-122"/>
                 <a:cs typeface="Calibri" pitchFamily="34" charset="-120"/>
               </a:rPr>
-              <a:t>Diffusion-based — 250–1000 steps, 8–12 GB VRAM, seconds per image.</a:t>
-            </a:r>
-            <a:endParaRPr lang="en-US" sz="1300" dirty="0"/>
-          </a:p>
-        </p:txBody>
-      </p:sp>
-      <p:sp>
-        <p:nvSpPr>
-          <p:cNvPr id="10" name="Shape 8"/>
-          <p:cNvSpPr/>
-          <p:nvPr/>
-        </p:nvSpPr>
-        <p:spPr>
-          <a:xfrm>
-            <a:off x="804672" y="4462272"/>
-            <a:ext cx="3026664" cy="384048"/>
-          </a:xfrm>
-          <a:prstGeom prst="rect">
-            <a:avLst/>
-          </a:prstGeom>
-          <a:solidFill>
-            <a:srgbClr val="B91C1C">
-              <a:alpha val="12000"/>
-            </a:srgbClr>
-          </a:solidFill>
-          <a:ln/>
-        </p:spPr>
-        <p:txBody>
-          <a:bodyPr/>
-          <a:lstStyle/>
-          <a:p>
-            <a:endParaRPr lang="zh-TW" altLang="en-US"/>
-          </a:p>
-        </p:txBody>
-      </p:sp>
-      <p:sp>
-        <p:nvSpPr>
-          <p:cNvPr id="11" name="Text 9"/>
-          <p:cNvSpPr/>
-          <p:nvPr/>
-        </p:nvSpPr>
-        <p:spPr>
-          <a:xfrm>
-            <a:off x="804672" y="4462272"/>
-            <a:ext cx="3026664" cy="384048"/>
+              <a:t>SDXL VAE Noise-Fix  ·  Traditional-CV ComfyUI Node</a:t>
+            </a:r>
+            <a:endParaRPr lang="en-US" sz="900" dirty="0"/>
+          </a:p>
+        </p:txBody>
+      </p:sp>
+      <p:sp>
+        <p:nvSpPr>
+          <p:cNvPr id="27" name="Text 25"/>
+          <p:cNvSpPr/>
+          <p:nvPr/>
+        </p:nvSpPr>
+        <p:spPr>
+          <a:xfrm>
+            <a:off x="11073384" y="6473952"/>
+            <a:ext cx="548640" cy="274320"/>
           </a:xfrm>
           <a:prstGeom prst="rect">
             <a:avLst/>
@@ -4610,34 +4529,40 @@
           <a:bodyPr wrap="square" lIns="0" tIns="0" rIns="0" bIns="0" rtlCol="0" anchor="ctr"/>
           <a:lstStyle/>
           <a:p>
-            <a:pPr marL="0" indent="0" algn="ctr">
+            <a:pPr marL="0" indent="0" algn="r">
               <a:buNone/>
             </a:pPr>
             <a:r>
-              <a:rPr lang="en-US" sz="1300" b="1" dirty="0">
-                <a:solidFill>
-                  <a:srgbClr val="B91C1C"/>
+              <a:rPr lang="en-US" sz="900" dirty="0">
+                <a:solidFill>
+                  <a:srgbClr val="64748B"/>
                 </a:solidFill>
                 <a:latin typeface="Calibri" pitchFamily="34" charset="0"/>
                 <a:ea typeface="Calibri" pitchFamily="34" charset="-122"/>
                 <a:cs typeface="Calibri" pitchFamily="34" charset="-120"/>
               </a:rPr>
-              <a:t>Too heavy</a:t>
-            </a:r>
-            <a:endParaRPr lang="en-US" sz="1300" dirty="0"/>
-          </a:p>
-        </p:txBody>
-      </p:sp>
-      <p:sp>
-        <p:nvSpPr>
-          <p:cNvPr id="12" name="Shape 10"/>
-          <p:cNvSpPr/>
-          <p:nvPr/>
-        </p:nvSpPr>
-        <p:spPr>
-          <a:xfrm>
-            <a:off x="4343400" y="2331720"/>
-            <a:ext cx="3502152" cy="2697480"/>
+              <a:t>3</a:t>
+            </a:r>
+            <a:endParaRPr lang="en-US" sz="900" dirty="0"/>
+          </a:p>
+        </p:txBody>
+      </p:sp>
+      <p:sp>
+        <p:nvSpPr>
+          <p:cNvPr id="54" name="Rectangle 5">
+            <a:extLst>
+              <a:ext uri="{FF2B5EF4-FFF2-40B4-BE49-F238E27FC236}">
+                <a16:creationId xmlns:a16="http://schemas.microsoft.com/office/drawing/2014/main" id="{590102FD-CA16-FCF4-4616-418B2401D521}"/>
+              </a:ext>
+            </a:extLst>
+          </p:cNvPr>
+          <p:cNvSpPr/>
+          <p:nvPr/>
+        </p:nvSpPr>
+        <p:spPr>
+          <a:xfrm>
+            <a:off x="640080" y="2407919"/>
+            <a:ext cx="3383280" cy="3712465"/>
           </a:xfrm>
           <a:prstGeom prst="rect">
             <a:avLst/>
@@ -4647,248 +4572,425 @@
           </a:solidFill>
           <a:ln w="12700">
             <a:solidFill>
-              <a:srgbClr val="E2E8F0"/>
+              <a:srgbClr val="D1D5DB"/>
             </a:solidFill>
-            <a:prstDash val="solid"/>
           </a:ln>
-          <a:effectLst>
-            <a:outerShdw blurRad="88900" dist="38100" dir="8100000" algn="bl" rotWithShape="0">
-              <a:srgbClr val="000000">
-                <a:alpha val="10000"/>
-              </a:srgbClr>
-            </a:outerShdw>
-          </a:effectLst>
-        </p:spPr>
-        <p:txBody>
-          <a:bodyPr/>
-          <a:lstStyle/>
-          <a:p>
-            <a:endParaRPr lang="zh-TW" altLang="en-US"/>
-          </a:p>
-        </p:txBody>
-      </p:sp>
-      <p:sp>
-        <p:nvSpPr>
-          <p:cNvPr id="13" name="Shape 11"/>
-          <p:cNvSpPr/>
-          <p:nvPr/>
-        </p:nvSpPr>
-        <p:spPr>
-          <a:xfrm>
-            <a:off x="4343400" y="2331720"/>
-            <a:ext cx="82296" cy="2697480"/>
-          </a:xfrm>
-          <a:prstGeom prst="rect">
-            <a:avLst/>
-          </a:prstGeom>
-          <a:solidFill>
-            <a:srgbClr val="B45309"/>
-          </a:solidFill>
-          <a:ln/>
-        </p:spPr>
-        <p:txBody>
-          <a:bodyPr/>
-          <a:lstStyle/>
-          <a:p>
-            <a:endParaRPr lang="zh-TW" altLang="en-US"/>
-          </a:p>
-        </p:txBody>
-      </p:sp>
-      <p:sp>
-        <p:nvSpPr>
-          <p:cNvPr id="14" name="Text 12"/>
-          <p:cNvSpPr/>
-          <p:nvPr/>
-        </p:nvSpPr>
-        <p:spPr>
-          <a:xfrm>
-            <a:off x="4581144" y="2532888"/>
-            <a:ext cx="3044952" cy="256032"/>
-          </a:xfrm>
-          <a:prstGeom prst="rect">
-            <a:avLst/>
-          </a:prstGeom>
-          <a:noFill/>
-          <a:ln/>
-        </p:spPr>
-        <p:txBody>
-          <a:bodyPr wrap="square" lIns="0" tIns="0" rIns="0" bIns="0" rtlCol="0" anchor="ctr"/>
-          <a:lstStyle/>
-          <a:p>
-            <a:pPr marL="0" indent="0">
-              <a:buNone/>
-            </a:pPr>
-            <a:r>
-              <a:rPr lang="en-US" sz="1050" b="1" kern="0" spc="150" dirty="0">
-                <a:solidFill>
-                  <a:srgbClr val="64748B"/>
-                </a:solidFill>
-                <a:latin typeface="Trebuchet MS" pitchFamily="34" charset="0"/>
-                <a:ea typeface="Trebuchet MS" pitchFamily="34" charset="-122"/>
-                <a:cs typeface="Trebuchet MS" pitchFamily="34" charset="-120"/>
-              </a:rPr>
-              <a:t>SIGGRAPH 2009</a:t>
-            </a:r>
-            <a:endParaRPr lang="en-US" sz="1050" dirty="0"/>
-          </a:p>
-        </p:txBody>
-      </p:sp>
-      <p:sp>
-        <p:nvSpPr>
-          <p:cNvPr id="15" name="Text 13"/>
-          <p:cNvSpPr/>
-          <p:nvPr/>
-        </p:nvSpPr>
-        <p:spPr>
-          <a:xfrm>
-            <a:off x="4581144" y="2788920"/>
-            <a:ext cx="3044952" cy="384048"/>
-          </a:xfrm>
-          <a:prstGeom prst="rect">
-            <a:avLst/>
-          </a:prstGeom>
-          <a:noFill/>
-          <a:ln/>
-        </p:spPr>
-        <p:txBody>
-          <a:bodyPr wrap="square" lIns="0" tIns="0" rIns="0" bIns="0" rtlCol="0" anchor="ctr"/>
-          <a:lstStyle/>
-          <a:p>
-            <a:pPr marL="0" indent="0">
-              <a:buNone/>
-            </a:pPr>
-            <a:r>
-              <a:rPr lang="en-US" sz="1900" b="1" dirty="0">
-                <a:solidFill>
-                  <a:srgbClr val="1E2A4A"/>
-                </a:solidFill>
-                <a:latin typeface="Trebuchet MS" pitchFamily="34" charset="0"/>
-                <a:ea typeface="Trebuchet MS" pitchFamily="34" charset="-122"/>
-                <a:cs typeface="Trebuchet MS" pitchFamily="34" charset="-120"/>
-              </a:rPr>
-              <a:t>PatchMatch</a:t>
-            </a:r>
-            <a:endParaRPr lang="en-US" sz="1900" dirty="0"/>
-          </a:p>
-        </p:txBody>
-      </p:sp>
-      <p:sp>
-        <p:nvSpPr>
-          <p:cNvPr id="16" name="Text 14"/>
-          <p:cNvSpPr/>
-          <p:nvPr/>
-        </p:nvSpPr>
-        <p:spPr>
-          <a:xfrm>
-            <a:off x="4581144" y="3264408"/>
-            <a:ext cx="3044952" cy="1097280"/>
-          </a:xfrm>
-          <a:prstGeom prst="rect">
-            <a:avLst/>
-          </a:prstGeom>
-          <a:noFill/>
-          <a:ln/>
-        </p:spPr>
-        <p:txBody>
-          <a:bodyPr wrap="square" lIns="0" tIns="0" rIns="0" bIns="0" rtlCol="0" anchor="t"/>
-          <a:lstStyle/>
-          <a:p>
-            <a:pPr marL="0" indent="0">
-              <a:buNone/>
-            </a:pPr>
-            <a:r>
-              <a:rPr lang="en-US" sz="1300" dirty="0">
-                <a:solidFill>
-                  <a:srgbClr val="475569"/>
-                </a:solidFill>
-                <a:latin typeface="Calibri" pitchFamily="34" charset="0"/>
-                <a:ea typeface="Calibri" pitchFamily="34" charset="-122"/>
-                <a:cs typeface="Calibri" pitchFamily="34" charset="-120"/>
-              </a:rPr>
-              <a:t>Patch-based NNF — great for large object removal, wasteful on tiny holes.</a:t>
-            </a:r>
-            <a:endParaRPr lang="en-US" sz="1300" dirty="0"/>
-          </a:p>
-        </p:txBody>
-      </p:sp>
-      <p:sp>
-        <p:nvSpPr>
-          <p:cNvPr id="17" name="Shape 15"/>
-          <p:cNvSpPr/>
-          <p:nvPr/>
-        </p:nvSpPr>
-        <p:spPr>
-          <a:xfrm>
-            <a:off x="4581144" y="4462272"/>
-            <a:ext cx="3026664" cy="384048"/>
-          </a:xfrm>
-          <a:prstGeom prst="rect">
-            <a:avLst/>
-          </a:prstGeom>
-          <a:solidFill>
-            <a:srgbClr val="B45309">
-              <a:alpha val="12000"/>
-            </a:srgbClr>
-          </a:solidFill>
-          <a:ln/>
-        </p:spPr>
-        <p:txBody>
-          <a:bodyPr/>
-          <a:lstStyle/>
-          <a:p>
-            <a:endParaRPr lang="zh-TW" altLang="en-US"/>
-          </a:p>
-        </p:txBody>
-      </p:sp>
-      <p:sp>
-        <p:nvSpPr>
-          <p:cNvPr id="18" name="Text 16"/>
-          <p:cNvSpPr/>
-          <p:nvPr/>
-        </p:nvSpPr>
-        <p:spPr>
-          <a:xfrm>
-            <a:off x="4581144" y="4462272"/>
-            <a:ext cx="3026664" cy="384048"/>
-          </a:xfrm>
-          <a:prstGeom prst="rect">
-            <a:avLst/>
-          </a:prstGeom>
-          <a:noFill/>
-          <a:ln/>
-        </p:spPr>
-        <p:txBody>
-          <a:bodyPr wrap="square" lIns="0" tIns="0" rIns="0" bIns="0" rtlCol="0" anchor="ctr"/>
-          <a:lstStyle/>
-          <a:p>
-            <a:pPr marL="0" indent="0" algn="ctr">
-              <a:buNone/>
-            </a:pPr>
-            <a:r>
-              <a:rPr lang="en-US" sz="1300" b="1" dirty="0">
-                <a:solidFill>
-                  <a:srgbClr val="B45309"/>
-                </a:solidFill>
-                <a:latin typeface="Calibri" pitchFamily="34" charset="0"/>
-                <a:ea typeface="Calibri" pitchFamily="34" charset="-122"/>
-                <a:cs typeface="Calibri" pitchFamily="34" charset="-120"/>
-              </a:rPr>
-              <a:t>Over-engineered</a:t>
-            </a:r>
-            <a:endParaRPr lang="en-US" sz="1300" dirty="0"/>
-          </a:p>
-        </p:txBody>
-      </p:sp>
-      <p:sp>
-        <p:nvSpPr>
-          <p:cNvPr id="19" name="Shape 17"/>
-          <p:cNvSpPr/>
-          <p:nvPr/>
-        </p:nvSpPr>
-        <p:spPr>
-          <a:xfrm>
-            <a:off x="8119872" y="2331720"/>
-            <a:ext cx="3502152" cy="2697480"/>
+        </p:spPr>
+        <p:style>
+          <a:lnRef idx="1">
+            <a:schemeClr val="accent1"/>
+          </a:lnRef>
+          <a:fillRef idx="3">
+            <a:schemeClr val="accent1"/>
+          </a:fillRef>
+          <a:effectRef idx="2">
+            <a:schemeClr val="accent1"/>
+          </a:effectRef>
+          <a:fontRef idx="minor">
+            <a:schemeClr val="lt1"/>
+          </a:fontRef>
+        </p:style>
+        <p:txBody>
+          <a:bodyPr rtlCol="0" anchor="ctr"/>
+          <a:lstStyle/>
+          <a:p>
+            <a:pPr algn="ctr"/>
+            <a:endParaRPr/>
+          </a:p>
+        </p:txBody>
+      </p:sp>
+      <p:sp>
+        <p:nvSpPr>
+          <p:cNvPr id="55" name="Rectangle 6">
+            <a:extLst>
+              <a:ext uri="{FF2B5EF4-FFF2-40B4-BE49-F238E27FC236}">
+                <a16:creationId xmlns:a16="http://schemas.microsoft.com/office/drawing/2014/main" id="{71B16C02-7DDC-149F-F6C9-4853DA0DA943}"/>
+              </a:ext>
+            </a:extLst>
+          </p:cNvPr>
+          <p:cNvSpPr/>
+          <p:nvPr/>
+        </p:nvSpPr>
+        <p:spPr>
+          <a:xfrm>
+            <a:off x="640080" y="2407920"/>
+            <a:ext cx="3383280" cy="502920"/>
+          </a:xfrm>
+          <a:prstGeom prst="rect">
+            <a:avLst/>
+          </a:prstGeom>
+          <a:solidFill>
+            <a:srgbClr val="DC2626"/>
+          </a:solidFill>
+          <a:ln>
+            <a:noFill/>
+          </a:ln>
+        </p:spPr>
+        <p:style>
+          <a:lnRef idx="1">
+            <a:schemeClr val="accent1"/>
+          </a:lnRef>
+          <a:fillRef idx="3">
+            <a:schemeClr val="accent1"/>
+          </a:fillRef>
+          <a:effectRef idx="2">
+            <a:schemeClr val="accent1"/>
+          </a:effectRef>
+          <a:fontRef idx="minor">
+            <a:schemeClr val="lt1"/>
+          </a:fontRef>
+        </p:style>
+        <p:txBody>
+          <a:bodyPr rtlCol="0" anchor="ctr"/>
+          <a:lstStyle/>
+          <a:p>
+            <a:pPr algn="ctr"/>
+            <a:endParaRPr/>
+          </a:p>
+        </p:txBody>
+      </p:sp>
+      <p:sp>
+        <p:nvSpPr>
+          <p:cNvPr id="56" name="TextBox 7">
+            <a:extLst>
+              <a:ext uri="{FF2B5EF4-FFF2-40B4-BE49-F238E27FC236}">
+                <a16:creationId xmlns:a16="http://schemas.microsoft.com/office/drawing/2014/main" id="{90DA41A3-7AD8-91F7-DF3D-D3BA905CB72A}"/>
+              </a:ext>
+            </a:extLst>
+          </p:cNvPr>
+          <p:cNvSpPr txBox="1"/>
+          <p:nvPr/>
+        </p:nvSpPr>
+        <p:spPr>
+          <a:xfrm>
+            <a:off x="3314700" y="2705100"/>
+            <a:ext cx="3017520" cy="201168"/>
+          </a:xfrm>
+          <a:prstGeom prst="rect">
+            <a:avLst/>
+          </a:prstGeom>
+          <a:noFill/>
+        </p:spPr>
+        <p:txBody>
+          <a:bodyPr wrap="square">
+            <a:spAutoFit/>
+          </a:bodyPr>
+          <a:lstStyle/>
+          <a:p>
+            <a:pPr algn="l">
+              <a:spcAft>
+                <a:spcPts val="0"/>
+              </a:spcAft>
+              <a:defRPr sz="1000" b="0">
+                <a:solidFill>
+                  <a:srgbClr val="FFFFFF"/>
+                </a:solidFill>
+                <a:latin typeface="Calibri"/>
+              </a:defRPr>
+            </a:pPr>
+            <a:r>
+              <a:rPr dirty="0"/>
+              <a:t>CVPR 2022</a:t>
+            </a:r>
+          </a:p>
+        </p:txBody>
+      </p:sp>
+      <p:sp>
+        <p:nvSpPr>
+          <p:cNvPr id="57" name="TextBox 8">
+            <a:extLst>
+              <a:ext uri="{FF2B5EF4-FFF2-40B4-BE49-F238E27FC236}">
+                <a16:creationId xmlns:a16="http://schemas.microsoft.com/office/drawing/2014/main" id="{170FC516-2904-5DC9-491C-B6F087E73915}"/>
+              </a:ext>
+            </a:extLst>
+          </p:cNvPr>
+          <p:cNvSpPr txBox="1"/>
+          <p:nvPr/>
+        </p:nvSpPr>
+        <p:spPr>
+          <a:xfrm>
+            <a:off x="1037435" y="2556450"/>
+            <a:ext cx="1289453" cy="400110"/>
+          </a:xfrm>
+          <a:prstGeom prst="rect">
+            <a:avLst/>
+          </a:prstGeom>
+          <a:noFill/>
+        </p:spPr>
+        <p:txBody>
+          <a:bodyPr wrap="square">
+            <a:spAutoFit/>
+          </a:bodyPr>
+          <a:lstStyle/>
+          <a:p>
+            <a:pPr algn="l">
+              <a:spcAft>
+                <a:spcPts val="0"/>
+              </a:spcAft>
+              <a:defRPr sz="2000" b="1">
+                <a:solidFill>
+                  <a:srgbClr val="FFFFFF"/>
+                </a:solidFill>
+                <a:latin typeface="Trebuchet MS"/>
+              </a:defRPr>
+            </a:pPr>
+            <a:r>
+              <a:rPr dirty="0" err="1"/>
+              <a:t>RePaint</a:t>
+            </a:r>
+            <a:endParaRPr dirty="0"/>
+          </a:p>
+        </p:txBody>
+      </p:sp>
+      <p:sp>
+        <p:nvSpPr>
+          <p:cNvPr id="58" name="TextBox 9">
+            <a:extLst>
+              <a:ext uri="{FF2B5EF4-FFF2-40B4-BE49-F238E27FC236}">
+                <a16:creationId xmlns:a16="http://schemas.microsoft.com/office/drawing/2014/main" id="{F77A6E00-173F-4A09-F8B9-854095551784}"/>
+              </a:ext>
+            </a:extLst>
+          </p:cNvPr>
+          <p:cNvSpPr txBox="1"/>
+          <p:nvPr/>
+        </p:nvSpPr>
+        <p:spPr>
+          <a:xfrm>
+            <a:off x="822960" y="3048000"/>
+            <a:ext cx="3017520" cy="228600"/>
+          </a:xfrm>
+          <a:prstGeom prst="rect">
+            <a:avLst/>
+          </a:prstGeom>
+          <a:noFill/>
+        </p:spPr>
+        <p:txBody>
+          <a:bodyPr wrap="square">
+            <a:spAutoFit/>
+          </a:bodyPr>
+          <a:lstStyle/>
+          <a:p>
+            <a:pPr algn="l">
+              <a:spcAft>
+                <a:spcPts val="0"/>
+              </a:spcAft>
+              <a:defRPr sz="1200" b="1">
+                <a:solidFill>
+                  <a:srgbClr val="DC2626"/>
+                </a:solidFill>
+                <a:latin typeface="Calibri"/>
+              </a:defRPr>
+            </a:pPr>
+            <a:r>
+              <a:rPr dirty="0"/>
+              <a:t>Diffusion-Based</a:t>
+            </a:r>
+          </a:p>
+        </p:txBody>
+      </p:sp>
+      <p:sp>
+        <p:nvSpPr>
+          <p:cNvPr id="59" name="TextBox 10">
+            <a:extLst>
+              <a:ext uri="{FF2B5EF4-FFF2-40B4-BE49-F238E27FC236}">
+                <a16:creationId xmlns:a16="http://schemas.microsoft.com/office/drawing/2014/main" id="{9B30AF6F-8E30-620A-C96E-A339B62FC90C}"/>
+              </a:ext>
+            </a:extLst>
+          </p:cNvPr>
+          <p:cNvSpPr txBox="1"/>
+          <p:nvPr/>
+        </p:nvSpPr>
+        <p:spPr>
+          <a:xfrm>
+            <a:off x="822960" y="3368040"/>
+            <a:ext cx="3017520" cy="731520"/>
+          </a:xfrm>
+          <a:prstGeom prst="rect">
+            <a:avLst/>
+          </a:prstGeom>
+          <a:noFill/>
+        </p:spPr>
+        <p:txBody>
+          <a:bodyPr wrap="square">
+            <a:spAutoFit/>
+          </a:bodyPr>
+          <a:lstStyle/>
+          <a:p>
+            <a:pPr algn="l">
+              <a:spcAft>
+                <a:spcPts val="0"/>
+              </a:spcAft>
+              <a:defRPr sz="1100" b="0">
+                <a:solidFill>
+                  <a:srgbClr val="4B5563"/>
+                </a:solidFill>
+                <a:latin typeface="Calibri"/>
+              </a:defRPr>
+            </a:pPr>
+            <a:r>
+              <a:rPr dirty="0"/>
+              <a:t>Pretrained DDPM prior;</a:t>
+            </a:r>
+            <a:br>
+              <a:rPr dirty="0"/>
+            </a:br>
+            <a:r>
+              <a:rPr dirty="0"/>
+              <a:t>resample for coherence</a:t>
+            </a:r>
+          </a:p>
+        </p:txBody>
+      </p:sp>
+      <p:pic>
+        <p:nvPicPr>
+          <p:cNvPr id="60" name="Picture 11" descr="repaint_diagram.png">
+            <a:extLst>
+              <a:ext uri="{FF2B5EF4-FFF2-40B4-BE49-F238E27FC236}">
+                <a16:creationId xmlns:a16="http://schemas.microsoft.com/office/drawing/2014/main" id="{55DDC0AF-F4B4-0DEA-9388-FFE0EF80DEDB}"/>
+              </a:ext>
+            </a:extLst>
+          </p:cNvPr>
+          <p:cNvPicPr>
+            <a:picLocks noChangeAspect="1"/>
+          </p:cNvPicPr>
+          <p:nvPr/>
+        </p:nvPicPr>
+        <p:blipFill>
+          <a:blip r:embed="rId3"/>
+          <a:stretch>
+            <a:fillRect/>
+          </a:stretch>
+        </p:blipFill>
+        <p:spPr>
+          <a:xfrm>
+            <a:off x="731520" y="4330839"/>
+            <a:ext cx="3200400" cy="1318366"/>
+          </a:xfrm>
+          <a:prstGeom prst="rect">
+            <a:avLst/>
+          </a:prstGeom>
+        </p:spPr>
+      </p:pic>
+      <p:sp>
+        <p:nvSpPr>
+          <p:cNvPr id="61" name="Rectangle 12">
+            <a:extLst>
+              <a:ext uri="{FF2B5EF4-FFF2-40B4-BE49-F238E27FC236}">
+                <a16:creationId xmlns:a16="http://schemas.microsoft.com/office/drawing/2014/main" id="{D67090E9-A503-B4D1-3D0A-93EF33979B57}"/>
+              </a:ext>
+            </a:extLst>
+          </p:cNvPr>
+          <p:cNvSpPr/>
+          <p:nvPr/>
+        </p:nvSpPr>
+        <p:spPr>
+          <a:xfrm>
+            <a:off x="731520" y="5730240"/>
+            <a:ext cx="3200400" cy="365760"/>
+          </a:xfrm>
+          <a:prstGeom prst="rect">
+            <a:avLst/>
+          </a:prstGeom>
+          <a:solidFill>
+            <a:srgbClr val="F0F2F5"/>
+          </a:solidFill>
+          <a:ln>
+            <a:noFill/>
+          </a:ln>
+        </p:spPr>
+        <p:style>
+          <a:lnRef idx="1">
+            <a:schemeClr val="accent1"/>
+          </a:lnRef>
+          <a:fillRef idx="3">
+            <a:schemeClr val="accent1"/>
+          </a:fillRef>
+          <a:effectRef idx="2">
+            <a:schemeClr val="accent1"/>
+          </a:effectRef>
+          <a:fontRef idx="minor">
+            <a:schemeClr val="lt1"/>
+          </a:fontRef>
+        </p:style>
+        <p:txBody>
+          <a:bodyPr rtlCol="0" anchor="ctr"/>
+          <a:lstStyle/>
+          <a:p>
+            <a:pPr algn="ctr"/>
+            <a:endParaRPr/>
+          </a:p>
+        </p:txBody>
+      </p:sp>
+      <p:sp>
+        <p:nvSpPr>
+          <p:cNvPr id="62" name="TextBox 13">
+            <a:extLst>
+              <a:ext uri="{FF2B5EF4-FFF2-40B4-BE49-F238E27FC236}">
+                <a16:creationId xmlns:a16="http://schemas.microsoft.com/office/drawing/2014/main" id="{0AB2F876-26F0-079C-7975-90488EAEB1DF}"/>
+              </a:ext>
+            </a:extLst>
+          </p:cNvPr>
+          <p:cNvSpPr txBox="1"/>
+          <p:nvPr/>
+        </p:nvSpPr>
+        <p:spPr>
+          <a:xfrm>
+            <a:off x="1037435" y="5828035"/>
+            <a:ext cx="3017520" cy="261610"/>
+          </a:xfrm>
+          <a:prstGeom prst="rect">
+            <a:avLst/>
+          </a:prstGeom>
+          <a:noFill/>
+        </p:spPr>
+        <p:txBody>
+          <a:bodyPr wrap="square">
+            <a:spAutoFit/>
+          </a:bodyPr>
+          <a:lstStyle/>
+          <a:p>
+            <a:pPr algn="ctr">
+              <a:spcAft>
+                <a:spcPts val="0"/>
+              </a:spcAft>
+              <a:defRPr sz="1100" b="1">
+                <a:solidFill>
+                  <a:srgbClr val="DC2626"/>
+                </a:solidFill>
+                <a:latin typeface="Calibri"/>
+              </a:defRPr>
+            </a:pPr>
+            <a:r>
+              <a:rPr dirty="0"/>
+              <a:t>Too heavy for </a:t>
+            </a:r>
+            <a:r>
+              <a:rPr lang="en-US" dirty="0"/>
+              <a:t>small</a:t>
+            </a:r>
+            <a:r>
+              <a:rPr dirty="0"/>
+              <a:t> pixels</a:t>
+            </a:r>
+          </a:p>
+        </p:txBody>
+      </p:sp>
+      <p:sp>
+        <p:nvSpPr>
+          <p:cNvPr id="63" name="Rectangle 14">
+            <a:extLst>
+              <a:ext uri="{FF2B5EF4-FFF2-40B4-BE49-F238E27FC236}">
+                <a16:creationId xmlns:a16="http://schemas.microsoft.com/office/drawing/2014/main" id="{2D417FB3-25C8-F3EE-80DE-CF6D7A48EF41}"/>
+              </a:ext>
+            </a:extLst>
+          </p:cNvPr>
+          <p:cNvSpPr/>
+          <p:nvPr/>
+        </p:nvSpPr>
+        <p:spPr>
+          <a:xfrm>
+            <a:off x="4434840" y="2407919"/>
+            <a:ext cx="3383280" cy="3712465"/>
           </a:xfrm>
           <a:prstGeom prst="rect">
             <a:avLst/>
@@ -4898,313 +5000,781 @@
           </a:solidFill>
           <a:ln w="12700">
             <a:solidFill>
-              <a:srgbClr val="E2E8F0"/>
+              <a:srgbClr val="D1D5DB"/>
             </a:solidFill>
-            <a:prstDash val="solid"/>
           </a:ln>
-          <a:effectLst>
-            <a:outerShdw blurRad="88900" dist="38100" dir="8100000" algn="bl" rotWithShape="0">
-              <a:srgbClr val="000000">
-                <a:alpha val="10000"/>
-              </a:srgbClr>
-            </a:outerShdw>
-          </a:effectLst>
-        </p:spPr>
-        <p:txBody>
-          <a:bodyPr/>
-          <a:lstStyle/>
-          <a:p>
-            <a:endParaRPr lang="zh-TW" altLang="en-US"/>
-          </a:p>
-        </p:txBody>
-      </p:sp>
-      <p:sp>
-        <p:nvSpPr>
-          <p:cNvPr id="20" name="Shape 18"/>
-          <p:cNvSpPr/>
-          <p:nvPr/>
-        </p:nvSpPr>
-        <p:spPr>
-          <a:xfrm>
-            <a:off x="8119872" y="2331720"/>
-            <a:ext cx="82296" cy="2697480"/>
-          </a:xfrm>
-          <a:prstGeom prst="rect">
-            <a:avLst/>
-          </a:prstGeom>
-          <a:solidFill>
-            <a:srgbClr val="059669"/>
-          </a:solidFill>
-          <a:ln/>
-        </p:spPr>
-        <p:txBody>
-          <a:bodyPr/>
-          <a:lstStyle/>
-          <a:p>
-            <a:endParaRPr lang="zh-TW" altLang="en-US"/>
-          </a:p>
-        </p:txBody>
-      </p:sp>
-      <p:sp>
-        <p:nvSpPr>
-          <p:cNvPr id="21" name="Text 19"/>
-          <p:cNvSpPr/>
-          <p:nvPr/>
-        </p:nvSpPr>
-        <p:spPr>
-          <a:xfrm>
-            <a:off x="8357616" y="2532888"/>
-            <a:ext cx="3044952" cy="256032"/>
-          </a:xfrm>
-          <a:prstGeom prst="rect">
-            <a:avLst/>
-          </a:prstGeom>
-          <a:noFill/>
-          <a:ln/>
-        </p:spPr>
-        <p:txBody>
-          <a:bodyPr wrap="square" lIns="0" tIns="0" rIns="0" bIns="0" rtlCol="0" anchor="ctr"/>
-          <a:lstStyle/>
-          <a:p>
-            <a:pPr marL="0" indent="0">
-              <a:buNone/>
-            </a:pPr>
-            <a:r>
-              <a:rPr lang="en-US" sz="1050" b="1" kern="0" spc="150" dirty="0">
-                <a:solidFill>
-                  <a:srgbClr val="64748B"/>
-                </a:solidFill>
-                <a:latin typeface="Trebuchet MS" pitchFamily="34" charset="0"/>
-                <a:ea typeface="Trebuchet MS" pitchFamily="34" charset="-122"/>
-                <a:cs typeface="Trebuchet MS" pitchFamily="34" charset="-120"/>
-              </a:rPr>
-              <a:t>JGT 2004</a:t>
-            </a:r>
-            <a:endParaRPr lang="en-US" sz="1050" dirty="0"/>
-          </a:p>
-        </p:txBody>
-      </p:sp>
-      <p:sp>
-        <p:nvSpPr>
-          <p:cNvPr id="22" name="Text 20"/>
-          <p:cNvSpPr/>
-          <p:nvPr/>
-        </p:nvSpPr>
-        <p:spPr>
-          <a:xfrm>
-            <a:off x="8357616" y="2788920"/>
-            <a:ext cx="3044952" cy="384048"/>
-          </a:xfrm>
-          <a:prstGeom prst="rect">
-            <a:avLst/>
-          </a:prstGeom>
-          <a:noFill/>
-          <a:ln/>
-        </p:spPr>
-        <p:txBody>
-          <a:bodyPr wrap="square" lIns="0" tIns="0" rIns="0" bIns="0" rtlCol="0" anchor="ctr"/>
-          <a:lstStyle/>
-          <a:p>
-            <a:pPr marL="0" indent="0">
-              <a:buNone/>
-            </a:pPr>
-            <a:r>
-              <a:rPr lang="en-US" sz="1900" b="1" dirty="0">
-                <a:solidFill>
-                  <a:srgbClr val="1E2A4A"/>
-                </a:solidFill>
-                <a:latin typeface="Trebuchet MS" pitchFamily="34" charset="0"/>
-                <a:ea typeface="Trebuchet MS" pitchFamily="34" charset="-122"/>
-                <a:cs typeface="Trebuchet MS" pitchFamily="34" charset="-120"/>
-              </a:rPr>
-              <a:t>Telea FMM</a:t>
-            </a:r>
-            <a:endParaRPr lang="en-US" sz="1900" dirty="0"/>
-          </a:p>
-        </p:txBody>
-      </p:sp>
-      <p:sp>
-        <p:nvSpPr>
-          <p:cNvPr id="23" name="Text 21"/>
-          <p:cNvSpPr/>
-          <p:nvPr/>
-        </p:nvSpPr>
-        <p:spPr>
-          <a:xfrm>
-            <a:off x="8357616" y="3264408"/>
-            <a:ext cx="3044952" cy="1097280"/>
-          </a:xfrm>
-          <a:prstGeom prst="rect">
-            <a:avLst/>
-          </a:prstGeom>
-          <a:noFill/>
-          <a:ln/>
-        </p:spPr>
-        <p:txBody>
-          <a:bodyPr wrap="square" lIns="0" tIns="0" rIns="0" bIns="0" rtlCol="0" anchor="t"/>
-          <a:lstStyle/>
-          <a:p>
-            <a:pPr marL="0" indent="0">
-              <a:buNone/>
-            </a:pPr>
-            <a:r>
-              <a:rPr lang="en-US" sz="1300" dirty="0">
-                <a:solidFill>
-                  <a:srgbClr val="475569"/>
-                </a:solidFill>
-                <a:latin typeface="Calibri" pitchFamily="34" charset="0"/>
-                <a:ea typeface="Calibri" pitchFamily="34" charset="-122"/>
-                <a:cs typeface="Calibri" pitchFamily="34" charset="-120"/>
-              </a:rPr>
-              <a:t>Boundary diffusion — ms-class, deterministic, seamless on 1–5 px holes.</a:t>
-            </a:r>
-            <a:endParaRPr lang="en-US" sz="1300" dirty="0"/>
-          </a:p>
-        </p:txBody>
-      </p:sp>
-      <p:sp>
-        <p:nvSpPr>
-          <p:cNvPr id="24" name="Shape 22"/>
-          <p:cNvSpPr/>
-          <p:nvPr/>
-        </p:nvSpPr>
-        <p:spPr>
-          <a:xfrm>
-            <a:off x="8357616" y="4462272"/>
-            <a:ext cx="3026664" cy="384048"/>
-          </a:xfrm>
-          <a:prstGeom prst="rect">
-            <a:avLst/>
-          </a:prstGeom>
-          <a:solidFill>
-            <a:srgbClr val="059669">
-              <a:alpha val="12000"/>
-            </a:srgbClr>
-          </a:solidFill>
-          <a:ln/>
-        </p:spPr>
-        <p:txBody>
-          <a:bodyPr/>
-          <a:lstStyle/>
-          <a:p>
-            <a:endParaRPr lang="zh-TW" altLang="en-US"/>
-          </a:p>
-        </p:txBody>
-      </p:sp>
-      <p:sp>
-        <p:nvSpPr>
-          <p:cNvPr id="25" name="Text 23"/>
-          <p:cNvSpPr/>
-          <p:nvPr/>
-        </p:nvSpPr>
-        <p:spPr>
-          <a:xfrm>
-            <a:off x="8357616" y="4462272"/>
-            <a:ext cx="3026664" cy="384048"/>
-          </a:xfrm>
-          <a:prstGeom prst="rect">
-            <a:avLst/>
-          </a:prstGeom>
-          <a:noFill/>
-          <a:ln/>
-        </p:spPr>
-        <p:txBody>
-          <a:bodyPr wrap="square" lIns="0" tIns="0" rIns="0" bIns="0" rtlCol="0" anchor="ctr"/>
-          <a:lstStyle/>
-          <a:p>
-            <a:pPr marL="0" indent="0" algn="ctr">
-              <a:buNone/>
-            </a:pPr>
-            <a:r>
-              <a:rPr lang="en-US" sz="1300" b="1" dirty="0">
-                <a:solidFill>
-                  <a:srgbClr val="059669"/>
-                </a:solidFill>
-                <a:latin typeface="Calibri" pitchFamily="34" charset="0"/>
-                <a:ea typeface="Calibri" pitchFamily="34" charset="-122"/>
-                <a:cs typeface="Calibri" pitchFamily="34" charset="-120"/>
-              </a:rPr>
-              <a:t>Chosen</a:t>
-            </a:r>
-            <a:endParaRPr lang="en-US" sz="1300" dirty="0"/>
-          </a:p>
-        </p:txBody>
-      </p:sp>
-      <p:sp>
-        <p:nvSpPr>
-          <p:cNvPr id="26" name="Text 24"/>
-          <p:cNvSpPr/>
-          <p:nvPr/>
-        </p:nvSpPr>
-        <p:spPr>
-          <a:xfrm>
-            <a:off x="566928" y="6473952"/>
-            <a:ext cx="7315200" cy="274320"/>
-          </a:xfrm>
-          <a:prstGeom prst="rect">
-            <a:avLst/>
-          </a:prstGeom>
-          <a:noFill/>
-          <a:ln/>
-        </p:spPr>
-        <p:txBody>
-          <a:bodyPr wrap="square" lIns="0" tIns="0" rIns="0" bIns="0" rtlCol="0" anchor="ctr"/>
-          <a:lstStyle/>
-          <a:p>
-            <a:pPr marL="0" indent="0">
-              <a:buNone/>
-            </a:pPr>
-            <a:r>
-              <a:rPr lang="en-US" sz="900" dirty="0">
-                <a:solidFill>
-                  <a:srgbClr val="64748B"/>
-                </a:solidFill>
-                <a:latin typeface="Calibri" pitchFamily="34" charset="0"/>
-                <a:ea typeface="Calibri" pitchFamily="34" charset="-122"/>
-                <a:cs typeface="Calibri" pitchFamily="34" charset="-120"/>
-              </a:rPr>
-              <a:t>SDXL VAE Noise-Fix  ·  Traditional-CV ComfyUI Node</a:t>
-            </a:r>
-            <a:endParaRPr lang="en-US" sz="900" dirty="0"/>
-          </a:p>
-        </p:txBody>
-      </p:sp>
-      <p:sp>
-        <p:nvSpPr>
-          <p:cNvPr id="27" name="Text 25"/>
-          <p:cNvSpPr/>
-          <p:nvPr/>
-        </p:nvSpPr>
-        <p:spPr>
-          <a:xfrm>
-            <a:off x="11073384" y="6473952"/>
-            <a:ext cx="548640" cy="274320"/>
-          </a:xfrm>
-          <a:prstGeom prst="rect">
-            <a:avLst/>
-          </a:prstGeom>
-          <a:noFill/>
-          <a:ln/>
-        </p:spPr>
-        <p:txBody>
-          <a:bodyPr wrap="square" lIns="0" tIns="0" rIns="0" bIns="0" rtlCol="0" anchor="ctr"/>
-          <a:lstStyle/>
-          <a:p>
-            <a:pPr marL="0" indent="0" algn="r">
-              <a:buNone/>
-            </a:pPr>
-            <a:r>
-              <a:rPr lang="en-US" sz="900" dirty="0">
-                <a:solidFill>
-                  <a:srgbClr val="64748B"/>
-                </a:solidFill>
-                <a:latin typeface="Calibri" pitchFamily="34" charset="0"/>
-                <a:ea typeface="Calibri" pitchFamily="34" charset="-122"/>
-                <a:cs typeface="Calibri" pitchFamily="34" charset="-120"/>
-              </a:rPr>
-              <a:t>3</a:t>
-            </a:r>
-            <a:endParaRPr lang="en-US" sz="900" dirty="0"/>
+        </p:spPr>
+        <p:style>
+          <a:lnRef idx="1">
+            <a:schemeClr val="accent1"/>
+          </a:lnRef>
+          <a:fillRef idx="3">
+            <a:schemeClr val="accent1"/>
+          </a:fillRef>
+          <a:effectRef idx="2">
+            <a:schemeClr val="accent1"/>
+          </a:effectRef>
+          <a:fontRef idx="minor">
+            <a:schemeClr val="lt1"/>
+          </a:fontRef>
+        </p:style>
+        <p:txBody>
+          <a:bodyPr rtlCol="0" anchor="ctr"/>
+          <a:lstStyle/>
+          <a:p>
+            <a:pPr algn="ctr"/>
+            <a:endParaRPr/>
+          </a:p>
+        </p:txBody>
+      </p:sp>
+      <p:sp>
+        <p:nvSpPr>
+          <p:cNvPr id="64" name="Rectangle 15">
+            <a:extLst>
+              <a:ext uri="{FF2B5EF4-FFF2-40B4-BE49-F238E27FC236}">
+                <a16:creationId xmlns:a16="http://schemas.microsoft.com/office/drawing/2014/main" id="{0BBFA166-04E5-C5D6-0076-884BABF028F5}"/>
+              </a:ext>
+            </a:extLst>
+          </p:cNvPr>
+          <p:cNvSpPr/>
+          <p:nvPr/>
+        </p:nvSpPr>
+        <p:spPr>
+          <a:xfrm>
+            <a:off x="4434840" y="2407920"/>
+            <a:ext cx="3383280" cy="502920"/>
+          </a:xfrm>
+          <a:prstGeom prst="rect">
+            <a:avLst/>
+          </a:prstGeom>
+          <a:solidFill>
+            <a:srgbClr val="EA880F"/>
+          </a:solidFill>
+          <a:ln>
+            <a:noFill/>
+          </a:ln>
+        </p:spPr>
+        <p:style>
+          <a:lnRef idx="1">
+            <a:schemeClr val="accent1"/>
+          </a:lnRef>
+          <a:fillRef idx="3">
+            <a:schemeClr val="accent1"/>
+          </a:fillRef>
+          <a:effectRef idx="2">
+            <a:schemeClr val="accent1"/>
+          </a:effectRef>
+          <a:fontRef idx="minor">
+            <a:schemeClr val="lt1"/>
+          </a:fontRef>
+        </p:style>
+        <p:txBody>
+          <a:bodyPr rtlCol="0" anchor="ctr"/>
+          <a:lstStyle/>
+          <a:p>
+            <a:pPr algn="ctr"/>
+            <a:endParaRPr/>
+          </a:p>
+        </p:txBody>
+      </p:sp>
+      <p:sp>
+        <p:nvSpPr>
+          <p:cNvPr id="65" name="TextBox 16">
+            <a:extLst>
+              <a:ext uri="{FF2B5EF4-FFF2-40B4-BE49-F238E27FC236}">
+                <a16:creationId xmlns:a16="http://schemas.microsoft.com/office/drawing/2014/main" id="{CF835506-6914-A7F7-A7C1-BF6054E8264D}"/>
+              </a:ext>
+            </a:extLst>
+          </p:cNvPr>
+          <p:cNvSpPr txBox="1"/>
+          <p:nvPr/>
+        </p:nvSpPr>
+        <p:spPr>
+          <a:xfrm>
+            <a:off x="7138452" y="2681179"/>
+            <a:ext cx="3017520" cy="246221"/>
+          </a:xfrm>
+          <a:prstGeom prst="rect">
+            <a:avLst/>
+          </a:prstGeom>
+          <a:noFill/>
+        </p:spPr>
+        <p:txBody>
+          <a:bodyPr wrap="square">
+            <a:spAutoFit/>
+          </a:bodyPr>
+          <a:lstStyle/>
+          <a:p>
+            <a:pPr algn="l">
+              <a:spcAft>
+                <a:spcPts val="0"/>
+              </a:spcAft>
+              <a:defRPr sz="1000" b="0">
+                <a:solidFill>
+                  <a:srgbClr val="FFFFFF"/>
+                </a:solidFill>
+                <a:latin typeface="Calibri"/>
+              </a:defRPr>
+            </a:pPr>
+            <a:r>
+              <a:rPr lang="en-US" altLang="zh-TW" dirty="0"/>
+              <a:t>ACM</a:t>
+            </a:r>
+            <a:r>
+              <a:rPr dirty="0"/>
+              <a:t> 2009</a:t>
+            </a:r>
+          </a:p>
+        </p:txBody>
+      </p:sp>
+      <p:sp>
+        <p:nvSpPr>
+          <p:cNvPr id="66" name="TextBox 17">
+            <a:extLst>
+              <a:ext uri="{FF2B5EF4-FFF2-40B4-BE49-F238E27FC236}">
+                <a16:creationId xmlns:a16="http://schemas.microsoft.com/office/drawing/2014/main" id="{5556B1EA-6C49-6FAA-9906-DC6B4193E44A}"/>
+              </a:ext>
+            </a:extLst>
+          </p:cNvPr>
+          <p:cNvSpPr txBox="1"/>
+          <p:nvPr/>
+        </p:nvSpPr>
+        <p:spPr>
+          <a:xfrm>
+            <a:off x="4617720" y="2556450"/>
+            <a:ext cx="3108960" cy="400110"/>
+          </a:xfrm>
+          <a:prstGeom prst="rect">
+            <a:avLst/>
+          </a:prstGeom>
+          <a:noFill/>
+        </p:spPr>
+        <p:txBody>
+          <a:bodyPr wrap="square">
+            <a:spAutoFit/>
+          </a:bodyPr>
+          <a:lstStyle/>
+          <a:p>
+            <a:pPr algn="l">
+              <a:spcAft>
+                <a:spcPts val="0"/>
+              </a:spcAft>
+              <a:defRPr sz="2000" b="1">
+                <a:solidFill>
+                  <a:srgbClr val="FFFFFF"/>
+                </a:solidFill>
+                <a:latin typeface="Trebuchet MS"/>
+              </a:defRPr>
+            </a:pPr>
+            <a:r>
+              <a:rPr dirty="0" err="1"/>
+              <a:t>PatchMatch</a:t>
+            </a:r>
+            <a:endParaRPr dirty="0"/>
+          </a:p>
+        </p:txBody>
+      </p:sp>
+      <p:sp>
+        <p:nvSpPr>
+          <p:cNvPr id="67" name="TextBox 18">
+            <a:extLst>
+              <a:ext uri="{FF2B5EF4-FFF2-40B4-BE49-F238E27FC236}">
+                <a16:creationId xmlns:a16="http://schemas.microsoft.com/office/drawing/2014/main" id="{BF3D94C7-147C-CB1A-FA94-2695BC616393}"/>
+              </a:ext>
+            </a:extLst>
+          </p:cNvPr>
+          <p:cNvSpPr txBox="1"/>
+          <p:nvPr/>
+        </p:nvSpPr>
+        <p:spPr>
+          <a:xfrm>
+            <a:off x="4617720" y="3048000"/>
+            <a:ext cx="3017520" cy="228600"/>
+          </a:xfrm>
+          <a:prstGeom prst="rect">
+            <a:avLst/>
+          </a:prstGeom>
+          <a:noFill/>
+        </p:spPr>
+        <p:txBody>
+          <a:bodyPr wrap="square">
+            <a:spAutoFit/>
+          </a:bodyPr>
+          <a:lstStyle/>
+          <a:p>
+            <a:pPr algn="l">
+              <a:spcAft>
+                <a:spcPts val="0"/>
+              </a:spcAft>
+              <a:defRPr sz="1200" b="1">
+                <a:solidFill>
+                  <a:srgbClr val="EA880F"/>
+                </a:solidFill>
+                <a:latin typeface="Calibri"/>
+              </a:defRPr>
+            </a:pPr>
+            <a:r>
+              <a:rPr dirty="0"/>
+              <a:t>Patch-Based NNF</a:t>
+            </a:r>
+          </a:p>
+        </p:txBody>
+      </p:sp>
+      <p:sp>
+        <p:nvSpPr>
+          <p:cNvPr id="68" name="TextBox 19">
+            <a:extLst>
+              <a:ext uri="{FF2B5EF4-FFF2-40B4-BE49-F238E27FC236}">
+                <a16:creationId xmlns:a16="http://schemas.microsoft.com/office/drawing/2014/main" id="{4247F4DD-2E92-5755-455F-A3AB4245D6FA}"/>
+              </a:ext>
+            </a:extLst>
+          </p:cNvPr>
+          <p:cNvSpPr txBox="1"/>
+          <p:nvPr/>
+        </p:nvSpPr>
+        <p:spPr>
+          <a:xfrm>
+            <a:off x="4617720" y="3368040"/>
+            <a:ext cx="3017520" cy="731520"/>
+          </a:xfrm>
+          <a:prstGeom prst="rect">
+            <a:avLst/>
+          </a:prstGeom>
+          <a:noFill/>
+        </p:spPr>
+        <p:txBody>
+          <a:bodyPr wrap="square">
+            <a:spAutoFit/>
+          </a:bodyPr>
+          <a:lstStyle/>
+          <a:p>
+            <a:pPr algn="l">
+              <a:spcAft>
+                <a:spcPts val="0"/>
+              </a:spcAft>
+              <a:defRPr sz="1100" b="0">
+                <a:solidFill>
+                  <a:srgbClr val="4B5563"/>
+                </a:solidFill>
+                <a:latin typeface="Calibri"/>
+              </a:defRPr>
+            </a:pPr>
+            <a:r>
+              <a:t>Randomized NNF search;</a:t>
+            </a:r>
+            <a:br/>
+            <a:r>
+              <a:t>patch copy from full image</a:t>
+            </a:r>
+          </a:p>
+        </p:txBody>
+      </p:sp>
+      <p:pic>
+        <p:nvPicPr>
+          <p:cNvPr id="69" name="Picture 20" descr="patchmatch_diagram.png">
+            <a:extLst>
+              <a:ext uri="{FF2B5EF4-FFF2-40B4-BE49-F238E27FC236}">
+                <a16:creationId xmlns:a16="http://schemas.microsoft.com/office/drawing/2014/main" id="{9F4C1C64-034A-F3F4-E6DB-5DAA08635414}"/>
+              </a:ext>
+            </a:extLst>
+          </p:cNvPr>
+          <p:cNvPicPr>
+            <a:picLocks noChangeAspect="1"/>
+          </p:cNvPicPr>
+          <p:nvPr/>
+        </p:nvPicPr>
+        <p:blipFill>
+          <a:blip r:embed="rId4"/>
+          <a:stretch>
+            <a:fillRect/>
+          </a:stretch>
+        </p:blipFill>
+        <p:spPr>
+          <a:xfrm>
+            <a:off x="4526280" y="4236720"/>
+            <a:ext cx="3200400" cy="1197291"/>
+          </a:xfrm>
+          <a:prstGeom prst="rect">
+            <a:avLst/>
+          </a:prstGeom>
+        </p:spPr>
+      </p:pic>
+      <p:sp>
+        <p:nvSpPr>
+          <p:cNvPr id="70" name="Rectangle 21">
+            <a:extLst>
+              <a:ext uri="{FF2B5EF4-FFF2-40B4-BE49-F238E27FC236}">
+                <a16:creationId xmlns:a16="http://schemas.microsoft.com/office/drawing/2014/main" id="{BFD4F685-D241-B5A4-768A-A3CCA61F7413}"/>
+              </a:ext>
+            </a:extLst>
+          </p:cNvPr>
+          <p:cNvSpPr/>
+          <p:nvPr/>
+        </p:nvSpPr>
+        <p:spPr>
+          <a:xfrm>
+            <a:off x="4495647" y="5711952"/>
+            <a:ext cx="3200400" cy="365760"/>
+          </a:xfrm>
+          <a:prstGeom prst="rect">
+            <a:avLst/>
+          </a:prstGeom>
+          <a:solidFill>
+            <a:srgbClr val="F0F2F5"/>
+          </a:solidFill>
+          <a:ln>
+            <a:noFill/>
+          </a:ln>
+        </p:spPr>
+        <p:style>
+          <a:lnRef idx="1">
+            <a:schemeClr val="accent1"/>
+          </a:lnRef>
+          <a:fillRef idx="3">
+            <a:schemeClr val="accent1"/>
+          </a:fillRef>
+          <a:effectRef idx="2">
+            <a:schemeClr val="accent1"/>
+          </a:effectRef>
+          <a:fontRef idx="minor">
+            <a:schemeClr val="lt1"/>
+          </a:fontRef>
+        </p:style>
+        <p:txBody>
+          <a:bodyPr rtlCol="0" anchor="ctr"/>
+          <a:lstStyle/>
+          <a:p>
+            <a:pPr algn="ctr"/>
+            <a:endParaRPr/>
+          </a:p>
+        </p:txBody>
+      </p:sp>
+      <p:sp>
+        <p:nvSpPr>
+          <p:cNvPr id="71" name="TextBox 22">
+            <a:extLst>
+              <a:ext uri="{FF2B5EF4-FFF2-40B4-BE49-F238E27FC236}">
+                <a16:creationId xmlns:a16="http://schemas.microsoft.com/office/drawing/2014/main" id="{BF703962-0845-D6A3-444D-12EA26D2E687}"/>
+              </a:ext>
+            </a:extLst>
+          </p:cNvPr>
+          <p:cNvSpPr txBox="1"/>
+          <p:nvPr/>
+        </p:nvSpPr>
+        <p:spPr>
+          <a:xfrm>
+            <a:off x="4617720" y="5757672"/>
+            <a:ext cx="3017520" cy="274320"/>
+          </a:xfrm>
+          <a:prstGeom prst="rect">
+            <a:avLst/>
+          </a:prstGeom>
+          <a:noFill/>
+        </p:spPr>
+        <p:txBody>
+          <a:bodyPr wrap="square">
+            <a:spAutoFit/>
+          </a:bodyPr>
+          <a:lstStyle/>
+          <a:p>
+            <a:pPr algn="ctr">
+              <a:spcAft>
+                <a:spcPts val="0"/>
+              </a:spcAft>
+              <a:defRPr sz="1100" b="1">
+                <a:solidFill>
+                  <a:srgbClr val="EA880F"/>
+                </a:solidFill>
+                <a:latin typeface="Calibri"/>
+              </a:defRPr>
+            </a:pPr>
+            <a:r>
+              <a:rPr dirty="0"/>
+              <a:t>Over-engineered for tiny holes</a:t>
+            </a:r>
+          </a:p>
+        </p:txBody>
+      </p:sp>
+      <p:sp>
+        <p:nvSpPr>
+          <p:cNvPr id="72" name="Rectangle 23">
+            <a:extLst>
+              <a:ext uri="{FF2B5EF4-FFF2-40B4-BE49-F238E27FC236}">
+                <a16:creationId xmlns:a16="http://schemas.microsoft.com/office/drawing/2014/main" id="{EE344E90-C7BC-5DC2-E5BA-4930809DC09C}"/>
+              </a:ext>
+            </a:extLst>
+          </p:cNvPr>
+          <p:cNvSpPr/>
+          <p:nvPr/>
+        </p:nvSpPr>
+        <p:spPr>
+          <a:xfrm>
+            <a:off x="8229600" y="2407919"/>
+            <a:ext cx="3383280" cy="3712465"/>
+          </a:xfrm>
+          <a:prstGeom prst="rect">
+            <a:avLst/>
+          </a:prstGeom>
+          <a:solidFill>
+            <a:srgbClr val="FFFFFF"/>
+          </a:solidFill>
+          <a:ln w="12700">
+            <a:solidFill>
+              <a:srgbClr val="D1D5DB"/>
+            </a:solidFill>
+          </a:ln>
+        </p:spPr>
+        <p:style>
+          <a:lnRef idx="1">
+            <a:schemeClr val="accent1"/>
+          </a:lnRef>
+          <a:fillRef idx="3">
+            <a:schemeClr val="accent1"/>
+          </a:fillRef>
+          <a:effectRef idx="2">
+            <a:schemeClr val="accent1"/>
+          </a:effectRef>
+          <a:fontRef idx="minor">
+            <a:schemeClr val="lt1"/>
+          </a:fontRef>
+        </p:style>
+        <p:txBody>
+          <a:bodyPr rtlCol="0" anchor="ctr"/>
+          <a:lstStyle/>
+          <a:p>
+            <a:pPr algn="ctr"/>
+            <a:endParaRPr/>
+          </a:p>
+        </p:txBody>
+      </p:sp>
+      <p:sp>
+        <p:nvSpPr>
+          <p:cNvPr id="73" name="Rectangle 24">
+            <a:extLst>
+              <a:ext uri="{FF2B5EF4-FFF2-40B4-BE49-F238E27FC236}">
+                <a16:creationId xmlns:a16="http://schemas.microsoft.com/office/drawing/2014/main" id="{CF11B7E6-69A5-59C8-49E6-294FDA86C843}"/>
+              </a:ext>
+            </a:extLst>
+          </p:cNvPr>
+          <p:cNvSpPr/>
+          <p:nvPr/>
+        </p:nvSpPr>
+        <p:spPr>
+          <a:xfrm>
+            <a:off x="8229600" y="2407920"/>
+            <a:ext cx="3383280" cy="502920"/>
+          </a:xfrm>
+          <a:prstGeom prst="rect">
+            <a:avLst/>
+          </a:prstGeom>
+          <a:solidFill>
+            <a:srgbClr val="16A34A"/>
+          </a:solidFill>
+          <a:ln>
+            <a:noFill/>
+          </a:ln>
+        </p:spPr>
+        <p:style>
+          <a:lnRef idx="1">
+            <a:schemeClr val="accent1"/>
+          </a:lnRef>
+          <a:fillRef idx="3">
+            <a:schemeClr val="accent1"/>
+          </a:fillRef>
+          <a:effectRef idx="2">
+            <a:schemeClr val="accent1"/>
+          </a:effectRef>
+          <a:fontRef idx="minor">
+            <a:schemeClr val="lt1"/>
+          </a:fontRef>
+        </p:style>
+        <p:txBody>
+          <a:bodyPr rtlCol="0" anchor="ctr"/>
+          <a:lstStyle/>
+          <a:p>
+            <a:pPr algn="ctr"/>
+            <a:endParaRPr/>
+          </a:p>
+        </p:txBody>
+      </p:sp>
+      <p:sp>
+        <p:nvSpPr>
+          <p:cNvPr id="74" name="TextBox 26">
+            <a:extLst>
+              <a:ext uri="{FF2B5EF4-FFF2-40B4-BE49-F238E27FC236}">
+                <a16:creationId xmlns:a16="http://schemas.microsoft.com/office/drawing/2014/main" id="{4029B4A4-2D7C-5FA1-E7E7-9765C80AAB19}"/>
+              </a:ext>
+            </a:extLst>
+          </p:cNvPr>
+          <p:cNvSpPr txBox="1"/>
+          <p:nvPr/>
+        </p:nvSpPr>
+        <p:spPr>
+          <a:xfrm>
+            <a:off x="8412480" y="2542849"/>
+            <a:ext cx="3017520" cy="256032"/>
+          </a:xfrm>
+          <a:prstGeom prst="rect">
+            <a:avLst/>
+          </a:prstGeom>
+          <a:noFill/>
+        </p:spPr>
+        <p:txBody>
+          <a:bodyPr wrap="square">
+            <a:spAutoFit/>
+          </a:bodyPr>
+          <a:lstStyle/>
+          <a:p>
+            <a:pPr algn="l">
+              <a:spcAft>
+                <a:spcPts val="0"/>
+              </a:spcAft>
+              <a:defRPr sz="2000" b="1">
+                <a:solidFill>
+                  <a:srgbClr val="FFFFFF"/>
+                </a:solidFill>
+                <a:latin typeface="Trebuchet MS"/>
+              </a:defRPr>
+            </a:pPr>
+            <a:r>
+              <a:rPr dirty="0" err="1"/>
+              <a:t>Telea</a:t>
+            </a:r>
+            <a:r>
+              <a:rPr dirty="0"/>
+              <a:t> FMM</a:t>
+            </a:r>
+          </a:p>
+        </p:txBody>
+      </p:sp>
+      <p:sp>
+        <p:nvSpPr>
+          <p:cNvPr id="75" name="TextBox 27">
+            <a:extLst>
+              <a:ext uri="{FF2B5EF4-FFF2-40B4-BE49-F238E27FC236}">
+                <a16:creationId xmlns:a16="http://schemas.microsoft.com/office/drawing/2014/main" id="{FD72F84E-9B08-5452-6B32-244FF9D95A4D}"/>
+              </a:ext>
+            </a:extLst>
+          </p:cNvPr>
+          <p:cNvSpPr txBox="1"/>
+          <p:nvPr/>
+        </p:nvSpPr>
+        <p:spPr>
+          <a:xfrm>
+            <a:off x="8412480" y="3048000"/>
+            <a:ext cx="3017520" cy="276999"/>
+          </a:xfrm>
+          <a:prstGeom prst="rect">
+            <a:avLst/>
+          </a:prstGeom>
+          <a:noFill/>
+        </p:spPr>
+        <p:txBody>
+          <a:bodyPr wrap="square">
+            <a:spAutoFit/>
+          </a:bodyPr>
+          <a:lstStyle/>
+          <a:p>
+            <a:pPr>
+              <a:defRPr sz="1200" b="1">
+                <a:solidFill>
+                  <a:srgbClr val="16A34A"/>
+                </a:solidFill>
+                <a:latin typeface="Calibri"/>
+              </a:defRPr>
+            </a:pPr>
+            <a:r>
+              <a:rPr lang="en-US" altLang="zh-TW" sz="1200" b="1" dirty="0"/>
+              <a:t>Boundary Diffusion</a:t>
+            </a:r>
+            <a:endParaRPr dirty="0"/>
+          </a:p>
+        </p:txBody>
+      </p:sp>
+      <p:sp>
+        <p:nvSpPr>
+          <p:cNvPr id="76" name="TextBox 28">
+            <a:extLst>
+              <a:ext uri="{FF2B5EF4-FFF2-40B4-BE49-F238E27FC236}">
+                <a16:creationId xmlns:a16="http://schemas.microsoft.com/office/drawing/2014/main" id="{2C80E8A8-502B-F2E4-365F-FC48BDCB577F}"/>
+              </a:ext>
+            </a:extLst>
+          </p:cNvPr>
+          <p:cNvSpPr txBox="1"/>
+          <p:nvPr/>
+        </p:nvSpPr>
+        <p:spPr>
+          <a:xfrm>
+            <a:off x="8412480" y="3368040"/>
+            <a:ext cx="3017520" cy="731520"/>
+          </a:xfrm>
+          <a:prstGeom prst="rect">
+            <a:avLst/>
+          </a:prstGeom>
+          <a:noFill/>
+        </p:spPr>
+        <p:txBody>
+          <a:bodyPr wrap="square">
+            <a:spAutoFit/>
+          </a:bodyPr>
+          <a:lstStyle/>
+          <a:p>
+            <a:pPr algn="l">
+              <a:spcAft>
+                <a:spcPts val="0"/>
+              </a:spcAft>
+              <a:defRPr sz="1100" b="0">
+                <a:solidFill>
+                  <a:srgbClr val="4B5563"/>
+                </a:solidFill>
+                <a:latin typeface="Calibri"/>
+              </a:defRPr>
+            </a:pPr>
+            <a:r>
+              <a:t>Boundary propagation;</a:t>
+            </a:r>
+            <a:br/>
+            <a:r>
+              <a:t>isophote-preserving avg</a:t>
+            </a:r>
+          </a:p>
+        </p:txBody>
+      </p:sp>
+      <p:pic>
+        <p:nvPicPr>
+          <p:cNvPr id="77" name="Picture 29" descr="telea_fmm_diagram.png">
+            <a:extLst>
+              <a:ext uri="{FF2B5EF4-FFF2-40B4-BE49-F238E27FC236}">
+                <a16:creationId xmlns:a16="http://schemas.microsoft.com/office/drawing/2014/main" id="{143EFA57-344C-81D8-D502-A76E97204504}"/>
+              </a:ext>
+            </a:extLst>
+          </p:cNvPr>
+          <p:cNvPicPr>
+            <a:picLocks noChangeAspect="1"/>
+          </p:cNvPicPr>
+          <p:nvPr/>
+        </p:nvPicPr>
+        <p:blipFill>
+          <a:blip r:embed="rId5"/>
+          <a:stretch>
+            <a:fillRect/>
+          </a:stretch>
+        </p:blipFill>
+        <p:spPr>
+          <a:xfrm>
+            <a:off x="8321040" y="4236720"/>
+            <a:ext cx="3200400" cy="1459264"/>
+          </a:xfrm>
+          <a:prstGeom prst="rect">
+            <a:avLst/>
+          </a:prstGeom>
+        </p:spPr>
+      </p:pic>
+      <p:sp>
+        <p:nvSpPr>
+          <p:cNvPr id="78" name="Rectangle 30">
+            <a:extLst>
+              <a:ext uri="{FF2B5EF4-FFF2-40B4-BE49-F238E27FC236}">
+                <a16:creationId xmlns:a16="http://schemas.microsoft.com/office/drawing/2014/main" id="{7A13F7B6-D46C-C45C-F25E-4F087DA63CE0}"/>
+              </a:ext>
+            </a:extLst>
+          </p:cNvPr>
+          <p:cNvSpPr/>
+          <p:nvPr/>
+        </p:nvSpPr>
+        <p:spPr>
+          <a:xfrm>
+            <a:off x="8321040" y="5730240"/>
+            <a:ext cx="3200400" cy="365760"/>
+          </a:xfrm>
+          <a:prstGeom prst="rect">
+            <a:avLst/>
+          </a:prstGeom>
+          <a:solidFill>
+            <a:srgbClr val="F0F2F5"/>
+          </a:solidFill>
+          <a:ln>
+            <a:noFill/>
+          </a:ln>
+        </p:spPr>
+        <p:style>
+          <a:lnRef idx="1">
+            <a:schemeClr val="accent1"/>
+          </a:lnRef>
+          <a:fillRef idx="3">
+            <a:schemeClr val="accent1"/>
+          </a:fillRef>
+          <a:effectRef idx="2">
+            <a:schemeClr val="accent1"/>
+          </a:effectRef>
+          <a:fontRef idx="minor">
+            <a:schemeClr val="lt1"/>
+          </a:fontRef>
+        </p:style>
+        <p:txBody>
+          <a:bodyPr rtlCol="0" anchor="ctr"/>
+          <a:lstStyle/>
+          <a:p>
+            <a:pPr algn="ctr"/>
+            <a:endParaRPr/>
+          </a:p>
+        </p:txBody>
+      </p:sp>
+      <p:sp>
+        <p:nvSpPr>
+          <p:cNvPr id="79" name="TextBox 31">
+            <a:extLst>
+              <a:ext uri="{FF2B5EF4-FFF2-40B4-BE49-F238E27FC236}">
+                <a16:creationId xmlns:a16="http://schemas.microsoft.com/office/drawing/2014/main" id="{464139D0-0DC9-EF45-B539-58555874E773}"/>
+              </a:ext>
+            </a:extLst>
+          </p:cNvPr>
+          <p:cNvSpPr txBox="1"/>
+          <p:nvPr/>
+        </p:nvSpPr>
+        <p:spPr>
+          <a:xfrm>
+            <a:off x="8412480" y="5757672"/>
+            <a:ext cx="3017520" cy="261610"/>
+          </a:xfrm>
+          <a:prstGeom prst="rect">
+            <a:avLst/>
+          </a:prstGeom>
+          <a:noFill/>
+        </p:spPr>
+        <p:txBody>
+          <a:bodyPr wrap="square">
+            <a:spAutoFit/>
+          </a:bodyPr>
+          <a:lstStyle/>
+          <a:p>
+            <a:pPr algn="ctr">
+              <a:spcAft>
+                <a:spcPts val="0"/>
+              </a:spcAft>
+              <a:defRPr sz="1100" b="1">
+                <a:solidFill>
+                  <a:srgbClr val="16A34A"/>
+                </a:solidFill>
+                <a:latin typeface="Calibri"/>
+              </a:defRPr>
+            </a:pPr>
+            <a:r>
+              <a:rPr lang="en-US" altLang="zh-TW" sz="1100" dirty="0"/>
+              <a:t>Suitable</a:t>
+            </a:r>
+            <a:r>
+              <a:rPr dirty="0"/>
+              <a:t> for </a:t>
+            </a:r>
+            <a:r>
+              <a:rPr lang="en-US" dirty="0"/>
+              <a:t>small region </a:t>
+            </a:r>
+            <a:r>
+              <a:rPr dirty="0"/>
+              <a:t>repair</a:t>
+            </a:r>
           </a:p>
         </p:txBody>
       </p:sp>

--- a/VAE_NoiseFix_Final_Presentation.pptx
+++ b/VAE_NoiseFix_Final_Presentation.pptx
@@ -5,7 +5,7 @@
     <p:sldMasterId id="2147483648" r:id="rId1"/>
   </p:sldMasterIdLst>
   <p:notesMasterIdLst>
-    <p:notesMasterId r:id="rId13"/>
+    <p:notesMasterId r:id="rId12"/>
   </p:notesMasterIdLst>
   <p:sldIdLst>
     <p:sldId id="256" r:id="rId2"/>
@@ -14,11 +14,10 @@
     <p:sldId id="259" r:id="rId5"/>
     <p:sldId id="260" r:id="rId6"/>
     <p:sldId id="261" r:id="rId7"/>
-    <p:sldId id="262" r:id="rId8"/>
-    <p:sldId id="263" r:id="rId9"/>
-    <p:sldId id="264" r:id="rId10"/>
-    <p:sldId id="265" r:id="rId11"/>
-    <p:sldId id="266" r:id="rId12"/>
+    <p:sldId id="263" r:id="rId8"/>
+    <p:sldId id="264" r:id="rId9"/>
+    <p:sldId id="265" r:id="rId10"/>
+    <p:sldId id="266" r:id="rId11"/>
   </p:sldIdLst>
   <p:sldSz cx="12192000" cy="6858000"/>
   <p:notesSz cx="6858000" cy="12192000"/>
@@ -415,90 +414,6 @@
 </p:notes>
 </file>
 
-<file path=ppt/notesSlides/notesSlide11.xml><?xml version="1.0" encoding="utf-8"?>
-<p:notes xmlns:a="http://schemas.openxmlformats.org/drawingml/2006/main" xmlns:r="http://schemas.openxmlformats.org/officeDocument/2006/relationships" xmlns:p="http://schemas.openxmlformats.org/presentationml/2006/main">
-  <p:cSld>
-    <p:spTree>
-      <p:nvGrpSpPr>
-        <p:cNvPr id="1" name=""/>
-        <p:cNvGrpSpPr/>
-        <p:nvPr/>
-      </p:nvGrpSpPr>
-      <p:grpSpPr>
-        <a:xfrm>
-          <a:off x="0" y="0"/>
-          <a:ext cx="0" cy="0"/>
-          <a:chOff x="0" y="0"/>
-          <a:chExt cx="0" cy="0"/>
-        </a:xfrm>
-      </p:grpSpPr>
-      <p:sp>
-        <p:nvSpPr>
-          <p:cNvPr id="2" name="Slide Image Placeholder 1"/>
-          <p:cNvSpPr>
-            <a:spLocks noGrp="1" noRot="1" noChangeAspect="1"/>
-          </p:cNvSpPr>
-          <p:nvPr>
-            <p:ph type="sldImg"/>
-          </p:nvPr>
-        </p:nvSpPr>
-        <p:spPr/>
-      </p:sp>
-      <p:sp>
-        <p:nvSpPr>
-          <p:cNvPr id="3" name="Notes Placeholder 2"/>
-          <p:cNvSpPr>
-            <a:spLocks noGrp="1"/>
-          </p:cNvSpPr>
-          <p:nvPr>
-            <p:ph type="body" idx="1"/>
-          </p:nvPr>
-        </p:nvSpPr>
-        <p:spPr/>
-        <p:txBody>
-          <a:bodyPr/>
-          <a:lstStyle/>
-          <a:p>
-            <a:endParaRPr lang="en-US" dirty="0"/>
-          </a:p>
-        </p:txBody>
-      </p:sp>
-      <p:sp>
-        <p:nvSpPr>
-          <p:cNvPr id="4" name="Slide Number Placeholder 3"/>
-          <p:cNvSpPr>
-            <a:spLocks noGrp="1"/>
-          </p:cNvSpPr>
-          <p:nvPr>
-            <p:ph type="sldNum" sz="quarter" idx="10"/>
-          </p:nvPr>
-        </p:nvSpPr>
-        <p:spPr/>
-        <p:txBody>
-          <a:bodyPr/>
-          <a:lstStyle/>
-          <a:p>
-            <a:fld id="{F7021451-1387-4CA6-816F-3879F97B5CBC}" type="slidenum">
-              <a:rPr lang="en-US"/>
-              <a:t>11</a:t>
-            </a:fld>
-            <a:endParaRPr lang="en-US"/>
-          </a:p>
-        </p:txBody>
-      </p:sp>
-    </p:spTree>
-    <p:extLst>
-      <p:ext uri="{BB962C8B-B14F-4D97-AF65-F5344CB8AC3E}">
-        <p14:creationId xmlns:p14="http://schemas.microsoft.com/office/powerpoint/2010/main" val="1024086991"/>
-      </p:ext>
-    </p:extLst>
-  </p:cSld>
-  <p:clrMapOvr>
-    <a:masterClrMapping/>
-  </p:clrMapOvr>
-</p:notes>
-</file>
-
 <file path=ppt/notesSlides/notesSlide2.xml><?xml version="1.0" encoding="utf-8"?>
 <p:notes xmlns:a="http://schemas.openxmlformats.org/drawingml/2006/main" xmlns:r="http://schemas.openxmlformats.org/officeDocument/2006/relationships" xmlns:p="http://schemas.openxmlformats.org/presentationml/2006/main">
   <p:cSld>
@@ -840,9 +755,79 @@
           <a:p>
             <a:r>
               <a:rPr lang="zh-TW" altLang="en-US" dirty="0"/>
-              <a:t>需要優化流程圖的可讀性</a:t>
-            </a:r>
-            <a:endParaRPr lang="en-US" altLang="zh-TW"/>
+              <a:t>整個系統分成三個步驟</a:t>
+            </a:r>
+            <a:endParaRPr lang="en-US" altLang="zh-TW" dirty="0"/>
+          </a:p>
+          <a:p>
+            <a:r>
+              <a:rPr lang="zh-TW" altLang="en-US" dirty="0"/>
+              <a:t>一、用拉普拉斯加</a:t>
+            </a:r>
+            <a:r>
+              <a:rPr lang="en-US" altLang="zh-TW" sz="1200" dirty="0"/>
+              <a:t>Median</a:t>
+            </a:r>
+            <a:r>
+              <a:rPr lang="zh-TW" altLang="en-US" sz="1200" dirty="0"/>
+              <a:t> </a:t>
+            </a:r>
+            <a:r>
+              <a:rPr lang="en-US" altLang="zh-TW" sz="1200" dirty="0"/>
+              <a:t>Residual</a:t>
+            </a:r>
+            <a:r>
+              <a:rPr lang="zh-TW" altLang="en-US" sz="1200" dirty="0"/>
+              <a:t>以</a:t>
+            </a:r>
+            <a:r>
+              <a:rPr lang="zh-TW" altLang="en-US" dirty="0"/>
+              <a:t>亮度作為閾值找出候選像素，再透過</a:t>
+            </a:r>
+            <a:r>
+              <a:rPr lang="en-US" altLang="zh-TW" dirty="0"/>
+              <a:t>CCA</a:t>
+            </a:r>
+            <a:r>
+              <a:rPr lang="zh-TW" altLang="en-US" dirty="0"/>
+              <a:t>與方差過濾去除誤報，得到精準遮罩；</a:t>
+            </a:r>
+          </a:p>
+          <a:p>
+            <a:r>
+              <a:rPr lang="zh-TW" altLang="en-US" dirty="0"/>
+              <a:t>二、交給</a:t>
+            </a:r>
+            <a:r>
+              <a:rPr lang="en-US" altLang="zh-TW" dirty="0" err="1"/>
+              <a:t>Telea</a:t>
+            </a:r>
+            <a:r>
+              <a:rPr lang="zh-TW" altLang="en-US" dirty="0"/>
+              <a:t> </a:t>
+            </a:r>
+            <a:r>
+              <a:rPr lang="en-US" altLang="zh-TW" dirty="0"/>
+              <a:t>FMM</a:t>
+            </a:r>
+            <a:r>
+              <a:rPr lang="zh-TW" altLang="en-US" dirty="0"/>
+              <a:t>進行修補；</a:t>
+            </a:r>
+          </a:p>
+          <a:p>
+            <a:r>
+              <a:rPr lang="zh-TW" altLang="en-US" dirty="0"/>
+              <a:t>三、提供帶紅色遮罩預覽的</a:t>
+            </a:r>
+            <a:r>
+              <a:rPr lang="en-US" altLang="zh-TW" dirty="0"/>
+              <a:t>GUI</a:t>
+            </a:r>
+            <a:r>
+              <a:rPr lang="zh-TW" altLang="en-US" dirty="0"/>
+              <a:t>供即時參數調整甚至讓使用者對遮罩進行編輯；</a:t>
+            </a:r>
           </a:p>
           <a:p>
             <a:endParaRPr lang="en-US" dirty="0"/>
@@ -2242,617 +2227,6 @@
 
 <file path=ppt/slides/slide10.xml><?xml version="1.0" encoding="utf-8"?>
 <p:sld xmlns:a="http://schemas.openxmlformats.org/drawingml/2006/main" xmlns:r="http://schemas.openxmlformats.org/officeDocument/2006/relationships" xmlns:p="http://schemas.openxmlformats.org/presentationml/2006/main">
-  <p:cSld name="Slide 10">
-    <p:bg>
-      <p:bgPr>
-        <a:solidFill>
-          <a:srgbClr val="F7F8FA"/>
-        </a:solidFill>
-        <a:effectLst/>
-      </p:bgPr>
-    </p:bg>
-    <p:spTree>
-      <p:nvGrpSpPr>
-        <p:cNvPr id="1" name=""/>
-        <p:cNvGrpSpPr/>
-        <p:nvPr/>
-      </p:nvGrpSpPr>
-      <p:grpSpPr>
-        <a:xfrm>
-          <a:off x="0" y="0"/>
-          <a:ext cx="0" cy="0"/>
-          <a:chOff x="0" y="0"/>
-          <a:chExt cx="0" cy="0"/>
-        </a:xfrm>
-      </p:grpSpPr>
-      <p:sp>
-        <p:nvSpPr>
-          <p:cNvPr id="2" name="Text 0"/>
-          <p:cNvSpPr/>
-          <p:nvPr/>
-        </p:nvSpPr>
-        <p:spPr>
-          <a:xfrm>
-            <a:off x="566928" y="420624"/>
-            <a:ext cx="11055096" cy="292608"/>
-          </a:xfrm>
-          <a:prstGeom prst="rect">
-            <a:avLst/>
-          </a:prstGeom>
-          <a:noFill/>
-          <a:ln/>
-        </p:spPr>
-        <p:txBody>
-          <a:bodyPr wrap="square" lIns="0" tIns="0" rIns="0" bIns="0" rtlCol="0" anchor="ctr"/>
-          <a:lstStyle/>
-          <a:p>
-            <a:pPr marL="0" indent="0" algn="l">
-              <a:buNone/>
-            </a:pPr>
-            <a:r>
-              <a:rPr lang="en-US" sz="1250" b="1" kern="0" spc="300" dirty="0">
-                <a:solidFill>
-                  <a:srgbClr val="059669"/>
-                </a:solidFill>
-                <a:latin typeface="Trebuchet MS" pitchFamily="34" charset="0"/>
-                <a:ea typeface="Trebuchet MS" pitchFamily="34" charset="-122"/>
-                <a:cs typeface="Trebuchet MS" pitchFamily="34" charset="-120"/>
-              </a:rPr>
-              <a:t>05 · DIFFICULTIES &amp; UNIQUENESS</a:t>
-            </a:r>
-            <a:endParaRPr lang="en-US" sz="1250" dirty="0"/>
-          </a:p>
-        </p:txBody>
-      </p:sp>
-      <p:sp>
-        <p:nvSpPr>
-          <p:cNvPr id="3" name="Text 1"/>
-          <p:cNvSpPr/>
-          <p:nvPr/>
-        </p:nvSpPr>
-        <p:spPr>
-          <a:xfrm>
-            <a:off x="566928" y="713232"/>
-            <a:ext cx="11055096" cy="658368"/>
-          </a:xfrm>
-          <a:prstGeom prst="rect">
-            <a:avLst/>
-          </a:prstGeom>
-          <a:noFill/>
-          <a:ln/>
-        </p:spPr>
-        <p:txBody>
-          <a:bodyPr wrap="square" lIns="0" tIns="0" rIns="0" bIns="0" rtlCol="0" anchor="ctr"/>
-          <a:lstStyle/>
-          <a:p>
-            <a:pPr marL="0" indent="0" algn="l">
-              <a:buNone/>
-            </a:pPr>
-            <a:r>
-              <a:rPr lang="en-US" sz="3000" b="1" dirty="0">
-                <a:solidFill>
-                  <a:srgbClr val="1E2A4A"/>
-                </a:solidFill>
-                <a:latin typeface="Trebuchet MS" pitchFamily="34" charset="0"/>
-                <a:ea typeface="Trebuchet MS" pitchFamily="34" charset="-122"/>
-                <a:cs typeface="Trebuchet MS" pitchFamily="34" charset="-120"/>
-              </a:rPr>
-              <a:t>What’s Hard — and What’s New</a:t>
-            </a:r>
-            <a:endParaRPr lang="en-US" sz="3000" dirty="0"/>
-          </a:p>
-        </p:txBody>
-      </p:sp>
-      <p:sp>
-        <p:nvSpPr>
-          <p:cNvPr id="4" name="Shape 2"/>
-          <p:cNvSpPr/>
-          <p:nvPr/>
-        </p:nvSpPr>
-        <p:spPr>
-          <a:xfrm>
-            <a:off x="566928" y="1664208"/>
-            <a:ext cx="5413248" cy="4443984"/>
-          </a:xfrm>
-          <a:prstGeom prst="rect">
-            <a:avLst/>
-          </a:prstGeom>
-          <a:solidFill>
-            <a:srgbClr val="FFFFFF"/>
-          </a:solidFill>
-          <a:ln w="12700">
-            <a:solidFill>
-              <a:srgbClr val="E2E8F0"/>
-            </a:solidFill>
-            <a:prstDash val="solid"/>
-          </a:ln>
-          <a:effectLst>
-            <a:outerShdw blurRad="88900" dist="38100" dir="8100000" algn="bl" rotWithShape="0">
-              <a:srgbClr val="000000">
-                <a:alpha val="10000"/>
-              </a:srgbClr>
-            </a:outerShdw>
-          </a:effectLst>
-        </p:spPr>
-        <p:txBody>
-          <a:bodyPr/>
-          <a:lstStyle/>
-          <a:p>
-            <a:endParaRPr lang="zh-TW" altLang="en-US"/>
-          </a:p>
-        </p:txBody>
-      </p:sp>
-      <p:sp>
-        <p:nvSpPr>
-          <p:cNvPr id="5" name="Shape 3"/>
-          <p:cNvSpPr/>
-          <p:nvPr/>
-        </p:nvSpPr>
-        <p:spPr>
-          <a:xfrm>
-            <a:off x="566928" y="1664208"/>
-            <a:ext cx="82296" cy="4443984"/>
-          </a:xfrm>
-          <a:prstGeom prst="rect">
-            <a:avLst/>
-          </a:prstGeom>
-          <a:solidFill>
-            <a:srgbClr val="059669"/>
-          </a:solidFill>
-          <a:ln/>
-        </p:spPr>
-        <p:txBody>
-          <a:bodyPr/>
-          <a:lstStyle/>
-          <a:p>
-            <a:endParaRPr lang="zh-TW" altLang="en-US"/>
-          </a:p>
-        </p:txBody>
-      </p:sp>
-      <p:sp>
-        <p:nvSpPr>
-          <p:cNvPr id="6" name="Text 4"/>
-          <p:cNvSpPr/>
-          <p:nvPr/>
-        </p:nvSpPr>
-        <p:spPr>
-          <a:xfrm>
-            <a:off x="804672" y="1810512"/>
-            <a:ext cx="4937760" cy="365760"/>
-          </a:xfrm>
-          <a:prstGeom prst="rect">
-            <a:avLst/>
-          </a:prstGeom>
-          <a:noFill/>
-          <a:ln/>
-        </p:spPr>
-        <p:txBody>
-          <a:bodyPr wrap="square" lIns="0" tIns="0" rIns="0" bIns="0" rtlCol="0" anchor="ctr"/>
-          <a:lstStyle/>
-          <a:p>
-            <a:pPr marL="0" indent="0">
-              <a:buNone/>
-            </a:pPr>
-            <a:r>
-              <a:rPr lang="en-US" sz="1700" b="1" dirty="0">
-                <a:solidFill>
-                  <a:srgbClr val="1E2A4A"/>
-                </a:solidFill>
-                <a:latin typeface="Trebuchet MS" pitchFamily="34" charset="0"/>
-                <a:ea typeface="Trebuchet MS" pitchFamily="34" charset="-122"/>
-                <a:cs typeface="Trebuchet MS" pitchFamily="34" charset="-120"/>
-              </a:rPr>
-              <a:t>Uniqueness</a:t>
-            </a:r>
-            <a:endParaRPr lang="en-US" sz="1700" dirty="0"/>
-          </a:p>
-        </p:txBody>
-      </p:sp>
-      <p:sp>
-        <p:nvSpPr>
-          <p:cNvPr id="7" name="Text 5"/>
-          <p:cNvSpPr/>
-          <p:nvPr/>
-        </p:nvSpPr>
-        <p:spPr>
-          <a:xfrm>
-            <a:off x="804672" y="2212848"/>
-            <a:ext cx="4956048" cy="3749040"/>
-          </a:xfrm>
-          <a:prstGeom prst="rect">
-            <a:avLst/>
-          </a:prstGeom>
-          <a:noFill/>
-          <a:ln/>
-        </p:spPr>
-        <p:txBody>
-          <a:bodyPr wrap="square" lIns="0" tIns="0" rIns="0" bIns="0" rtlCol="0" anchor="t"/>
-          <a:lstStyle/>
-          <a:p>
-            <a:pPr marL="177800" indent="-177800">
-              <a:spcAft>
-                <a:spcPts val="700"/>
-              </a:spcAft>
-              <a:buSzPct val="100000"/>
-              <a:buChar char="•"/>
-            </a:pPr>
-            <a:r>
-              <a:rPr lang="en-US" sz="1450" dirty="0">
-                <a:solidFill>
-                  <a:srgbClr val="475569"/>
-                </a:solidFill>
-                <a:latin typeface="Calibri" pitchFamily="34" charset="0"/>
-                <a:ea typeface="Calibri" pitchFamily="34" charset="-122"/>
-                <a:cs typeface="Calibri" pitchFamily="34" charset="-120"/>
-              </a:rPr>
-              <a:t>No existing ComfyUI node combines automatic luminance + area + LAB filtering with integrated CV inpainting in a single drop-in node.</a:t>
-            </a:r>
-            <a:endParaRPr lang="en-US" sz="1450" dirty="0"/>
-          </a:p>
-          <a:p>
-            <a:pPr marL="177800" indent="-177800">
-              <a:spcAft>
-                <a:spcPts val="700"/>
-              </a:spcAft>
-              <a:buSzPct val="100000"/>
-              <a:buChar char="•"/>
-            </a:pPr>
-            <a:r>
-              <a:rPr lang="en-US" sz="1450" dirty="0">
-                <a:solidFill>
-                  <a:srgbClr val="475569"/>
-                </a:solidFill>
-                <a:latin typeface="Calibri" pitchFamily="34" charset="0"/>
-                <a:ea typeface="Calibri" pitchFamily="34" charset="-122"/>
-                <a:cs typeface="Calibri" pitchFamily="34" charset="-120"/>
-              </a:rPr>
-              <a:t>Existing options are either deep-learning detailers (heavy, semantic-only) or manual-mask inpaint nodes — users otherwise wire a fragile “spaghetti” graph.</a:t>
-            </a:r>
-            <a:endParaRPr lang="en-US" sz="1450" dirty="0"/>
-          </a:p>
-          <a:p>
-            <a:pPr marL="177800" indent="-177800">
-              <a:spcAft>
-                <a:spcPts val="700"/>
-              </a:spcAft>
-              <a:buSzPct val="100000"/>
-              <a:buChar char="•"/>
-            </a:pPr>
-            <a:r>
-              <a:rPr lang="en-US" sz="1450" dirty="0">
-                <a:solidFill>
-                  <a:srgbClr val="475569"/>
-                </a:solidFill>
-                <a:latin typeface="Calibri" pitchFamily="34" charset="0"/>
-                <a:ea typeface="Calibri" pitchFamily="34" charset="-122"/>
-                <a:cs typeface="Calibri" pitchFamily="34" charset="-120"/>
-              </a:rPr>
-              <a:t>Hybrid-CV philosophy: encode domain knowledge as explicit, interpretable, deterministic rules instead of a black box.</a:t>
-            </a:r>
-            <a:endParaRPr lang="en-US" sz="1450" dirty="0"/>
-          </a:p>
-          <a:p>
-            <a:pPr marL="177800" indent="-177800">
-              <a:spcAft>
-                <a:spcPts val="700"/>
-              </a:spcAft>
-              <a:buSzPct val="100000"/>
-              <a:buChar char="•"/>
-            </a:pPr>
-            <a:r>
-              <a:rPr lang="en-US" sz="1450" dirty="0">
-                <a:solidFill>
-                  <a:srgbClr val="475569"/>
-                </a:solidFill>
-                <a:latin typeface="Calibri" pitchFamily="34" charset="0"/>
-                <a:ea typeface="Calibri" pitchFamily="34" charset="-122"/>
-                <a:cs typeface="Calibri" pitchFamily="34" charset="-120"/>
-              </a:rPr>
-              <a:t>Reusable MASK output lets downstream nodes share the detection.</a:t>
-            </a:r>
-            <a:endParaRPr lang="en-US" sz="1450" dirty="0"/>
-          </a:p>
-        </p:txBody>
-      </p:sp>
-      <p:sp>
-        <p:nvSpPr>
-          <p:cNvPr id="8" name="Shape 6"/>
-          <p:cNvSpPr/>
-          <p:nvPr/>
-        </p:nvSpPr>
-        <p:spPr>
-          <a:xfrm>
-            <a:off x="6199632" y="1664208"/>
-            <a:ext cx="5422392" cy="4443984"/>
-          </a:xfrm>
-          <a:prstGeom prst="rect">
-            <a:avLst/>
-          </a:prstGeom>
-          <a:solidFill>
-            <a:srgbClr val="FFFFFF"/>
-          </a:solidFill>
-          <a:ln w="12700">
-            <a:solidFill>
-              <a:srgbClr val="E2E8F0"/>
-            </a:solidFill>
-            <a:prstDash val="solid"/>
-          </a:ln>
-          <a:effectLst>
-            <a:outerShdw blurRad="88900" dist="38100" dir="8100000" algn="bl" rotWithShape="0">
-              <a:srgbClr val="000000">
-                <a:alpha val="10000"/>
-              </a:srgbClr>
-            </a:outerShdw>
-          </a:effectLst>
-        </p:spPr>
-        <p:txBody>
-          <a:bodyPr/>
-          <a:lstStyle/>
-          <a:p>
-            <a:endParaRPr lang="zh-TW" altLang="en-US"/>
-          </a:p>
-        </p:txBody>
-      </p:sp>
-      <p:sp>
-        <p:nvSpPr>
-          <p:cNvPr id="9" name="Shape 7"/>
-          <p:cNvSpPr/>
-          <p:nvPr/>
-        </p:nvSpPr>
-        <p:spPr>
-          <a:xfrm>
-            <a:off x="6199632" y="1664208"/>
-            <a:ext cx="82296" cy="4443984"/>
-          </a:xfrm>
-          <a:prstGeom prst="rect">
-            <a:avLst/>
-          </a:prstGeom>
-          <a:solidFill>
-            <a:srgbClr val="D97706"/>
-          </a:solidFill>
-          <a:ln/>
-        </p:spPr>
-        <p:txBody>
-          <a:bodyPr/>
-          <a:lstStyle/>
-          <a:p>
-            <a:endParaRPr lang="zh-TW" altLang="en-US"/>
-          </a:p>
-        </p:txBody>
-      </p:sp>
-      <p:sp>
-        <p:nvSpPr>
-          <p:cNvPr id="10" name="Text 8"/>
-          <p:cNvSpPr/>
-          <p:nvPr/>
-        </p:nvSpPr>
-        <p:spPr>
-          <a:xfrm>
-            <a:off x="6437376" y="1810512"/>
-            <a:ext cx="4937760" cy="365760"/>
-          </a:xfrm>
-          <a:prstGeom prst="rect">
-            <a:avLst/>
-          </a:prstGeom>
-          <a:noFill/>
-          <a:ln/>
-        </p:spPr>
-        <p:txBody>
-          <a:bodyPr wrap="square" lIns="0" tIns="0" rIns="0" bIns="0" rtlCol="0" anchor="ctr"/>
-          <a:lstStyle/>
-          <a:p>
-            <a:pPr marL="0" indent="0">
-              <a:buNone/>
-            </a:pPr>
-            <a:r>
-              <a:rPr lang="en-US" sz="1700" b="1" dirty="0">
-                <a:solidFill>
-                  <a:srgbClr val="1E2A4A"/>
-                </a:solidFill>
-                <a:latin typeface="Trebuchet MS" pitchFamily="34" charset="0"/>
-                <a:ea typeface="Trebuchet MS" pitchFamily="34" charset="-122"/>
-                <a:cs typeface="Trebuchet MS" pitchFamily="34" charset="-120"/>
-              </a:rPr>
-              <a:t>Difficulties &amp; limitations</a:t>
-            </a:r>
-            <a:endParaRPr lang="en-US" sz="1700" dirty="0"/>
-          </a:p>
-        </p:txBody>
-      </p:sp>
-      <p:sp>
-        <p:nvSpPr>
-          <p:cNvPr id="11" name="Text 9"/>
-          <p:cNvSpPr/>
-          <p:nvPr/>
-        </p:nvSpPr>
-        <p:spPr>
-          <a:xfrm>
-            <a:off x="6437376" y="2212848"/>
-            <a:ext cx="4956048" cy="3749040"/>
-          </a:xfrm>
-          <a:prstGeom prst="rect">
-            <a:avLst/>
-          </a:prstGeom>
-          <a:noFill/>
-          <a:ln/>
-        </p:spPr>
-        <p:txBody>
-          <a:bodyPr wrap="square" lIns="0" tIns="0" rIns="0" bIns="0" rtlCol="0" anchor="t"/>
-          <a:lstStyle/>
-          <a:p>
-            <a:pPr marL="177800" indent="-177800">
-              <a:spcAft>
-                <a:spcPts val="700"/>
-              </a:spcAft>
-              <a:buSzPct val="100000"/>
-              <a:buChar char="•"/>
-            </a:pPr>
-            <a:r>
-              <a:rPr lang="en-US" sz="1450" dirty="0">
-                <a:solidFill>
-                  <a:srgbClr val="475569"/>
-                </a:solidFill>
-                <a:latin typeface="Calibri" pitchFamily="34" charset="0"/>
-                <a:ea typeface="Calibri" pitchFamily="34" charset="-122"/>
-                <a:cs typeface="Calibri" pitchFamily="34" charset="-120"/>
-              </a:rPr>
-              <a:t>Star-vs-noise discrimination is the core challenge — both are small, bright and isolated; solved via the LAB cliff-ratio test.</a:t>
-            </a:r>
-            <a:endParaRPr lang="en-US" sz="1450" dirty="0"/>
-          </a:p>
-          <a:p>
-            <a:pPr marL="177800" indent="-177800">
-              <a:spcAft>
-                <a:spcPts val="700"/>
-              </a:spcAft>
-              <a:buSzPct val="100000"/>
-              <a:buChar char="•"/>
-            </a:pPr>
-            <a:r>
-              <a:rPr lang="en-US" sz="1450" dirty="0">
-                <a:solidFill>
-                  <a:srgbClr val="475569"/>
-                </a:solidFill>
-                <a:latin typeface="Calibri" pitchFamily="34" charset="0"/>
-                <a:ea typeface="Calibri" pitchFamily="34" charset="-122"/>
-                <a:cs typeface="Calibri" pitchFamily="34" charset="-120"/>
-              </a:rPr>
-              <a:t>Truly sharp-edged points (e.g. a 2×2 pure-white star) have no falloff and can still be removed — an inherent edge case.</a:t>
-            </a:r>
-            <a:endParaRPr lang="en-US" sz="1450" dirty="0"/>
-          </a:p>
-          <a:p>
-            <a:pPr marL="177800" indent="-177800">
-              <a:spcAft>
-                <a:spcPts val="700"/>
-              </a:spcAft>
-              <a:buSzPct val="100000"/>
-              <a:buChar char="•"/>
-            </a:pPr>
-            <a:r>
-              <a:rPr lang="en-US" sz="1450" dirty="0">
-                <a:solidFill>
-                  <a:srgbClr val="475569"/>
-                </a:solidFill>
-                <a:latin typeface="Calibri" pitchFamily="34" charset="0"/>
-                <a:ea typeface="Calibri" pitchFamily="34" charset="-122"/>
-                <a:cs typeface="Calibri" pitchFamily="34" charset="-120"/>
-              </a:rPr>
-              <a:t>Severe VAE collapse (large grid-like noise) exceeds a single max_noise_size and needs manual tuning.</a:t>
-            </a:r>
-            <a:endParaRPr lang="en-US" sz="1450" dirty="0"/>
-          </a:p>
-          <a:p>
-            <a:pPr marL="177800" indent="-177800">
-              <a:spcAft>
-                <a:spcPts val="700"/>
-              </a:spcAft>
-              <a:buSzPct val="100000"/>
-              <a:buChar char="•"/>
-            </a:pPr>
-            <a:r>
-              <a:rPr lang="en-US" sz="1450" dirty="0">
-                <a:solidFill>
-                  <a:srgbClr val="475569"/>
-                </a:solidFill>
-                <a:latin typeface="Calibri" pitchFamily="34" charset="0"/>
-                <a:ea typeface="Calibri" pitchFamily="34" charset="-122"/>
-                <a:cs typeface="Calibri" pitchFamily="34" charset="-120"/>
-              </a:rPr>
-              <a:t>4K+ CCA / LAB loops cost extra CPU time (still typically within 1–2 s).</a:t>
-            </a:r>
-            <a:endParaRPr lang="en-US" sz="1450" dirty="0"/>
-          </a:p>
-        </p:txBody>
-      </p:sp>
-      <p:sp>
-        <p:nvSpPr>
-          <p:cNvPr id="12" name="Text 10"/>
-          <p:cNvSpPr/>
-          <p:nvPr/>
-        </p:nvSpPr>
-        <p:spPr>
-          <a:xfrm>
-            <a:off x="566928" y="6473952"/>
-            <a:ext cx="7315200" cy="274320"/>
-          </a:xfrm>
-          <a:prstGeom prst="rect">
-            <a:avLst/>
-          </a:prstGeom>
-          <a:noFill/>
-          <a:ln/>
-        </p:spPr>
-        <p:txBody>
-          <a:bodyPr wrap="square" lIns="0" tIns="0" rIns="0" bIns="0" rtlCol="0" anchor="ctr"/>
-          <a:lstStyle/>
-          <a:p>
-            <a:pPr marL="0" indent="0">
-              <a:buNone/>
-            </a:pPr>
-            <a:r>
-              <a:rPr lang="en-US" sz="900" dirty="0">
-                <a:solidFill>
-                  <a:srgbClr val="64748B"/>
-                </a:solidFill>
-                <a:latin typeface="Calibri" pitchFamily="34" charset="0"/>
-                <a:ea typeface="Calibri" pitchFamily="34" charset="-122"/>
-                <a:cs typeface="Calibri" pitchFamily="34" charset="-120"/>
-              </a:rPr>
-              <a:t>SDXL VAE Noise-Fix  ·  Traditional-CV ComfyUI Node</a:t>
-            </a:r>
-            <a:endParaRPr lang="en-US" sz="900" dirty="0"/>
-          </a:p>
-        </p:txBody>
-      </p:sp>
-      <p:sp>
-        <p:nvSpPr>
-          <p:cNvPr id="13" name="Text 11"/>
-          <p:cNvSpPr/>
-          <p:nvPr/>
-        </p:nvSpPr>
-        <p:spPr>
-          <a:xfrm>
-            <a:off x="11073384" y="6473952"/>
-            <a:ext cx="548640" cy="274320"/>
-          </a:xfrm>
-          <a:prstGeom prst="rect">
-            <a:avLst/>
-          </a:prstGeom>
-          <a:noFill/>
-          <a:ln/>
-        </p:spPr>
-        <p:txBody>
-          <a:bodyPr wrap="square" lIns="0" tIns="0" rIns="0" bIns="0" rtlCol="0" anchor="ctr"/>
-          <a:lstStyle/>
-          <a:p>
-            <a:pPr marL="0" indent="0" algn="r">
-              <a:buNone/>
-            </a:pPr>
-            <a:r>
-              <a:rPr lang="en-US" sz="900" dirty="0">
-                <a:solidFill>
-                  <a:srgbClr val="64748B"/>
-                </a:solidFill>
-                <a:latin typeface="Calibri" pitchFamily="34" charset="0"/>
-                <a:ea typeface="Calibri" pitchFamily="34" charset="-122"/>
-                <a:cs typeface="Calibri" pitchFamily="34" charset="-120"/>
-              </a:rPr>
-              <a:t>10</a:t>
-            </a:r>
-            <a:endParaRPr lang="en-US" sz="900" dirty="0"/>
-          </a:p>
-        </p:txBody>
-      </p:sp>
-    </p:spTree>
-  </p:cSld>
-  <p:clrMapOvr>
-    <a:masterClrMapping/>
-  </p:clrMapOvr>
-</p:sld>
-</file>
-
-<file path=ppt/slides/slide11.xml><?xml version="1.0" encoding="utf-8"?>
-<p:sld xmlns:a="http://schemas.openxmlformats.org/drawingml/2006/main" xmlns:r="http://schemas.openxmlformats.org/officeDocument/2006/relationships" xmlns:p="http://schemas.openxmlformats.org/presentationml/2006/main">
   <p:cSld name="Slide 11">
     <p:bg>
       <p:bgPr>
@@ -5883,7 +5257,7 @@
                 <a:ea typeface="Trebuchet MS" pitchFamily="34" charset="-122"/>
                 <a:cs typeface="Trebuchet MS" pitchFamily="34" charset="-120"/>
               </a:rPr>
-              <a:t>System Overview — A Five-Stage CV Pipeline</a:t>
+              <a:t>System Overview</a:t>
             </a:r>
             <a:endParaRPr lang="en-US" sz="3000" dirty="0"/>
           </a:p>
@@ -5891,48 +5265,14 @@
       </p:sp>
       <p:sp>
         <p:nvSpPr>
-          <p:cNvPr id="4" name="Shape 2"/>
-          <p:cNvSpPr/>
-          <p:nvPr/>
-        </p:nvSpPr>
-        <p:spPr>
-          <a:xfrm>
-            <a:off x="566928" y="1600200"/>
-            <a:ext cx="2286000" cy="566928"/>
-          </a:xfrm>
-          <a:prstGeom prst="roundRect">
-            <a:avLst>
-              <a:gd name="adj" fmla="val 12903"/>
-            </a:avLst>
-          </a:prstGeom>
-          <a:solidFill>
-            <a:srgbClr val="EEF2F8"/>
-          </a:solidFill>
-          <a:ln w="12700">
-            <a:solidFill>
-              <a:srgbClr val="E2E8F0"/>
-            </a:solidFill>
-            <a:prstDash val="solid"/>
-          </a:ln>
-        </p:spPr>
-        <p:txBody>
-          <a:bodyPr/>
-          <a:lstStyle/>
-          <a:p>
-            <a:endParaRPr lang="zh-TW" altLang="en-US"/>
-          </a:p>
-        </p:txBody>
-      </p:sp>
-      <p:sp>
-        <p:nvSpPr>
-          <p:cNvPr id="5" name="Text 3"/>
-          <p:cNvSpPr/>
-          <p:nvPr/>
-        </p:nvSpPr>
-        <p:spPr>
-          <a:xfrm>
-            <a:off x="566928" y="1600200"/>
-            <a:ext cx="2286000" cy="566928"/>
+          <p:cNvPr id="54" name="Text 52"/>
+          <p:cNvSpPr/>
+          <p:nvPr/>
+        </p:nvSpPr>
+        <p:spPr>
+          <a:xfrm>
+            <a:off x="566928" y="6473952"/>
+            <a:ext cx="7315200" cy="274320"/>
           </a:xfrm>
           <a:prstGeom prst="rect">
             <a:avLst/>
@@ -5944,63 +5284,34 @@
           <a:bodyPr wrap="square" lIns="0" tIns="0" rIns="0" bIns="0" rtlCol="0" anchor="ctr"/>
           <a:lstStyle/>
           <a:p>
-            <a:pPr marL="0" indent="0" algn="ctr">
+            <a:pPr marL="0" indent="0">
               <a:buNone/>
             </a:pPr>
             <a:r>
-              <a:rPr lang="en-US" sz="1150" b="1" dirty="0">
-                <a:solidFill>
-                  <a:srgbClr val="1E2A4A"/>
+              <a:rPr lang="en-US" sz="900" dirty="0">
+                <a:solidFill>
+                  <a:srgbClr val="64748B"/>
                 </a:solidFill>
                 <a:latin typeface="Calibri" pitchFamily="34" charset="0"/>
                 <a:ea typeface="Calibri" pitchFamily="34" charset="-122"/>
                 <a:cs typeface="Calibri" pitchFamily="34" charset="-120"/>
               </a:rPr>
-              <a:t>IN  ·  SDXL image (BGR)</a:t>
-            </a:r>
-            <a:endParaRPr lang="en-US" sz="1150" dirty="0"/>
-          </a:p>
-        </p:txBody>
-      </p:sp>
-      <p:sp>
-        <p:nvSpPr>
-          <p:cNvPr id="6" name="Shape 4"/>
-          <p:cNvSpPr/>
-          <p:nvPr/>
-        </p:nvSpPr>
-        <p:spPr>
-          <a:xfrm>
-            <a:off x="9153144" y="1600200"/>
-            <a:ext cx="2468880" cy="566928"/>
-          </a:xfrm>
-          <a:prstGeom prst="roundRect">
-            <a:avLst>
-              <a:gd name="adj" fmla="val 12903"/>
-            </a:avLst>
-          </a:prstGeom>
-          <a:solidFill>
-            <a:srgbClr val="059669"/>
-          </a:solidFill>
-          <a:ln/>
-        </p:spPr>
-        <p:txBody>
-          <a:bodyPr/>
-          <a:lstStyle/>
-          <a:p>
-            <a:endParaRPr lang="zh-TW" altLang="en-US"/>
-          </a:p>
-        </p:txBody>
-      </p:sp>
-      <p:sp>
-        <p:nvSpPr>
-          <p:cNvPr id="7" name="Text 5"/>
-          <p:cNvSpPr/>
-          <p:nvPr/>
-        </p:nvSpPr>
-        <p:spPr>
-          <a:xfrm>
-            <a:off x="9153144" y="1600200"/>
-            <a:ext cx="2468880" cy="566928"/>
+              <a:t>SDXL VAE Noise-Fix  ·  Traditional-CV ComfyUI Node</a:t>
+            </a:r>
+            <a:endParaRPr lang="en-US" sz="900" dirty="0"/>
+          </a:p>
+        </p:txBody>
+      </p:sp>
+      <p:sp>
+        <p:nvSpPr>
+          <p:cNvPr id="55" name="Text 53"/>
+          <p:cNvSpPr/>
+          <p:nvPr/>
+        </p:nvSpPr>
+        <p:spPr>
+          <a:xfrm>
+            <a:off x="11073384" y="6473952"/>
+            <a:ext cx="548640" cy="274320"/>
           </a:xfrm>
           <a:prstGeom prst="rect">
             <a:avLst/>
@@ -6012,1704 +5323,55 @@
           <a:bodyPr wrap="square" lIns="0" tIns="0" rIns="0" bIns="0" rtlCol="0" anchor="ctr"/>
           <a:lstStyle/>
           <a:p>
-            <a:pPr marL="0" indent="0" algn="ctr">
+            <a:pPr marL="0" indent="0" algn="r">
               <a:buNone/>
             </a:pPr>
             <a:r>
-              <a:rPr lang="en-US" sz="1150" b="1" dirty="0">
-                <a:solidFill>
-                  <a:srgbClr val="FFFFFF"/>
+              <a:rPr lang="en-US" sz="900" dirty="0">
+                <a:solidFill>
+                  <a:srgbClr val="64748B"/>
                 </a:solidFill>
                 <a:latin typeface="Calibri" pitchFamily="34" charset="0"/>
                 <a:ea typeface="Calibri" pitchFamily="34" charset="-122"/>
                 <a:cs typeface="Calibri" pitchFamily="34" charset="-120"/>
               </a:rPr>
-              <a:t>OUT  ·  Repaired image + MASK</a:t>
-            </a:r>
-            <a:endParaRPr lang="en-US" sz="1150" dirty="0"/>
-          </a:p>
-        </p:txBody>
-      </p:sp>
-      <p:sp>
-        <p:nvSpPr>
-          <p:cNvPr id="8" name="Shape 6"/>
-          <p:cNvSpPr/>
-          <p:nvPr/>
-        </p:nvSpPr>
-        <p:spPr>
-          <a:xfrm>
-            <a:off x="566928" y="2542032"/>
-            <a:ext cx="2011680" cy="2331720"/>
-          </a:xfrm>
-          <a:prstGeom prst="rect">
-            <a:avLst/>
-          </a:prstGeom>
-          <a:solidFill>
-            <a:srgbClr val="FFFFFF"/>
-          </a:solidFill>
-          <a:ln w="12700">
-            <a:solidFill>
-              <a:srgbClr val="E2E8F0"/>
-            </a:solidFill>
-            <a:prstDash val="solid"/>
-          </a:ln>
-          <a:effectLst>
-            <a:outerShdw blurRad="88900" dist="38100" dir="8100000" algn="bl" rotWithShape="0">
-              <a:srgbClr val="000000">
-                <a:alpha val="10000"/>
-              </a:srgbClr>
-            </a:outerShdw>
-          </a:effectLst>
-        </p:spPr>
-        <p:txBody>
-          <a:bodyPr/>
-          <a:lstStyle/>
-          <a:p>
-            <a:endParaRPr lang="zh-TW" altLang="en-US"/>
-          </a:p>
-        </p:txBody>
-      </p:sp>
-      <p:sp>
-        <p:nvSpPr>
-          <p:cNvPr id="9" name="Shape 7"/>
-          <p:cNvSpPr/>
-          <p:nvPr/>
-        </p:nvSpPr>
-        <p:spPr>
-          <a:xfrm>
-            <a:off x="566928" y="2542032"/>
-            <a:ext cx="82296" cy="2331720"/>
-          </a:xfrm>
-          <a:prstGeom prst="rect">
-            <a:avLst/>
-          </a:prstGeom>
-          <a:solidFill>
-            <a:srgbClr val="2C3E66"/>
-          </a:solidFill>
-          <a:ln/>
-        </p:spPr>
-        <p:txBody>
-          <a:bodyPr/>
-          <a:lstStyle/>
-          <a:p>
-            <a:endParaRPr lang="zh-TW" altLang="en-US"/>
-          </a:p>
-        </p:txBody>
-      </p:sp>
-      <p:sp>
-        <p:nvSpPr>
-          <p:cNvPr id="10" name="Shape 8"/>
-          <p:cNvSpPr/>
-          <p:nvPr/>
-        </p:nvSpPr>
-        <p:spPr>
-          <a:xfrm>
-            <a:off x="1271016" y="2779776"/>
-            <a:ext cx="603504" cy="603504"/>
-          </a:xfrm>
-          <a:prstGeom prst="ellipse">
-            <a:avLst/>
-          </a:prstGeom>
-          <a:solidFill>
-            <a:srgbClr val="1E2A4A"/>
-          </a:solidFill>
-          <a:ln/>
-        </p:spPr>
-        <p:txBody>
-          <a:bodyPr/>
-          <a:lstStyle/>
-          <a:p>
-            <a:endParaRPr lang="zh-TW" altLang="en-US"/>
-          </a:p>
-        </p:txBody>
-      </p:sp>
-      <p:sp>
-        <p:nvSpPr>
-          <p:cNvPr id="11" name="Text 9"/>
-          <p:cNvSpPr/>
-          <p:nvPr/>
-        </p:nvSpPr>
-        <p:spPr>
-          <a:xfrm>
-            <a:off x="1271016" y="2779776"/>
-            <a:ext cx="603504" cy="603504"/>
-          </a:xfrm>
-          <a:prstGeom prst="rect">
-            <a:avLst/>
-          </a:prstGeom>
-          <a:noFill/>
-          <a:ln/>
-        </p:spPr>
-        <p:txBody>
-          <a:bodyPr wrap="square" lIns="0" tIns="0" rIns="0" bIns="0" rtlCol="0" anchor="ctr"/>
-          <a:lstStyle/>
-          <a:p>
-            <a:pPr marL="0" indent="0" algn="ctr">
-              <a:buNone/>
-            </a:pPr>
-            <a:r>
-              <a:rPr lang="en-US" sz="2200" b="1" dirty="0">
-                <a:solidFill>
-                  <a:srgbClr val="FFFFFF"/>
-                </a:solidFill>
-                <a:latin typeface="Trebuchet MS" pitchFamily="34" charset="0"/>
-                <a:ea typeface="Trebuchet MS" pitchFamily="34" charset="-122"/>
-                <a:cs typeface="Trebuchet MS" pitchFamily="34" charset="-120"/>
-              </a:rPr>
-              <a:t>1</a:t>
-            </a:r>
-            <a:endParaRPr lang="en-US" sz="2200" dirty="0"/>
-          </a:p>
-        </p:txBody>
-      </p:sp>
-      <p:sp>
-        <p:nvSpPr>
-          <p:cNvPr id="12" name="Text 10"/>
-          <p:cNvSpPr/>
-          <p:nvPr/>
-        </p:nvSpPr>
-        <p:spPr>
-          <a:xfrm>
-            <a:off x="694944" y="3474720"/>
-            <a:ext cx="1755648" cy="548640"/>
-          </a:xfrm>
-          <a:prstGeom prst="rect">
-            <a:avLst/>
-          </a:prstGeom>
-          <a:noFill/>
-          <a:ln/>
-        </p:spPr>
-        <p:txBody>
-          <a:bodyPr wrap="square" lIns="0" tIns="0" rIns="0" bIns="0" rtlCol="0" anchor="t"/>
-          <a:lstStyle/>
-          <a:p>
-            <a:pPr marL="0" indent="0" algn="ctr">
-              <a:buNone/>
-            </a:pPr>
-            <a:r>
-              <a:rPr lang="en-US" sz="1400" b="1" dirty="0">
-                <a:solidFill>
-                  <a:srgbClr val="1E2A4A"/>
-                </a:solidFill>
-                <a:latin typeface="Trebuchet MS" pitchFamily="34" charset="0"/>
-                <a:ea typeface="Trebuchet MS" pitchFamily="34" charset="-122"/>
-                <a:cs typeface="Trebuchet MS" pitchFamily="34" charset="-120"/>
-              </a:rPr>
-              <a:t>Dual-Path Energy</a:t>
-            </a:r>
-            <a:endParaRPr lang="en-US" sz="1400" dirty="0"/>
-          </a:p>
-        </p:txBody>
-      </p:sp>
-      <p:sp>
-        <p:nvSpPr>
-          <p:cNvPr id="13" name="Text 11"/>
-          <p:cNvSpPr/>
-          <p:nvPr/>
-        </p:nvSpPr>
-        <p:spPr>
-          <a:xfrm>
-            <a:off x="694944" y="3959352"/>
-            <a:ext cx="1755648" cy="841248"/>
-          </a:xfrm>
-          <a:prstGeom prst="rect">
-            <a:avLst/>
-          </a:prstGeom>
-          <a:noFill/>
-          <a:ln/>
-        </p:spPr>
-        <p:txBody>
-          <a:bodyPr wrap="square" lIns="0" tIns="0" rIns="0" bIns="0" rtlCol="0" anchor="t"/>
-          <a:lstStyle/>
-          <a:p>
-            <a:pPr marL="0" indent="0" algn="ctr">
-              <a:buNone/>
-            </a:pPr>
-            <a:r>
-              <a:rPr lang="en-US" sz="1100" dirty="0">
-                <a:solidFill>
-                  <a:srgbClr val="475569"/>
-                </a:solidFill>
-                <a:latin typeface="Calibri" pitchFamily="34" charset="0"/>
-                <a:ea typeface="Calibri" pitchFamily="34" charset="-122"/>
-                <a:cs typeface="Calibri" pitchFamily="34" charset="-120"/>
-              </a:rPr>
-              <a:t>Laplacian (sharp dots) + Median residual (flat blobs)</a:t>
-            </a:r>
-            <a:endParaRPr lang="en-US" sz="1100" dirty="0"/>
-          </a:p>
-        </p:txBody>
-      </p:sp>
-      <p:sp>
-        <p:nvSpPr>
-          <p:cNvPr id="14" name="Text 12"/>
-          <p:cNvSpPr/>
-          <p:nvPr/>
-        </p:nvSpPr>
-        <p:spPr>
-          <a:xfrm>
-            <a:off x="2542032" y="2542032"/>
-            <a:ext cx="321869" cy="2331720"/>
-          </a:xfrm>
-          <a:prstGeom prst="rect">
-            <a:avLst/>
-          </a:prstGeom>
-          <a:noFill/>
-          <a:ln/>
-        </p:spPr>
-        <p:txBody>
-          <a:bodyPr wrap="square" lIns="0" tIns="0" rIns="0" bIns="0" rtlCol="0" anchor="ctr"/>
-          <a:lstStyle/>
-          <a:p>
-            <a:pPr marL="0" indent="0" algn="ctr">
-              <a:buNone/>
-            </a:pPr>
-            <a:r>
-              <a:rPr lang="en-US" sz="2400" b="1" dirty="0">
-                <a:solidFill>
-                  <a:srgbClr val="64748B"/>
-                </a:solidFill>
-                <a:latin typeface="Trebuchet MS" pitchFamily="34" charset="0"/>
-                <a:ea typeface="Trebuchet MS" pitchFamily="34" charset="-122"/>
-                <a:cs typeface="Trebuchet MS" pitchFamily="34" charset="-120"/>
-              </a:rPr>
-              <a:t>›</a:t>
-            </a:r>
-            <a:endParaRPr lang="en-US" sz="2400" dirty="0"/>
-          </a:p>
-        </p:txBody>
-      </p:sp>
-      <p:sp>
-        <p:nvSpPr>
-          <p:cNvPr id="15" name="Shape 13"/>
-          <p:cNvSpPr/>
-          <p:nvPr/>
-        </p:nvSpPr>
-        <p:spPr>
-          <a:xfrm>
-            <a:off x="2827325" y="2542032"/>
-            <a:ext cx="2011680" cy="2331720"/>
-          </a:xfrm>
-          <a:prstGeom prst="rect">
-            <a:avLst/>
-          </a:prstGeom>
-          <a:solidFill>
-            <a:srgbClr val="FFFFFF"/>
-          </a:solidFill>
-          <a:ln w="12700">
-            <a:solidFill>
-              <a:srgbClr val="E2E8F0"/>
-            </a:solidFill>
-            <a:prstDash val="solid"/>
-          </a:ln>
-          <a:effectLst>
-            <a:outerShdw blurRad="88900" dist="38100" dir="8100000" algn="bl" rotWithShape="0">
-              <a:srgbClr val="000000">
-                <a:alpha val="10000"/>
-              </a:srgbClr>
-            </a:outerShdw>
-          </a:effectLst>
-        </p:spPr>
-        <p:txBody>
-          <a:bodyPr/>
-          <a:lstStyle/>
-          <a:p>
-            <a:endParaRPr lang="zh-TW" altLang="en-US"/>
-          </a:p>
-        </p:txBody>
-      </p:sp>
-      <p:sp>
-        <p:nvSpPr>
-          <p:cNvPr id="16" name="Shape 14"/>
-          <p:cNvSpPr/>
-          <p:nvPr/>
-        </p:nvSpPr>
-        <p:spPr>
-          <a:xfrm>
-            <a:off x="2827325" y="2542032"/>
-            <a:ext cx="82296" cy="2331720"/>
-          </a:xfrm>
-          <a:prstGeom prst="rect">
-            <a:avLst/>
-          </a:prstGeom>
-          <a:solidFill>
-            <a:srgbClr val="2C3E66"/>
-          </a:solidFill>
-          <a:ln/>
-        </p:spPr>
-        <p:txBody>
-          <a:bodyPr/>
-          <a:lstStyle/>
-          <a:p>
-            <a:endParaRPr lang="zh-TW" altLang="en-US"/>
-          </a:p>
-        </p:txBody>
-      </p:sp>
-      <p:sp>
-        <p:nvSpPr>
-          <p:cNvPr id="17" name="Shape 15"/>
-          <p:cNvSpPr/>
-          <p:nvPr/>
-        </p:nvSpPr>
-        <p:spPr>
-          <a:xfrm>
-            <a:off x="3531413" y="2779776"/>
-            <a:ext cx="603504" cy="603504"/>
-          </a:xfrm>
-          <a:prstGeom prst="ellipse">
-            <a:avLst/>
-          </a:prstGeom>
-          <a:solidFill>
-            <a:srgbClr val="1E2A4A"/>
-          </a:solidFill>
-          <a:ln/>
-        </p:spPr>
-        <p:txBody>
-          <a:bodyPr/>
-          <a:lstStyle/>
-          <a:p>
-            <a:endParaRPr lang="zh-TW" altLang="en-US"/>
-          </a:p>
-        </p:txBody>
-      </p:sp>
-      <p:sp>
-        <p:nvSpPr>
-          <p:cNvPr id="18" name="Text 16"/>
-          <p:cNvSpPr/>
-          <p:nvPr/>
-        </p:nvSpPr>
-        <p:spPr>
-          <a:xfrm>
-            <a:off x="3531413" y="2779776"/>
-            <a:ext cx="603504" cy="603504"/>
-          </a:xfrm>
-          <a:prstGeom prst="rect">
-            <a:avLst/>
-          </a:prstGeom>
-          <a:noFill/>
-          <a:ln/>
-        </p:spPr>
-        <p:txBody>
-          <a:bodyPr wrap="square" lIns="0" tIns="0" rIns="0" bIns="0" rtlCol="0" anchor="ctr"/>
-          <a:lstStyle/>
-          <a:p>
-            <a:pPr marL="0" indent="0" algn="ctr">
-              <a:buNone/>
-            </a:pPr>
-            <a:r>
-              <a:rPr lang="en-US" sz="2200" b="1" dirty="0">
-                <a:solidFill>
-                  <a:srgbClr val="FFFFFF"/>
-                </a:solidFill>
-                <a:latin typeface="Trebuchet MS" pitchFamily="34" charset="0"/>
-                <a:ea typeface="Trebuchet MS" pitchFamily="34" charset="-122"/>
-                <a:cs typeface="Trebuchet MS" pitchFamily="34" charset="-120"/>
-              </a:rPr>
-              <a:t>2</a:t>
-            </a:r>
-            <a:endParaRPr lang="en-US" sz="2200" dirty="0"/>
-          </a:p>
-        </p:txBody>
-      </p:sp>
-      <p:sp>
-        <p:nvSpPr>
-          <p:cNvPr id="19" name="Text 17"/>
-          <p:cNvSpPr/>
-          <p:nvPr/>
-        </p:nvSpPr>
-        <p:spPr>
-          <a:xfrm>
-            <a:off x="2955341" y="3474720"/>
-            <a:ext cx="1755648" cy="548640"/>
-          </a:xfrm>
-          <a:prstGeom prst="rect">
-            <a:avLst/>
-          </a:prstGeom>
-          <a:noFill/>
-          <a:ln/>
-        </p:spPr>
-        <p:txBody>
-          <a:bodyPr wrap="square" lIns="0" tIns="0" rIns="0" bIns="0" rtlCol="0" anchor="t"/>
-          <a:lstStyle/>
-          <a:p>
-            <a:pPr marL="0" indent="0" algn="ctr">
-              <a:buNone/>
-            </a:pPr>
-            <a:r>
-              <a:rPr lang="en-US" sz="1400" b="1" dirty="0">
-                <a:solidFill>
-                  <a:srgbClr val="1E2A4A"/>
-                </a:solidFill>
-                <a:latin typeface="Trebuchet MS" pitchFamily="34" charset="0"/>
-                <a:ea typeface="Trebuchet MS" pitchFamily="34" charset="-122"/>
-                <a:cs typeface="Trebuchet MS" pitchFamily="34" charset="-120"/>
-              </a:rPr>
-              <a:t>Dual Thresholds</a:t>
-            </a:r>
-            <a:endParaRPr lang="en-US" sz="1400" dirty="0"/>
-          </a:p>
-        </p:txBody>
-      </p:sp>
-      <p:sp>
-        <p:nvSpPr>
-          <p:cNvPr id="20" name="Text 18"/>
-          <p:cNvSpPr/>
-          <p:nvPr/>
-        </p:nvSpPr>
-        <p:spPr>
-          <a:xfrm>
-            <a:off x="2955341" y="3959352"/>
-            <a:ext cx="1755648" cy="841248"/>
-          </a:xfrm>
-          <a:prstGeom prst="rect">
-            <a:avLst/>
-          </a:prstGeom>
-          <a:noFill/>
-          <a:ln/>
-        </p:spPr>
-        <p:txBody>
-          <a:bodyPr wrap="square" lIns="0" tIns="0" rIns="0" bIns="0" rtlCol="0" anchor="t"/>
-          <a:lstStyle/>
-          <a:p>
-            <a:pPr marL="0" indent="0" algn="ctr">
-              <a:buNone/>
-            </a:pPr>
-            <a:r>
-              <a:rPr lang="en-US" sz="1100" dirty="0">
-                <a:solidFill>
-                  <a:srgbClr val="475569"/>
-                </a:solidFill>
-                <a:latin typeface="Calibri" pitchFamily="34" charset="0"/>
-                <a:ea typeface="Calibri" pitchFamily="34" charset="-122"/>
-                <a:cs typeface="Calibri" pitchFamily="34" charset="-120"/>
-              </a:rPr>
-              <a:t>Strict seed mask + loose context mask</a:t>
-            </a:r>
-            <a:endParaRPr lang="en-US" sz="1100" dirty="0"/>
-          </a:p>
-        </p:txBody>
-      </p:sp>
-      <p:sp>
-        <p:nvSpPr>
-          <p:cNvPr id="21" name="Text 19"/>
-          <p:cNvSpPr/>
-          <p:nvPr/>
-        </p:nvSpPr>
-        <p:spPr>
-          <a:xfrm>
-            <a:off x="4802429" y="2542032"/>
-            <a:ext cx="321869" cy="2331720"/>
-          </a:xfrm>
-          <a:prstGeom prst="rect">
-            <a:avLst/>
-          </a:prstGeom>
-          <a:noFill/>
-          <a:ln/>
-        </p:spPr>
-        <p:txBody>
-          <a:bodyPr wrap="square" lIns="0" tIns="0" rIns="0" bIns="0" rtlCol="0" anchor="ctr"/>
-          <a:lstStyle/>
-          <a:p>
-            <a:pPr marL="0" indent="0" algn="ctr">
-              <a:buNone/>
-            </a:pPr>
-            <a:r>
-              <a:rPr lang="en-US" sz="2400" b="1" dirty="0">
-                <a:solidFill>
-                  <a:srgbClr val="64748B"/>
-                </a:solidFill>
-                <a:latin typeface="Trebuchet MS" pitchFamily="34" charset="0"/>
-                <a:ea typeface="Trebuchet MS" pitchFamily="34" charset="-122"/>
-                <a:cs typeface="Trebuchet MS" pitchFamily="34" charset="-120"/>
-              </a:rPr>
-              <a:t>›</a:t>
-            </a:r>
-            <a:endParaRPr lang="en-US" sz="2400" dirty="0"/>
-          </a:p>
-        </p:txBody>
-      </p:sp>
-      <p:sp>
-        <p:nvSpPr>
-          <p:cNvPr id="22" name="Shape 20"/>
-          <p:cNvSpPr/>
-          <p:nvPr/>
-        </p:nvSpPr>
-        <p:spPr>
-          <a:xfrm>
-            <a:off x="5087722" y="2542032"/>
-            <a:ext cx="2011680" cy="2331720"/>
-          </a:xfrm>
-          <a:prstGeom prst="rect">
-            <a:avLst/>
-          </a:prstGeom>
-          <a:solidFill>
-            <a:srgbClr val="FFFFFF"/>
-          </a:solidFill>
-          <a:ln w="12700">
-            <a:solidFill>
-              <a:srgbClr val="E2E8F0"/>
-            </a:solidFill>
-            <a:prstDash val="solid"/>
-          </a:ln>
-          <a:effectLst>
-            <a:outerShdw blurRad="88900" dist="38100" dir="8100000" algn="bl" rotWithShape="0">
-              <a:srgbClr val="000000">
-                <a:alpha val="10000"/>
-              </a:srgbClr>
-            </a:outerShdw>
-          </a:effectLst>
-        </p:spPr>
-        <p:txBody>
-          <a:bodyPr/>
-          <a:lstStyle/>
-          <a:p>
-            <a:endParaRPr lang="zh-TW" altLang="en-US"/>
-          </a:p>
-        </p:txBody>
-      </p:sp>
-      <p:sp>
-        <p:nvSpPr>
-          <p:cNvPr id="23" name="Shape 21"/>
-          <p:cNvSpPr/>
-          <p:nvPr/>
-        </p:nvSpPr>
-        <p:spPr>
-          <a:xfrm>
-            <a:off x="5087722" y="2542032"/>
-            <a:ext cx="82296" cy="2331720"/>
-          </a:xfrm>
-          <a:prstGeom prst="rect">
-            <a:avLst/>
-          </a:prstGeom>
-          <a:solidFill>
-            <a:srgbClr val="2C3E66"/>
-          </a:solidFill>
-          <a:ln/>
-        </p:spPr>
-        <p:txBody>
-          <a:bodyPr/>
-          <a:lstStyle/>
-          <a:p>
-            <a:endParaRPr lang="zh-TW" altLang="en-US"/>
-          </a:p>
-        </p:txBody>
-      </p:sp>
-      <p:sp>
-        <p:nvSpPr>
-          <p:cNvPr id="24" name="Shape 22"/>
-          <p:cNvSpPr/>
-          <p:nvPr/>
-        </p:nvSpPr>
-        <p:spPr>
-          <a:xfrm>
-            <a:off x="5791810" y="2779776"/>
-            <a:ext cx="603504" cy="603504"/>
-          </a:xfrm>
-          <a:prstGeom prst="ellipse">
-            <a:avLst/>
-          </a:prstGeom>
-          <a:solidFill>
-            <a:srgbClr val="1E2A4A"/>
-          </a:solidFill>
-          <a:ln/>
-        </p:spPr>
-        <p:txBody>
-          <a:bodyPr/>
-          <a:lstStyle/>
-          <a:p>
-            <a:endParaRPr lang="zh-TW" altLang="en-US"/>
-          </a:p>
-        </p:txBody>
-      </p:sp>
-      <p:sp>
-        <p:nvSpPr>
-          <p:cNvPr id="25" name="Text 23"/>
-          <p:cNvSpPr/>
-          <p:nvPr/>
-        </p:nvSpPr>
-        <p:spPr>
-          <a:xfrm>
-            <a:off x="5791810" y="2779776"/>
-            <a:ext cx="603504" cy="603504"/>
-          </a:xfrm>
-          <a:prstGeom prst="rect">
-            <a:avLst/>
-          </a:prstGeom>
-          <a:noFill/>
-          <a:ln/>
-        </p:spPr>
-        <p:txBody>
-          <a:bodyPr wrap="square" lIns="0" tIns="0" rIns="0" bIns="0" rtlCol="0" anchor="ctr"/>
-          <a:lstStyle/>
-          <a:p>
-            <a:pPr marL="0" indent="0" algn="ctr">
-              <a:buNone/>
-            </a:pPr>
-            <a:r>
-              <a:rPr lang="en-US" sz="2200" b="1" dirty="0">
-                <a:solidFill>
-                  <a:srgbClr val="FFFFFF"/>
-                </a:solidFill>
-                <a:latin typeface="Trebuchet MS" pitchFamily="34" charset="0"/>
-                <a:ea typeface="Trebuchet MS" pitchFamily="34" charset="-122"/>
-                <a:cs typeface="Trebuchet MS" pitchFamily="34" charset="-120"/>
-              </a:rPr>
-              <a:t>3</a:t>
-            </a:r>
-            <a:endParaRPr lang="en-US" sz="2200" dirty="0"/>
-          </a:p>
-        </p:txBody>
-      </p:sp>
-      <p:sp>
-        <p:nvSpPr>
-          <p:cNvPr id="26" name="Text 24"/>
-          <p:cNvSpPr/>
-          <p:nvPr/>
-        </p:nvSpPr>
-        <p:spPr>
-          <a:xfrm>
-            <a:off x="5215738" y="3474720"/>
-            <a:ext cx="1755648" cy="548640"/>
-          </a:xfrm>
-          <a:prstGeom prst="rect">
-            <a:avLst/>
-          </a:prstGeom>
-          <a:noFill/>
-          <a:ln/>
-        </p:spPr>
-        <p:txBody>
-          <a:bodyPr wrap="square" lIns="0" tIns="0" rIns="0" bIns="0" rtlCol="0" anchor="t"/>
-          <a:lstStyle/>
-          <a:p>
-            <a:pPr marL="0" indent="0" algn="ctr">
-              <a:buNone/>
-            </a:pPr>
-            <a:r>
-              <a:rPr lang="en-US" sz="1400" b="1" dirty="0">
-                <a:solidFill>
-                  <a:srgbClr val="1E2A4A"/>
-                </a:solidFill>
-                <a:latin typeface="Trebuchet MS" pitchFamily="34" charset="0"/>
-                <a:ea typeface="Trebuchet MS" pitchFamily="34" charset="-122"/>
-                <a:cs typeface="Trebuchet MS" pitchFamily="34" charset="-120"/>
-              </a:rPr>
-              <a:t>Structural Filter</a:t>
-            </a:r>
-            <a:endParaRPr lang="en-US" sz="1400" dirty="0"/>
-          </a:p>
-        </p:txBody>
-      </p:sp>
-      <p:sp>
-        <p:nvSpPr>
-          <p:cNvPr id="27" name="Text 25"/>
-          <p:cNvSpPr/>
-          <p:nvPr/>
-        </p:nvSpPr>
-        <p:spPr>
-          <a:xfrm>
-            <a:off x="5215738" y="3959352"/>
-            <a:ext cx="1755648" cy="841248"/>
-          </a:xfrm>
-          <a:prstGeom prst="rect">
-            <a:avLst/>
-          </a:prstGeom>
-          <a:noFill/>
-          <a:ln/>
-        </p:spPr>
-        <p:txBody>
-          <a:bodyPr wrap="square" lIns="0" tIns="0" rIns="0" bIns="0" rtlCol="0" anchor="t"/>
-          <a:lstStyle/>
-          <a:p>
-            <a:pPr marL="0" indent="0" algn="ctr">
-              <a:buNone/>
-            </a:pPr>
-            <a:r>
-              <a:rPr lang="en-US" sz="1100" dirty="0">
-                <a:solidFill>
-                  <a:srgbClr val="475569"/>
-                </a:solidFill>
-                <a:latin typeface="Calibri" pitchFamily="34" charset="0"/>
-                <a:ea typeface="Calibri" pitchFamily="34" charset="-122"/>
-                <a:cs typeface="Calibri" pitchFamily="34" charset="-120"/>
-              </a:rPr>
-              <a:t>CCA: area, seed-core, aspect-ratio rules</a:t>
-            </a:r>
-            <a:endParaRPr lang="en-US" sz="1100" dirty="0"/>
-          </a:p>
-        </p:txBody>
-      </p:sp>
-      <p:sp>
-        <p:nvSpPr>
-          <p:cNvPr id="28" name="Text 26"/>
-          <p:cNvSpPr/>
-          <p:nvPr/>
-        </p:nvSpPr>
-        <p:spPr>
-          <a:xfrm>
-            <a:off x="7062826" y="2542032"/>
-            <a:ext cx="321869" cy="2331720"/>
-          </a:xfrm>
-          <a:prstGeom prst="rect">
-            <a:avLst/>
-          </a:prstGeom>
-          <a:noFill/>
-          <a:ln/>
-        </p:spPr>
-        <p:txBody>
-          <a:bodyPr wrap="square" lIns="0" tIns="0" rIns="0" bIns="0" rtlCol="0" anchor="ctr"/>
-          <a:lstStyle/>
-          <a:p>
-            <a:pPr marL="0" indent="0" algn="ctr">
-              <a:buNone/>
-            </a:pPr>
-            <a:r>
-              <a:rPr lang="en-US" sz="2400" b="1" dirty="0">
-                <a:solidFill>
-                  <a:srgbClr val="64748B"/>
-                </a:solidFill>
-                <a:latin typeface="Trebuchet MS" pitchFamily="34" charset="0"/>
-                <a:ea typeface="Trebuchet MS" pitchFamily="34" charset="-122"/>
-                <a:cs typeface="Trebuchet MS" pitchFamily="34" charset="-120"/>
-              </a:rPr>
-              <a:t>›</a:t>
-            </a:r>
-            <a:endParaRPr lang="en-US" sz="2400" dirty="0"/>
-          </a:p>
-        </p:txBody>
-      </p:sp>
-      <p:sp>
-        <p:nvSpPr>
-          <p:cNvPr id="29" name="Shape 27"/>
-          <p:cNvSpPr/>
-          <p:nvPr/>
-        </p:nvSpPr>
-        <p:spPr>
-          <a:xfrm>
-            <a:off x="7348118" y="2542032"/>
-            <a:ext cx="2011680" cy="2331720"/>
-          </a:xfrm>
-          <a:prstGeom prst="rect">
-            <a:avLst/>
-          </a:prstGeom>
-          <a:solidFill>
-            <a:srgbClr val="FFFFFF"/>
-          </a:solidFill>
-          <a:ln w="12700">
-            <a:solidFill>
-              <a:srgbClr val="E2E8F0"/>
-            </a:solidFill>
-            <a:prstDash val="solid"/>
-          </a:ln>
-          <a:effectLst>
-            <a:outerShdw blurRad="88900" dist="38100" dir="8100000" algn="bl" rotWithShape="0">
-              <a:srgbClr val="000000">
-                <a:alpha val="10000"/>
-              </a:srgbClr>
-            </a:outerShdw>
-          </a:effectLst>
-        </p:spPr>
-        <p:txBody>
-          <a:bodyPr/>
-          <a:lstStyle/>
-          <a:p>
-            <a:endParaRPr lang="zh-TW" altLang="en-US"/>
-          </a:p>
-        </p:txBody>
-      </p:sp>
-      <p:sp>
-        <p:nvSpPr>
-          <p:cNvPr id="30" name="Shape 28"/>
-          <p:cNvSpPr/>
-          <p:nvPr/>
-        </p:nvSpPr>
-        <p:spPr>
-          <a:xfrm>
-            <a:off x="7348118" y="2542032"/>
-            <a:ext cx="82296" cy="2331720"/>
-          </a:xfrm>
-          <a:prstGeom prst="rect">
-            <a:avLst/>
-          </a:prstGeom>
-          <a:solidFill>
-            <a:srgbClr val="2C3E66"/>
-          </a:solidFill>
-          <a:ln/>
-        </p:spPr>
-        <p:txBody>
-          <a:bodyPr/>
-          <a:lstStyle/>
-          <a:p>
-            <a:endParaRPr lang="zh-TW" altLang="en-US"/>
-          </a:p>
-        </p:txBody>
-      </p:sp>
-      <p:sp>
-        <p:nvSpPr>
-          <p:cNvPr id="31" name="Shape 29"/>
-          <p:cNvSpPr/>
-          <p:nvPr/>
-        </p:nvSpPr>
-        <p:spPr>
-          <a:xfrm>
-            <a:off x="8052206" y="2779776"/>
-            <a:ext cx="603504" cy="603504"/>
-          </a:xfrm>
-          <a:prstGeom prst="ellipse">
-            <a:avLst/>
-          </a:prstGeom>
-          <a:solidFill>
-            <a:srgbClr val="1E2A4A"/>
-          </a:solidFill>
-          <a:ln/>
-        </p:spPr>
-        <p:txBody>
-          <a:bodyPr/>
-          <a:lstStyle/>
-          <a:p>
-            <a:endParaRPr lang="zh-TW" altLang="en-US"/>
-          </a:p>
-        </p:txBody>
-      </p:sp>
-      <p:sp>
-        <p:nvSpPr>
-          <p:cNvPr id="32" name="Text 30"/>
-          <p:cNvSpPr/>
-          <p:nvPr/>
-        </p:nvSpPr>
-        <p:spPr>
-          <a:xfrm>
-            <a:off x="8052206" y="2779776"/>
-            <a:ext cx="603504" cy="603504"/>
-          </a:xfrm>
-          <a:prstGeom prst="rect">
-            <a:avLst/>
-          </a:prstGeom>
-          <a:noFill/>
-          <a:ln/>
-        </p:spPr>
-        <p:txBody>
-          <a:bodyPr wrap="square" lIns="0" tIns="0" rIns="0" bIns="0" rtlCol="0" anchor="ctr"/>
-          <a:lstStyle/>
-          <a:p>
-            <a:pPr marL="0" indent="0" algn="ctr">
-              <a:buNone/>
-            </a:pPr>
-            <a:r>
-              <a:rPr lang="en-US" sz="2200" b="1" dirty="0">
-                <a:solidFill>
-                  <a:srgbClr val="FFFFFF"/>
-                </a:solidFill>
-                <a:latin typeface="Trebuchet MS" pitchFamily="34" charset="0"/>
-                <a:ea typeface="Trebuchet MS" pitchFamily="34" charset="-122"/>
-                <a:cs typeface="Trebuchet MS" pitchFamily="34" charset="-120"/>
-              </a:rPr>
               <a:t>4</a:t>
             </a:r>
-            <a:endParaRPr lang="en-US" sz="2200" dirty="0"/>
-          </a:p>
-        </p:txBody>
-      </p:sp>
-      <p:sp>
-        <p:nvSpPr>
-          <p:cNvPr id="33" name="Text 31"/>
-          <p:cNvSpPr/>
-          <p:nvPr/>
-        </p:nvSpPr>
-        <p:spPr>
-          <a:xfrm>
-            <a:off x="7476134" y="3474720"/>
-            <a:ext cx="1755648" cy="548640"/>
-          </a:xfrm>
-          <a:prstGeom prst="rect">
-            <a:avLst/>
-          </a:prstGeom>
-          <a:noFill/>
-          <a:ln/>
-        </p:spPr>
-        <p:txBody>
-          <a:bodyPr wrap="square" lIns="0" tIns="0" rIns="0" bIns="0" rtlCol="0" anchor="t"/>
-          <a:lstStyle/>
-          <a:p>
-            <a:pPr marL="0" indent="0" algn="ctr">
-              <a:buNone/>
-            </a:pPr>
-            <a:r>
-              <a:rPr lang="en-US" sz="1400" b="1" dirty="0">
-                <a:solidFill>
-                  <a:srgbClr val="1E2A4A"/>
-                </a:solidFill>
-                <a:latin typeface="Trebuchet MS" pitchFamily="34" charset="0"/>
-                <a:ea typeface="Trebuchet MS" pitchFamily="34" charset="-122"/>
-                <a:cs typeface="Trebuchet MS" pitchFamily="34" charset="-120"/>
-              </a:rPr>
-              <a:t>LAB Verification</a:t>
-            </a:r>
-            <a:endParaRPr lang="en-US" sz="1400" dirty="0"/>
-          </a:p>
-        </p:txBody>
-      </p:sp>
-      <p:sp>
-        <p:nvSpPr>
-          <p:cNvPr id="34" name="Text 32"/>
-          <p:cNvSpPr/>
-          <p:nvPr/>
-        </p:nvSpPr>
-        <p:spPr>
-          <a:xfrm>
-            <a:off x="7476134" y="3959352"/>
-            <a:ext cx="1755648" cy="841248"/>
-          </a:xfrm>
-          <a:prstGeom prst="rect">
-            <a:avLst/>
-          </a:prstGeom>
-          <a:noFill/>
-          <a:ln/>
-        </p:spPr>
-        <p:txBody>
-          <a:bodyPr wrap="square" lIns="0" tIns="0" rIns="0" bIns="0" rtlCol="0" anchor="t"/>
-          <a:lstStyle/>
-          <a:p>
-            <a:pPr marL="0" indent="0" algn="ctr">
-              <a:buNone/>
-            </a:pPr>
-            <a:r>
-              <a:rPr lang="en-US" sz="1100" dirty="0">
-                <a:solidFill>
-                  <a:srgbClr val="475569"/>
-                </a:solidFill>
-                <a:latin typeface="Calibri" pitchFamily="34" charset="0"/>
-                <a:ea typeface="Calibri" pitchFamily="34" charset="-122"/>
-                <a:cs typeface="Calibri" pitchFamily="34" charset="-120"/>
-              </a:rPr>
-              <a:t>Cliff vs falloff + color distance — protects stars</a:t>
-            </a:r>
-            <a:endParaRPr lang="en-US" sz="1100" dirty="0"/>
-          </a:p>
-        </p:txBody>
-      </p:sp>
-      <p:sp>
-        <p:nvSpPr>
-          <p:cNvPr id="35" name="Text 33"/>
-          <p:cNvSpPr/>
-          <p:nvPr/>
-        </p:nvSpPr>
-        <p:spPr>
-          <a:xfrm>
-            <a:off x="9323222" y="2542032"/>
-            <a:ext cx="321869" cy="2331720"/>
-          </a:xfrm>
-          <a:prstGeom prst="rect">
-            <a:avLst/>
-          </a:prstGeom>
-          <a:noFill/>
-          <a:ln/>
-        </p:spPr>
-        <p:txBody>
-          <a:bodyPr wrap="square" lIns="0" tIns="0" rIns="0" bIns="0" rtlCol="0" anchor="ctr"/>
-          <a:lstStyle/>
-          <a:p>
-            <a:pPr marL="0" indent="0" algn="ctr">
-              <a:buNone/>
-            </a:pPr>
-            <a:r>
-              <a:rPr lang="en-US" sz="2400" b="1" dirty="0">
-                <a:solidFill>
-                  <a:srgbClr val="64748B"/>
-                </a:solidFill>
-                <a:latin typeface="Trebuchet MS" pitchFamily="34" charset="0"/>
-                <a:ea typeface="Trebuchet MS" pitchFamily="34" charset="-122"/>
-                <a:cs typeface="Trebuchet MS" pitchFamily="34" charset="-120"/>
-              </a:rPr>
-              <a:t>›</a:t>
-            </a:r>
-            <a:endParaRPr lang="en-US" sz="2400" dirty="0"/>
-          </a:p>
-        </p:txBody>
-      </p:sp>
-      <p:sp>
-        <p:nvSpPr>
-          <p:cNvPr id="36" name="Shape 34"/>
-          <p:cNvSpPr/>
-          <p:nvPr/>
-        </p:nvSpPr>
-        <p:spPr>
-          <a:xfrm>
-            <a:off x="9608515" y="2542032"/>
-            <a:ext cx="2011680" cy="2331720"/>
-          </a:xfrm>
-          <a:prstGeom prst="rect">
-            <a:avLst/>
-          </a:prstGeom>
-          <a:solidFill>
-            <a:srgbClr val="FFFFFF"/>
-          </a:solidFill>
-          <a:ln w="12700">
-            <a:solidFill>
-              <a:srgbClr val="E2E8F0"/>
-            </a:solidFill>
-            <a:prstDash val="solid"/>
-          </a:ln>
-          <a:effectLst>
-            <a:outerShdw blurRad="88900" dist="38100" dir="8100000" algn="bl" rotWithShape="0">
-              <a:srgbClr val="000000">
-                <a:alpha val="10000"/>
-              </a:srgbClr>
-            </a:outerShdw>
-          </a:effectLst>
-        </p:spPr>
-        <p:txBody>
-          <a:bodyPr/>
-          <a:lstStyle/>
-          <a:p>
-            <a:endParaRPr lang="zh-TW" altLang="en-US"/>
-          </a:p>
-        </p:txBody>
-      </p:sp>
-      <p:sp>
-        <p:nvSpPr>
-          <p:cNvPr id="37" name="Shape 35"/>
-          <p:cNvSpPr/>
-          <p:nvPr/>
-        </p:nvSpPr>
-        <p:spPr>
-          <a:xfrm>
-            <a:off x="9608515" y="2542032"/>
-            <a:ext cx="82296" cy="2331720"/>
-          </a:xfrm>
-          <a:prstGeom prst="rect">
-            <a:avLst/>
-          </a:prstGeom>
-          <a:solidFill>
-            <a:srgbClr val="2C3E66"/>
-          </a:solidFill>
-          <a:ln/>
-        </p:spPr>
-        <p:txBody>
-          <a:bodyPr/>
-          <a:lstStyle/>
-          <a:p>
-            <a:endParaRPr lang="zh-TW" altLang="en-US"/>
-          </a:p>
-        </p:txBody>
-      </p:sp>
-      <p:sp>
-        <p:nvSpPr>
-          <p:cNvPr id="38" name="Shape 36"/>
-          <p:cNvSpPr/>
-          <p:nvPr/>
-        </p:nvSpPr>
-        <p:spPr>
-          <a:xfrm>
-            <a:off x="10312603" y="2779776"/>
-            <a:ext cx="603504" cy="603504"/>
-          </a:xfrm>
-          <a:prstGeom prst="ellipse">
-            <a:avLst/>
-          </a:prstGeom>
-          <a:solidFill>
-            <a:srgbClr val="1E2A4A"/>
-          </a:solidFill>
-          <a:ln/>
-        </p:spPr>
-        <p:txBody>
-          <a:bodyPr/>
-          <a:lstStyle/>
-          <a:p>
-            <a:endParaRPr lang="zh-TW" altLang="en-US"/>
-          </a:p>
-        </p:txBody>
-      </p:sp>
-      <p:sp>
-        <p:nvSpPr>
-          <p:cNvPr id="39" name="Text 37"/>
-          <p:cNvSpPr/>
-          <p:nvPr/>
-        </p:nvSpPr>
-        <p:spPr>
-          <a:xfrm>
-            <a:off x="10312603" y="2779776"/>
-            <a:ext cx="603504" cy="603504"/>
-          </a:xfrm>
-          <a:prstGeom prst="rect">
-            <a:avLst/>
-          </a:prstGeom>
-          <a:noFill/>
-          <a:ln/>
-        </p:spPr>
-        <p:txBody>
-          <a:bodyPr wrap="square" lIns="0" tIns="0" rIns="0" bIns="0" rtlCol="0" anchor="ctr"/>
-          <a:lstStyle/>
-          <a:p>
-            <a:pPr marL="0" indent="0" algn="ctr">
-              <a:buNone/>
-            </a:pPr>
-            <a:r>
-              <a:rPr lang="en-US" sz="2200" b="1" dirty="0">
-                <a:solidFill>
-                  <a:srgbClr val="FFFFFF"/>
-                </a:solidFill>
-                <a:latin typeface="Trebuchet MS" pitchFamily="34" charset="0"/>
-                <a:ea typeface="Trebuchet MS" pitchFamily="34" charset="-122"/>
-                <a:cs typeface="Trebuchet MS" pitchFamily="34" charset="-120"/>
-              </a:rPr>
-              <a:t>5</a:t>
-            </a:r>
-            <a:endParaRPr lang="en-US" sz="2200" dirty="0"/>
-          </a:p>
-        </p:txBody>
-      </p:sp>
-      <p:sp>
-        <p:nvSpPr>
-          <p:cNvPr id="40" name="Text 38"/>
-          <p:cNvSpPr/>
-          <p:nvPr/>
-        </p:nvSpPr>
-        <p:spPr>
-          <a:xfrm>
-            <a:off x="9736531" y="3474720"/>
-            <a:ext cx="1755648" cy="548640"/>
-          </a:xfrm>
-          <a:prstGeom prst="rect">
-            <a:avLst/>
-          </a:prstGeom>
-          <a:noFill/>
-          <a:ln/>
-        </p:spPr>
-        <p:txBody>
-          <a:bodyPr wrap="square" lIns="0" tIns="0" rIns="0" bIns="0" rtlCol="0" anchor="t"/>
-          <a:lstStyle/>
-          <a:p>
-            <a:pPr marL="0" indent="0" algn="ctr">
-              <a:buNone/>
-            </a:pPr>
-            <a:r>
-              <a:rPr lang="en-US" sz="1400" b="1" dirty="0">
-                <a:solidFill>
-                  <a:srgbClr val="1E2A4A"/>
-                </a:solidFill>
-                <a:latin typeface="Trebuchet MS" pitchFamily="34" charset="0"/>
-                <a:ea typeface="Trebuchet MS" pitchFamily="34" charset="-122"/>
-                <a:cs typeface="Trebuchet MS" pitchFamily="34" charset="-120"/>
-              </a:rPr>
-              <a:t>Dilate + Telea</a:t>
-            </a:r>
-            <a:endParaRPr lang="en-US" sz="1400" dirty="0"/>
-          </a:p>
-        </p:txBody>
-      </p:sp>
-      <p:sp>
-        <p:nvSpPr>
-          <p:cNvPr id="41" name="Text 39"/>
-          <p:cNvSpPr/>
-          <p:nvPr/>
-        </p:nvSpPr>
-        <p:spPr>
-          <a:xfrm>
-            <a:off x="9736531" y="3959352"/>
-            <a:ext cx="1755648" cy="841248"/>
-          </a:xfrm>
-          <a:prstGeom prst="rect">
-            <a:avLst/>
-          </a:prstGeom>
-          <a:noFill/>
-          <a:ln/>
-        </p:spPr>
-        <p:txBody>
-          <a:bodyPr wrap="square" lIns="0" tIns="0" rIns="0" bIns="0" rtlCol="0" anchor="t"/>
-          <a:lstStyle/>
-          <a:p>
-            <a:pPr marL="0" indent="0" algn="ctr">
-              <a:buNone/>
-            </a:pPr>
-            <a:r>
-              <a:rPr lang="en-US" sz="1100" dirty="0">
-                <a:solidFill>
-                  <a:srgbClr val="475569"/>
-                </a:solidFill>
-                <a:latin typeface="Calibri" pitchFamily="34" charset="0"/>
-                <a:ea typeface="Calibri" pitchFamily="34" charset="-122"/>
-                <a:cs typeface="Calibri" pitchFamily="34" charset="-120"/>
-              </a:rPr>
-              <a:t>Pad mask, Fast-Marching inpaint (r ∈ [2,7])</a:t>
-            </a:r>
-            <a:endParaRPr lang="en-US" sz="1100" dirty="0"/>
-          </a:p>
-        </p:txBody>
-      </p:sp>
-      <p:sp>
-        <p:nvSpPr>
-          <p:cNvPr id="42" name="Shape 40"/>
-          <p:cNvSpPr/>
-          <p:nvPr/>
-        </p:nvSpPr>
-        <p:spPr>
-          <a:xfrm>
-            <a:off x="566928" y="5138928"/>
-            <a:ext cx="3502152" cy="960120"/>
-          </a:xfrm>
-          <a:prstGeom prst="rect">
-            <a:avLst/>
-          </a:prstGeom>
-          <a:solidFill>
-            <a:srgbClr val="EEF2F8"/>
-          </a:solidFill>
-          <a:ln/>
-        </p:spPr>
-        <p:txBody>
-          <a:bodyPr/>
-          <a:lstStyle/>
-          <a:p>
-            <a:endParaRPr lang="zh-TW" altLang="en-US"/>
-          </a:p>
-        </p:txBody>
-      </p:sp>
-      <p:sp>
-        <p:nvSpPr>
-          <p:cNvPr id="43" name="Shape 41"/>
-          <p:cNvSpPr/>
-          <p:nvPr/>
-        </p:nvSpPr>
-        <p:spPr>
-          <a:xfrm>
-            <a:off x="566928" y="5138928"/>
-            <a:ext cx="73152" cy="960120"/>
-          </a:xfrm>
-          <a:prstGeom prst="rect">
-            <a:avLst/>
-          </a:prstGeom>
-          <a:solidFill>
-            <a:srgbClr val="059669"/>
-          </a:solidFill>
-          <a:ln/>
-        </p:spPr>
-        <p:txBody>
-          <a:bodyPr/>
-          <a:lstStyle/>
-          <a:p>
-            <a:endParaRPr lang="zh-TW" altLang="en-US"/>
-          </a:p>
-        </p:txBody>
-      </p:sp>
-      <p:sp>
-        <p:nvSpPr>
-          <p:cNvPr id="44" name="Text 42"/>
-          <p:cNvSpPr/>
-          <p:nvPr/>
-        </p:nvSpPr>
-        <p:spPr>
-          <a:xfrm>
-            <a:off x="768096" y="5257800"/>
-            <a:ext cx="3136392" cy="310896"/>
-          </a:xfrm>
-          <a:prstGeom prst="rect">
-            <a:avLst/>
-          </a:prstGeom>
-          <a:noFill/>
-          <a:ln/>
-        </p:spPr>
-        <p:txBody>
-          <a:bodyPr wrap="square" lIns="0" tIns="0" rIns="0" bIns="0" rtlCol="0" anchor="ctr"/>
-          <a:lstStyle/>
-          <a:p>
-            <a:pPr marL="0" indent="0">
-              <a:buNone/>
-            </a:pPr>
-            <a:r>
-              <a:rPr lang="en-US" sz="1350" b="1" dirty="0">
-                <a:solidFill>
-                  <a:srgbClr val="1E2A4A"/>
-                </a:solidFill>
-                <a:latin typeface="Trebuchet MS" pitchFamily="34" charset="0"/>
-                <a:ea typeface="Trebuchet MS" pitchFamily="34" charset="-122"/>
-                <a:cs typeface="Trebuchet MS" pitchFamily="34" charset="-120"/>
-              </a:rPr>
-              <a:t>Zero NN dependency</a:t>
-            </a:r>
-            <a:endParaRPr lang="en-US" sz="1350" dirty="0"/>
-          </a:p>
-        </p:txBody>
-      </p:sp>
-      <p:sp>
-        <p:nvSpPr>
-          <p:cNvPr id="45" name="Text 43"/>
-          <p:cNvSpPr/>
-          <p:nvPr/>
-        </p:nvSpPr>
-        <p:spPr>
-          <a:xfrm>
-            <a:off x="768096" y="5568696"/>
-            <a:ext cx="3136392" cy="457200"/>
-          </a:xfrm>
-          <a:prstGeom prst="rect">
-            <a:avLst/>
-          </a:prstGeom>
-          <a:noFill/>
-          <a:ln/>
-        </p:spPr>
-        <p:txBody>
-          <a:bodyPr wrap="square" lIns="0" tIns="0" rIns="0" bIns="0" rtlCol="0" anchor="ctr"/>
-          <a:lstStyle/>
-          <a:p>
-            <a:pPr marL="0" indent="0">
-              <a:buNone/>
-            </a:pPr>
-            <a:r>
-              <a:rPr lang="en-US" sz="1150" dirty="0">
-                <a:solidFill>
-                  <a:srgbClr val="475569"/>
-                </a:solidFill>
-                <a:latin typeface="Calibri" pitchFamily="34" charset="0"/>
-                <a:ea typeface="Calibri" pitchFamily="34" charset="-122"/>
-                <a:cs typeface="Calibri" pitchFamily="34" charset="-120"/>
-              </a:rPr>
-              <a:t>OpenCV + NumPy only — no model weights</a:t>
-            </a:r>
-            <a:endParaRPr lang="en-US" sz="1150" dirty="0"/>
-          </a:p>
-        </p:txBody>
-      </p:sp>
-      <p:sp>
-        <p:nvSpPr>
-          <p:cNvPr id="46" name="Shape 44"/>
-          <p:cNvSpPr/>
-          <p:nvPr/>
-        </p:nvSpPr>
-        <p:spPr>
-          <a:xfrm>
-            <a:off x="4343400" y="5138928"/>
-            <a:ext cx="3502152" cy="960120"/>
-          </a:xfrm>
-          <a:prstGeom prst="rect">
-            <a:avLst/>
-          </a:prstGeom>
-          <a:solidFill>
-            <a:srgbClr val="EEF2F8"/>
-          </a:solidFill>
-          <a:ln/>
-        </p:spPr>
-        <p:txBody>
-          <a:bodyPr/>
-          <a:lstStyle/>
-          <a:p>
-            <a:endParaRPr lang="zh-TW" altLang="en-US"/>
-          </a:p>
-        </p:txBody>
-      </p:sp>
-      <p:sp>
-        <p:nvSpPr>
-          <p:cNvPr id="47" name="Shape 45"/>
-          <p:cNvSpPr/>
-          <p:nvPr/>
-        </p:nvSpPr>
-        <p:spPr>
-          <a:xfrm>
-            <a:off x="4343400" y="5138928"/>
-            <a:ext cx="73152" cy="960120"/>
-          </a:xfrm>
-          <a:prstGeom prst="rect">
-            <a:avLst/>
-          </a:prstGeom>
-          <a:solidFill>
-            <a:srgbClr val="059669"/>
-          </a:solidFill>
-          <a:ln/>
-        </p:spPr>
-        <p:txBody>
-          <a:bodyPr/>
-          <a:lstStyle/>
-          <a:p>
-            <a:endParaRPr lang="zh-TW" altLang="en-US"/>
-          </a:p>
-        </p:txBody>
-      </p:sp>
-      <p:sp>
-        <p:nvSpPr>
-          <p:cNvPr id="48" name="Text 46"/>
-          <p:cNvSpPr/>
-          <p:nvPr/>
-        </p:nvSpPr>
-        <p:spPr>
-          <a:xfrm>
-            <a:off x="4544568" y="5257800"/>
-            <a:ext cx="3136392" cy="310896"/>
-          </a:xfrm>
-          <a:prstGeom prst="rect">
-            <a:avLst/>
-          </a:prstGeom>
-          <a:noFill/>
-          <a:ln/>
-        </p:spPr>
-        <p:txBody>
-          <a:bodyPr wrap="square" lIns="0" tIns="0" rIns="0" bIns="0" rtlCol="0" anchor="ctr"/>
-          <a:lstStyle/>
-          <a:p>
-            <a:pPr marL="0" indent="0">
-              <a:buNone/>
-            </a:pPr>
-            <a:r>
-              <a:rPr lang="en-US" sz="1350" b="1" dirty="0">
-                <a:solidFill>
-                  <a:srgbClr val="1E2A4A"/>
-                </a:solidFill>
-                <a:latin typeface="Trebuchet MS" pitchFamily="34" charset="0"/>
-                <a:ea typeface="Trebuchet MS" pitchFamily="34" charset="-122"/>
-                <a:cs typeface="Trebuchet MS" pitchFamily="34" charset="-120"/>
-              </a:rPr>
-              <a:t>Resolution-adaptive</a:t>
-            </a:r>
-            <a:endParaRPr lang="en-US" sz="1350" dirty="0"/>
-          </a:p>
-        </p:txBody>
-      </p:sp>
-      <p:sp>
-        <p:nvSpPr>
-          <p:cNvPr id="49" name="Text 47"/>
-          <p:cNvSpPr/>
-          <p:nvPr/>
-        </p:nvSpPr>
-        <p:spPr>
-          <a:xfrm>
-            <a:off x="4544568" y="5568696"/>
-            <a:ext cx="3136392" cy="457200"/>
-          </a:xfrm>
-          <a:prstGeom prst="rect">
-            <a:avLst/>
-          </a:prstGeom>
-          <a:noFill/>
-          <a:ln/>
-        </p:spPr>
-        <p:txBody>
-          <a:bodyPr wrap="square" lIns="0" tIns="0" rIns="0" bIns="0" rtlCol="0" anchor="ctr"/>
-          <a:lstStyle/>
-          <a:p>
-            <a:pPr marL="0" indent="0">
-              <a:buNone/>
-            </a:pPr>
-            <a:r>
-              <a:rPr lang="en-US" sz="1150" dirty="0">
-                <a:solidFill>
-                  <a:srgbClr val="475569"/>
-                </a:solidFill>
-                <a:latin typeface="Calibri" pitchFamily="34" charset="0"/>
-                <a:ea typeface="Calibri" pitchFamily="34" charset="-122"/>
-                <a:cs typeface="Calibri" pitchFamily="34" charset="-120"/>
-              </a:rPr>
-              <a:t>max_noise_size auto-scales from 1024² baseline</a:t>
-            </a:r>
-            <a:endParaRPr lang="en-US" sz="1150" dirty="0"/>
-          </a:p>
-        </p:txBody>
-      </p:sp>
-      <p:sp>
-        <p:nvSpPr>
-          <p:cNvPr id="50" name="Shape 48"/>
-          <p:cNvSpPr/>
-          <p:nvPr/>
-        </p:nvSpPr>
-        <p:spPr>
-          <a:xfrm>
-            <a:off x="8119872" y="5138928"/>
-            <a:ext cx="3502152" cy="960120"/>
-          </a:xfrm>
-          <a:prstGeom prst="rect">
-            <a:avLst/>
-          </a:prstGeom>
-          <a:solidFill>
-            <a:srgbClr val="EEF2F8"/>
-          </a:solidFill>
-          <a:ln/>
-        </p:spPr>
-        <p:txBody>
-          <a:bodyPr/>
-          <a:lstStyle/>
-          <a:p>
-            <a:endParaRPr lang="zh-TW" altLang="en-US"/>
-          </a:p>
-        </p:txBody>
-      </p:sp>
-      <p:sp>
-        <p:nvSpPr>
-          <p:cNvPr id="51" name="Shape 49"/>
-          <p:cNvSpPr/>
-          <p:nvPr/>
-        </p:nvSpPr>
-        <p:spPr>
-          <a:xfrm>
-            <a:off x="8119872" y="5138928"/>
-            <a:ext cx="73152" cy="960120"/>
-          </a:xfrm>
-          <a:prstGeom prst="rect">
-            <a:avLst/>
-          </a:prstGeom>
-          <a:solidFill>
-            <a:srgbClr val="059669"/>
-          </a:solidFill>
-          <a:ln/>
-        </p:spPr>
-        <p:txBody>
-          <a:bodyPr/>
-          <a:lstStyle/>
-          <a:p>
-            <a:endParaRPr lang="zh-TW" altLang="en-US"/>
-          </a:p>
-        </p:txBody>
-      </p:sp>
-      <p:sp>
-        <p:nvSpPr>
-          <p:cNvPr id="52" name="Text 50"/>
-          <p:cNvSpPr/>
-          <p:nvPr/>
-        </p:nvSpPr>
-        <p:spPr>
-          <a:xfrm>
-            <a:off x="8321040" y="5257800"/>
-            <a:ext cx="3136392" cy="310896"/>
-          </a:xfrm>
-          <a:prstGeom prst="rect">
-            <a:avLst/>
-          </a:prstGeom>
-          <a:noFill/>
-          <a:ln/>
-        </p:spPr>
-        <p:txBody>
-          <a:bodyPr wrap="square" lIns="0" tIns="0" rIns="0" bIns="0" rtlCol="0" anchor="ctr"/>
-          <a:lstStyle/>
-          <a:p>
-            <a:pPr marL="0" indent="0">
-              <a:buNone/>
-            </a:pPr>
-            <a:r>
-              <a:rPr lang="en-US" sz="1350" b="1" dirty="0">
-                <a:solidFill>
-                  <a:srgbClr val="1E2A4A"/>
-                </a:solidFill>
-                <a:latin typeface="Trebuchet MS" pitchFamily="34" charset="0"/>
-                <a:ea typeface="Trebuchet MS" pitchFamily="34" charset="-122"/>
-                <a:cs typeface="Trebuchet MS" pitchFamily="34" charset="-120"/>
-              </a:rPr>
-              <a:t>11 modular classes</a:t>
-            </a:r>
-            <a:endParaRPr lang="en-US" sz="1350" dirty="0"/>
-          </a:p>
-        </p:txBody>
-      </p:sp>
-      <p:sp>
-        <p:nvSpPr>
-          <p:cNvPr id="53" name="Text 51"/>
-          <p:cNvSpPr/>
-          <p:nvPr/>
-        </p:nvSpPr>
-        <p:spPr>
-          <a:xfrm>
-            <a:off x="8321040" y="5568696"/>
-            <a:ext cx="3136392" cy="457200"/>
-          </a:xfrm>
-          <a:prstGeom prst="rect">
-            <a:avLst/>
-          </a:prstGeom>
-          <a:noFill/>
-          <a:ln/>
-        </p:spPr>
-        <p:txBody>
-          <a:bodyPr wrap="square" lIns="0" tIns="0" rIns="0" bIns="0" rtlCol="0" anchor="ctr"/>
-          <a:lstStyle/>
-          <a:p>
-            <a:pPr marL="0" indent="0">
-              <a:buNone/>
-            </a:pPr>
-            <a:r>
-              <a:rPr lang="en-US" sz="1150" dirty="0">
-                <a:solidFill>
-                  <a:srgbClr val="475569"/>
-                </a:solidFill>
-                <a:latin typeface="Calibri" pitchFamily="34" charset="0"/>
-                <a:ea typeface="Calibri" pitchFamily="34" charset="-122"/>
-                <a:cs typeface="Calibri" pitchFamily="34" charset="-120"/>
-              </a:rPr>
-              <a:t>Single-responsibility core/ + GUI + ComfyUI node</a:t>
-            </a:r>
-            <a:endParaRPr lang="en-US" sz="1150" dirty="0"/>
-          </a:p>
-        </p:txBody>
-      </p:sp>
-      <p:sp>
-        <p:nvSpPr>
-          <p:cNvPr id="54" name="Text 52"/>
-          <p:cNvSpPr/>
-          <p:nvPr/>
-        </p:nvSpPr>
-        <p:spPr>
-          <a:xfrm>
-            <a:off x="566928" y="6473952"/>
-            <a:ext cx="7315200" cy="274320"/>
-          </a:xfrm>
-          <a:prstGeom prst="rect">
-            <a:avLst/>
-          </a:prstGeom>
-          <a:noFill/>
-          <a:ln/>
-        </p:spPr>
-        <p:txBody>
-          <a:bodyPr wrap="square" lIns="0" tIns="0" rIns="0" bIns="0" rtlCol="0" anchor="ctr"/>
-          <a:lstStyle/>
-          <a:p>
-            <a:pPr marL="0" indent="0">
-              <a:buNone/>
-            </a:pPr>
-            <a:r>
-              <a:rPr lang="en-US" sz="900" dirty="0">
-                <a:solidFill>
-                  <a:srgbClr val="64748B"/>
-                </a:solidFill>
-                <a:latin typeface="Calibri" pitchFamily="34" charset="0"/>
-                <a:ea typeface="Calibri" pitchFamily="34" charset="-122"/>
-                <a:cs typeface="Calibri" pitchFamily="34" charset="-120"/>
-              </a:rPr>
-              <a:t>SDXL VAE Noise-Fix  ·  Traditional-CV ComfyUI Node</a:t>
-            </a:r>
             <a:endParaRPr lang="en-US" sz="900" dirty="0"/>
           </a:p>
         </p:txBody>
       </p:sp>
-      <p:sp>
-        <p:nvSpPr>
-          <p:cNvPr id="55" name="Text 53"/>
-          <p:cNvSpPr/>
-          <p:nvPr/>
-        </p:nvSpPr>
-        <p:spPr>
-          <a:xfrm>
-            <a:off x="11073384" y="6473952"/>
-            <a:ext cx="548640" cy="274320"/>
-          </a:xfrm>
-          <a:prstGeom prst="rect">
-            <a:avLst/>
-          </a:prstGeom>
-          <a:noFill/>
-          <a:ln/>
-        </p:spPr>
-        <p:txBody>
-          <a:bodyPr wrap="square" lIns="0" tIns="0" rIns="0" bIns="0" rtlCol="0" anchor="ctr"/>
-          <a:lstStyle/>
-          <a:p>
-            <a:pPr marL="0" indent="0" algn="r">
-              <a:buNone/>
-            </a:pPr>
-            <a:r>
-              <a:rPr lang="en-US" sz="900" dirty="0">
-                <a:solidFill>
-                  <a:srgbClr val="64748B"/>
-                </a:solidFill>
-                <a:latin typeface="Calibri" pitchFamily="34" charset="0"/>
-                <a:ea typeface="Calibri" pitchFamily="34" charset="-122"/>
-                <a:cs typeface="Calibri" pitchFamily="34" charset="-120"/>
-              </a:rPr>
-              <a:t>4</a:t>
-            </a:r>
-            <a:endParaRPr lang="en-US" sz="900" dirty="0"/>
-          </a:p>
-        </p:txBody>
-      </p:sp>
+      <p:pic>
+        <p:nvPicPr>
+          <p:cNvPr id="57" name="圖片 56">
+            <a:extLst>
+              <a:ext uri="{FF2B5EF4-FFF2-40B4-BE49-F238E27FC236}">
+                <a16:creationId xmlns:a16="http://schemas.microsoft.com/office/drawing/2014/main" id="{53FAE844-3C0D-F66D-135F-04E421CF0107}"/>
+              </a:ext>
+            </a:extLst>
+          </p:cNvPr>
+          <p:cNvPicPr>
+            <a:picLocks noChangeAspect="1"/>
+          </p:cNvPicPr>
+          <p:nvPr/>
+        </p:nvPicPr>
+        <p:blipFill>
+          <a:blip r:embed="rId3"/>
+          <a:srcRect t="16222"/>
+          <a:stretch>
+            <a:fillRect/>
+          </a:stretch>
+        </p:blipFill>
+        <p:spPr>
+          <a:xfrm>
+            <a:off x="644748" y="1298160"/>
+            <a:ext cx="10977276" cy="5175791"/>
+          </a:xfrm>
+          <a:prstGeom prst="rect">
+            <a:avLst/>
+          </a:prstGeom>
+        </p:spPr>
+      </p:pic>
     </p:spTree>
   </p:cSld>
   <p:clrMapOvr>
@@ -7807,6 +5469,17 @@
               <a:buNone/>
             </a:pPr>
             <a:r>
+              <a:rPr lang="en-US" altLang="zh-TW" sz="3000" b="1" dirty="0">
+                <a:solidFill>
+                  <a:srgbClr val="1E2A4A"/>
+                </a:solidFill>
+                <a:latin typeface="Trebuchet MS" pitchFamily="34" charset="0"/>
+                <a:ea typeface="Trebuchet MS" pitchFamily="34" charset="-122"/>
+                <a:cs typeface="Trebuchet MS" pitchFamily="34" charset="-120"/>
+              </a:rPr>
+              <a:t>Detection </a:t>
+            </a:r>
+            <a:r>
               <a:rPr lang="en-US" sz="3000" b="1" dirty="0">
                 <a:solidFill>
                   <a:srgbClr val="1E2A4A"/>
@@ -8646,7 +6319,7 @@
                 <a:ea typeface="Trebuchet MS" pitchFamily="34" charset="-122"/>
                 <a:cs typeface="Trebuchet MS" pitchFamily="34" charset="-120"/>
               </a:rPr>
-              <a:t>Methodology II — Structural &amp; LAB Verification</a:t>
+              <a:t>Detection Methodology II — Structural &amp; LAB Verification</a:t>
             </a:r>
             <a:endParaRPr lang="en-US" sz="3000" dirty="0"/>
           </a:p>
@@ -10945,1059 +8618,6 @@
 </file>
 
 <file path=ppt/slides/slide7.xml><?xml version="1.0" encoding="utf-8"?>
-<p:sld xmlns:a="http://schemas.openxmlformats.org/drawingml/2006/main" xmlns:r="http://schemas.openxmlformats.org/officeDocument/2006/relationships" xmlns:p="http://schemas.openxmlformats.org/presentationml/2006/main">
-  <p:cSld name="Slide 7">
-    <p:bg>
-      <p:bgPr>
-        <a:solidFill>
-          <a:srgbClr val="F7F8FA"/>
-        </a:solidFill>
-        <a:effectLst/>
-      </p:bgPr>
-    </p:bg>
-    <p:spTree>
-      <p:nvGrpSpPr>
-        <p:cNvPr id="1" name=""/>
-        <p:cNvGrpSpPr/>
-        <p:nvPr/>
-      </p:nvGrpSpPr>
-      <p:grpSpPr>
-        <a:xfrm>
-          <a:off x="0" y="0"/>
-          <a:ext cx="0" cy="0"/>
-          <a:chOff x="0" y="0"/>
-          <a:chExt cx="0" cy="0"/>
-        </a:xfrm>
-      </p:grpSpPr>
-      <p:sp>
-        <p:nvSpPr>
-          <p:cNvPr id="2" name="Text 0"/>
-          <p:cNvSpPr/>
-          <p:nvPr/>
-        </p:nvSpPr>
-        <p:spPr>
-          <a:xfrm>
-            <a:off x="566928" y="420624"/>
-            <a:ext cx="11055096" cy="292608"/>
-          </a:xfrm>
-          <a:prstGeom prst="rect">
-            <a:avLst/>
-          </a:prstGeom>
-          <a:noFill/>
-          <a:ln/>
-        </p:spPr>
-        <p:txBody>
-          <a:bodyPr wrap="square" lIns="0" tIns="0" rIns="0" bIns="0" rtlCol="0" anchor="ctr"/>
-          <a:lstStyle/>
-          <a:p>
-            <a:pPr marL="0" indent="0" algn="l">
-              <a:buNone/>
-            </a:pPr>
-            <a:r>
-              <a:rPr lang="en-US" sz="1250" b="1" kern="0" spc="300" dirty="0">
-                <a:solidFill>
-                  <a:srgbClr val="059669"/>
-                </a:solidFill>
-                <a:latin typeface="Trebuchet MS" pitchFamily="34" charset="0"/>
-                <a:ea typeface="Trebuchet MS" pitchFamily="34" charset="-122"/>
-                <a:cs typeface="Trebuchet MS" pitchFamily="34" charset="-120"/>
-              </a:rPr>
-              <a:t>03 · SYSTEM &amp; METHODS</a:t>
-            </a:r>
-            <a:endParaRPr lang="en-US" sz="1250" dirty="0"/>
-          </a:p>
-        </p:txBody>
-      </p:sp>
-      <p:sp>
-        <p:nvSpPr>
-          <p:cNvPr id="3" name="Text 1"/>
-          <p:cNvSpPr/>
-          <p:nvPr/>
-        </p:nvSpPr>
-        <p:spPr>
-          <a:xfrm>
-            <a:off x="566928" y="713232"/>
-            <a:ext cx="11055096" cy="658368"/>
-          </a:xfrm>
-          <a:prstGeom prst="rect">
-            <a:avLst/>
-          </a:prstGeom>
-          <a:noFill/>
-          <a:ln/>
-        </p:spPr>
-        <p:txBody>
-          <a:bodyPr wrap="square" lIns="0" tIns="0" rIns="0" bIns="0" rtlCol="0" anchor="ctr"/>
-          <a:lstStyle/>
-          <a:p>
-            <a:pPr marL="0" indent="0" algn="l">
-              <a:buNone/>
-            </a:pPr>
-            <a:r>
-              <a:rPr lang="en-US" sz="3000" b="1" dirty="0">
-                <a:solidFill>
-                  <a:srgbClr val="1E2A4A"/>
-                </a:solidFill>
-                <a:latin typeface="Trebuchet MS" pitchFamily="34" charset="0"/>
-                <a:ea typeface="Trebuchet MS" pitchFamily="34" charset="-122"/>
-                <a:cs typeface="Trebuchet MS" pitchFamily="34" charset="-120"/>
-              </a:rPr>
-              <a:t>Technical Implementation</a:t>
-            </a:r>
-            <a:endParaRPr lang="en-US" sz="3000" dirty="0"/>
-          </a:p>
-        </p:txBody>
-      </p:sp>
-      <p:sp>
-        <p:nvSpPr>
-          <p:cNvPr id="4" name="Shape 2"/>
-          <p:cNvSpPr/>
-          <p:nvPr/>
-        </p:nvSpPr>
-        <p:spPr>
-          <a:xfrm>
-            <a:off x="566928" y="1627632"/>
-            <a:ext cx="5372100" cy="1371600"/>
-          </a:xfrm>
-          <a:prstGeom prst="rect">
-            <a:avLst/>
-          </a:prstGeom>
-          <a:solidFill>
-            <a:srgbClr val="FFFFFF"/>
-          </a:solidFill>
-          <a:ln w="12700">
-            <a:solidFill>
-              <a:srgbClr val="E2E8F0"/>
-            </a:solidFill>
-            <a:prstDash val="solid"/>
-          </a:ln>
-          <a:effectLst>
-            <a:outerShdw blurRad="88900" dist="38100" dir="8100000" algn="bl" rotWithShape="0">
-              <a:srgbClr val="000000">
-                <a:alpha val="10000"/>
-              </a:srgbClr>
-            </a:outerShdw>
-          </a:effectLst>
-        </p:spPr>
-        <p:txBody>
-          <a:bodyPr/>
-          <a:lstStyle/>
-          <a:p>
-            <a:endParaRPr lang="zh-TW" altLang="en-US"/>
-          </a:p>
-        </p:txBody>
-      </p:sp>
-      <p:sp>
-        <p:nvSpPr>
-          <p:cNvPr id="5" name="Shape 3"/>
-          <p:cNvSpPr/>
-          <p:nvPr/>
-        </p:nvSpPr>
-        <p:spPr>
-          <a:xfrm>
-            <a:off x="566928" y="1627632"/>
-            <a:ext cx="82296" cy="1371600"/>
-          </a:xfrm>
-          <a:prstGeom prst="rect">
-            <a:avLst/>
-          </a:prstGeom>
-          <a:solidFill>
-            <a:srgbClr val="2C3E66"/>
-          </a:solidFill>
-          <a:ln/>
-        </p:spPr>
-        <p:txBody>
-          <a:bodyPr/>
-          <a:lstStyle/>
-          <a:p>
-            <a:endParaRPr lang="zh-TW" altLang="en-US"/>
-          </a:p>
-        </p:txBody>
-      </p:sp>
-      <p:sp>
-        <p:nvSpPr>
-          <p:cNvPr id="6" name="Text 4"/>
-          <p:cNvSpPr/>
-          <p:nvPr/>
-        </p:nvSpPr>
-        <p:spPr>
-          <a:xfrm>
-            <a:off x="804672" y="1773936"/>
-            <a:ext cx="4914900" cy="365760"/>
-          </a:xfrm>
-          <a:prstGeom prst="rect">
-            <a:avLst/>
-          </a:prstGeom>
-          <a:noFill/>
-          <a:ln/>
-        </p:spPr>
-        <p:txBody>
-          <a:bodyPr wrap="square" lIns="0" tIns="0" rIns="0" bIns="0" rtlCol="0" anchor="ctr"/>
-          <a:lstStyle/>
-          <a:p>
-            <a:pPr marL="0" indent="0">
-              <a:buNone/>
-            </a:pPr>
-            <a:r>
-              <a:rPr lang="en-US" sz="1450" b="1" dirty="0">
-                <a:solidFill>
-                  <a:srgbClr val="1E2A4A"/>
-                </a:solidFill>
-                <a:latin typeface="Trebuchet MS" pitchFamily="34" charset="0"/>
-                <a:ea typeface="Trebuchet MS" pitchFamily="34" charset="-122"/>
-                <a:cs typeface="Trebuchet MS" pitchFamily="34" charset="-120"/>
-              </a:rPr>
-              <a:t>Modular core/ (11 classes)</a:t>
-            </a:r>
-            <a:endParaRPr lang="en-US" sz="1450" dirty="0"/>
-          </a:p>
-        </p:txBody>
-      </p:sp>
-      <p:sp>
-        <p:nvSpPr>
-          <p:cNvPr id="7" name="Text 5"/>
-          <p:cNvSpPr/>
-          <p:nvPr/>
-        </p:nvSpPr>
-        <p:spPr>
-          <a:xfrm>
-            <a:off x="804672" y="2130552"/>
-            <a:ext cx="4914900" cy="777240"/>
-          </a:xfrm>
-          <a:prstGeom prst="rect">
-            <a:avLst/>
-          </a:prstGeom>
-          <a:noFill/>
-          <a:ln/>
-        </p:spPr>
-        <p:txBody>
-          <a:bodyPr wrap="square" lIns="0" tIns="0" rIns="0" bIns="0" rtlCol="0" anchor="t"/>
-          <a:lstStyle/>
-          <a:p>
-            <a:pPr marL="0" indent="0">
-              <a:buNone/>
-            </a:pPr>
-            <a:r>
-              <a:rPr lang="en-US" sz="1200" dirty="0">
-                <a:solidFill>
-                  <a:srgbClr val="475569"/>
-                </a:solidFill>
-                <a:latin typeface="Calibri" pitchFamily="34" charset="0"/>
-                <a:ea typeface="Calibri" pitchFamily="34" charset="-122"/>
-                <a:cs typeface="Calibri" pitchFamily="34" charset="-120"/>
-              </a:rPr>
-              <a:t>Each stage is one single-responsibility class — energy, thresholding, structural, chromatic, morphology, detector, inpainter, pipeline — independently testable.</a:t>
-            </a:r>
-            <a:endParaRPr lang="en-US" sz="1200" dirty="0"/>
-          </a:p>
-        </p:txBody>
-      </p:sp>
-      <p:sp>
-        <p:nvSpPr>
-          <p:cNvPr id="8" name="Shape 6"/>
-          <p:cNvSpPr/>
-          <p:nvPr/>
-        </p:nvSpPr>
-        <p:spPr>
-          <a:xfrm>
-            <a:off x="6249924" y="1627632"/>
-            <a:ext cx="5372100" cy="1371600"/>
-          </a:xfrm>
-          <a:prstGeom prst="rect">
-            <a:avLst/>
-          </a:prstGeom>
-          <a:solidFill>
-            <a:srgbClr val="FFFFFF"/>
-          </a:solidFill>
-          <a:ln w="12700">
-            <a:solidFill>
-              <a:srgbClr val="E2E8F0"/>
-            </a:solidFill>
-            <a:prstDash val="solid"/>
-          </a:ln>
-          <a:effectLst>
-            <a:outerShdw blurRad="88900" dist="38100" dir="8100000" algn="bl" rotWithShape="0">
-              <a:srgbClr val="000000">
-                <a:alpha val="10000"/>
-              </a:srgbClr>
-            </a:outerShdw>
-          </a:effectLst>
-        </p:spPr>
-        <p:txBody>
-          <a:bodyPr/>
-          <a:lstStyle/>
-          <a:p>
-            <a:endParaRPr lang="zh-TW" altLang="en-US"/>
-          </a:p>
-        </p:txBody>
-      </p:sp>
-      <p:sp>
-        <p:nvSpPr>
-          <p:cNvPr id="9" name="Shape 7"/>
-          <p:cNvSpPr/>
-          <p:nvPr/>
-        </p:nvSpPr>
-        <p:spPr>
-          <a:xfrm>
-            <a:off x="6249924" y="1627632"/>
-            <a:ext cx="82296" cy="1371600"/>
-          </a:xfrm>
-          <a:prstGeom prst="rect">
-            <a:avLst/>
-          </a:prstGeom>
-          <a:solidFill>
-            <a:srgbClr val="059669"/>
-          </a:solidFill>
-          <a:ln/>
-        </p:spPr>
-        <p:txBody>
-          <a:bodyPr/>
-          <a:lstStyle/>
-          <a:p>
-            <a:endParaRPr lang="zh-TW" altLang="en-US"/>
-          </a:p>
-        </p:txBody>
-      </p:sp>
-      <p:sp>
-        <p:nvSpPr>
-          <p:cNvPr id="10" name="Text 8"/>
-          <p:cNvSpPr/>
-          <p:nvPr/>
-        </p:nvSpPr>
-        <p:spPr>
-          <a:xfrm>
-            <a:off x="6487668" y="1773936"/>
-            <a:ext cx="4914900" cy="365760"/>
-          </a:xfrm>
-          <a:prstGeom prst="rect">
-            <a:avLst/>
-          </a:prstGeom>
-          <a:noFill/>
-          <a:ln/>
-        </p:spPr>
-        <p:txBody>
-          <a:bodyPr wrap="square" lIns="0" tIns="0" rIns="0" bIns="0" rtlCol="0" anchor="ctr"/>
-          <a:lstStyle/>
-          <a:p>
-            <a:pPr marL="0" indent="0">
-              <a:buNone/>
-            </a:pPr>
-            <a:r>
-              <a:rPr lang="en-US" sz="1450" b="1" dirty="0">
-                <a:solidFill>
-                  <a:srgbClr val="1E2A4A"/>
-                </a:solidFill>
-                <a:latin typeface="Trebuchet MS" pitchFamily="34" charset="0"/>
-                <a:ea typeface="Trebuchet MS" pitchFamily="34" charset="-122"/>
-                <a:cs typeface="Trebuchet MS" pitchFamily="34" charset="-120"/>
-              </a:rPr>
-              <a:t>Resolution-adaptive scaling</a:t>
-            </a:r>
-            <a:endParaRPr lang="en-US" sz="1450" dirty="0"/>
-          </a:p>
-        </p:txBody>
-      </p:sp>
-      <p:sp>
-        <p:nvSpPr>
-          <p:cNvPr id="11" name="Text 9"/>
-          <p:cNvSpPr/>
-          <p:nvPr/>
-        </p:nvSpPr>
-        <p:spPr>
-          <a:xfrm>
-            <a:off x="6487668" y="2130552"/>
-            <a:ext cx="4914900" cy="777240"/>
-          </a:xfrm>
-          <a:prstGeom prst="rect">
-            <a:avLst/>
-          </a:prstGeom>
-          <a:noFill/>
-          <a:ln/>
-        </p:spPr>
-        <p:txBody>
-          <a:bodyPr wrap="square" lIns="0" tIns="0" rIns="0" bIns="0" rtlCol="0" anchor="t"/>
-          <a:lstStyle/>
-          <a:p>
-            <a:pPr marL="0" indent="0">
-              <a:buNone/>
-            </a:pPr>
-            <a:r>
-              <a:rPr lang="en-US" sz="1200" dirty="0">
-                <a:solidFill>
-                  <a:srgbClr val="475569"/>
-                </a:solidFill>
-                <a:latin typeface="Calibri" pitchFamily="34" charset="0"/>
-                <a:ea typeface="Calibri" pitchFamily="34" charset="-122"/>
-                <a:cs typeface="Calibri" pitchFamily="34" charset="-120"/>
-              </a:rPr>
-              <a:t>max_noise_size is calibrated at a 1024² baseline and auto-scales by pixel ratio, so one parameter behaves consistently from 768p to 2K+.</a:t>
-            </a:r>
-            <a:endParaRPr lang="en-US" sz="1200" dirty="0"/>
-          </a:p>
-        </p:txBody>
-      </p:sp>
-      <p:sp>
-        <p:nvSpPr>
-          <p:cNvPr id="12" name="Shape 10"/>
-          <p:cNvSpPr/>
-          <p:nvPr/>
-        </p:nvSpPr>
-        <p:spPr>
-          <a:xfrm>
-            <a:off x="566928" y="3182112"/>
-            <a:ext cx="5372100" cy="1371600"/>
-          </a:xfrm>
-          <a:prstGeom prst="rect">
-            <a:avLst/>
-          </a:prstGeom>
-          <a:solidFill>
-            <a:srgbClr val="FFFFFF"/>
-          </a:solidFill>
-          <a:ln w="12700">
-            <a:solidFill>
-              <a:srgbClr val="E2E8F0"/>
-            </a:solidFill>
-            <a:prstDash val="solid"/>
-          </a:ln>
-          <a:effectLst>
-            <a:outerShdw blurRad="88900" dist="38100" dir="8100000" algn="bl" rotWithShape="0">
-              <a:srgbClr val="000000">
-                <a:alpha val="10000"/>
-              </a:srgbClr>
-            </a:outerShdw>
-          </a:effectLst>
-        </p:spPr>
-        <p:txBody>
-          <a:bodyPr/>
-          <a:lstStyle/>
-          <a:p>
-            <a:endParaRPr lang="zh-TW" altLang="en-US"/>
-          </a:p>
-        </p:txBody>
-      </p:sp>
-      <p:sp>
-        <p:nvSpPr>
-          <p:cNvPr id="13" name="Shape 11"/>
-          <p:cNvSpPr/>
-          <p:nvPr/>
-        </p:nvSpPr>
-        <p:spPr>
-          <a:xfrm>
-            <a:off x="566928" y="3182112"/>
-            <a:ext cx="82296" cy="1371600"/>
-          </a:xfrm>
-          <a:prstGeom prst="rect">
-            <a:avLst/>
-          </a:prstGeom>
-          <a:solidFill>
-            <a:srgbClr val="2C3E66"/>
-          </a:solidFill>
-          <a:ln/>
-        </p:spPr>
-        <p:txBody>
-          <a:bodyPr/>
-          <a:lstStyle/>
-          <a:p>
-            <a:endParaRPr lang="zh-TW" altLang="en-US"/>
-          </a:p>
-        </p:txBody>
-      </p:sp>
-      <p:sp>
-        <p:nvSpPr>
-          <p:cNvPr id="14" name="Text 12"/>
-          <p:cNvSpPr/>
-          <p:nvPr/>
-        </p:nvSpPr>
-        <p:spPr>
-          <a:xfrm>
-            <a:off x="804672" y="3328416"/>
-            <a:ext cx="4914900" cy="365760"/>
-          </a:xfrm>
-          <a:prstGeom prst="rect">
-            <a:avLst/>
-          </a:prstGeom>
-          <a:noFill/>
-          <a:ln/>
-        </p:spPr>
-        <p:txBody>
-          <a:bodyPr wrap="square" lIns="0" tIns="0" rIns="0" bIns="0" rtlCol="0" anchor="ctr"/>
-          <a:lstStyle/>
-          <a:p>
-            <a:pPr marL="0" indent="0">
-              <a:buNone/>
-            </a:pPr>
-            <a:r>
-              <a:rPr lang="en-US" sz="1450" b="1" dirty="0">
-                <a:solidFill>
-                  <a:srgbClr val="1E2A4A"/>
-                </a:solidFill>
-                <a:latin typeface="Trebuchet MS" pitchFamily="34" charset="0"/>
-                <a:ea typeface="Trebuchet MS" pitchFamily="34" charset="-122"/>
-                <a:cs typeface="Trebuchet MS" pitchFamily="34" charset="-120"/>
-              </a:rPr>
-              <a:t>Telea inpaint, radius-clamped</a:t>
-            </a:r>
-            <a:endParaRPr lang="en-US" sz="1450" dirty="0"/>
-          </a:p>
-        </p:txBody>
-      </p:sp>
-      <p:sp>
-        <p:nvSpPr>
-          <p:cNvPr id="15" name="Text 13"/>
-          <p:cNvSpPr/>
-          <p:nvPr/>
-        </p:nvSpPr>
-        <p:spPr>
-          <a:xfrm>
-            <a:off x="804672" y="3685032"/>
-            <a:ext cx="4914900" cy="777240"/>
-          </a:xfrm>
-          <a:prstGeom prst="rect">
-            <a:avLst/>
-          </a:prstGeom>
-          <a:noFill/>
-          <a:ln/>
-        </p:spPr>
-        <p:txBody>
-          <a:bodyPr wrap="square" lIns="0" tIns="0" rIns="0" bIns="0" rtlCol="0" anchor="t"/>
-          <a:lstStyle/>
-          <a:p>
-            <a:pPr marL="0" indent="0">
-              <a:buNone/>
-            </a:pPr>
-            <a:r>
-              <a:rPr lang="en-US" sz="1200" dirty="0">
-                <a:solidFill>
-                  <a:srgbClr val="475569"/>
-                </a:solidFill>
-                <a:latin typeface="Calibri" pitchFamily="34" charset="0"/>
-                <a:ea typeface="Calibri" pitchFamily="34" charset="-122"/>
-                <a:cs typeface="Calibri" pitchFamily="34" charset="-120"/>
-              </a:rPr>
-              <a:t>cv2.INPAINT_TELEA with radius = clip(⌈√A⌉, 2, 7); empty-mask fast-path copies the original untouched.</a:t>
-            </a:r>
-            <a:endParaRPr lang="en-US" sz="1200" dirty="0"/>
-          </a:p>
-        </p:txBody>
-      </p:sp>
-      <p:sp>
-        <p:nvSpPr>
-          <p:cNvPr id="16" name="Shape 14"/>
-          <p:cNvSpPr/>
-          <p:nvPr/>
-        </p:nvSpPr>
-        <p:spPr>
-          <a:xfrm>
-            <a:off x="6249924" y="3182112"/>
-            <a:ext cx="5372100" cy="1371600"/>
-          </a:xfrm>
-          <a:prstGeom prst="rect">
-            <a:avLst/>
-          </a:prstGeom>
-          <a:solidFill>
-            <a:srgbClr val="FFFFFF"/>
-          </a:solidFill>
-          <a:ln w="12700">
-            <a:solidFill>
-              <a:srgbClr val="E2E8F0"/>
-            </a:solidFill>
-            <a:prstDash val="solid"/>
-          </a:ln>
-          <a:effectLst>
-            <a:outerShdw blurRad="88900" dist="38100" dir="8100000" algn="bl" rotWithShape="0">
-              <a:srgbClr val="000000">
-                <a:alpha val="10000"/>
-              </a:srgbClr>
-            </a:outerShdw>
-          </a:effectLst>
-        </p:spPr>
-        <p:txBody>
-          <a:bodyPr/>
-          <a:lstStyle/>
-          <a:p>
-            <a:endParaRPr lang="zh-TW" altLang="en-US"/>
-          </a:p>
-        </p:txBody>
-      </p:sp>
-      <p:sp>
-        <p:nvSpPr>
-          <p:cNvPr id="17" name="Shape 15"/>
-          <p:cNvSpPr/>
-          <p:nvPr/>
-        </p:nvSpPr>
-        <p:spPr>
-          <a:xfrm>
-            <a:off x="6249924" y="3182112"/>
-            <a:ext cx="82296" cy="1371600"/>
-          </a:xfrm>
-          <a:prstGeom prst="rect">
-            <a:avLst/>
-          </a:prstGeom>
-          <a:solidFill>
-            <a:srgbClr val="059669"/>
-          </a:solidFill>
-          <a:ln/>
-        </p:spPr>
-        <p:txBody>
-          <a:bodyPr/>
-          <a:lstStyle/>
-          <a:p>
-            <a:endParaRPr lang="zh-TW" altLang="en-US"/>
-          </a:p>
-        </p:txBody>
-      </p:sp>
-      <p:sp>
-        <p:nvSpPr>
-          <p:cNvPr id="18" name="Text 16"/>
-          <p:cNvSpPr/>
-          <p:nvPr/>
-        </p:nvSpPr>
-        <p:spPr>
-          <a:xfrm>
-            <a:off x="6487668" y="3328416"/>
-            <a:ext cx="4914900" cy="365760"/>
-          </a:xfrm>
-          <a:prstGeom prst="rect">
-            <a:avLst/>
-          </a:prstGeom>
-          <a:noFill/>
-          <a:ln/>
-        </p:spPr>
-        <p:txBody>
-          <a:bodyPr wrap="square" lIns="0" tIns="0" rIns="0" bIns="0" rtlCol="0" anchor="ctr"/>
-          <a:lstStyle/>
-          <a:p>
-            <a:pPr marL="0" indent="0">
-              <a:buNone/>
-            </a:pPr>
-            <a:r>
-              <a:rPr lang="en-US" sz="1450" b="1" dirty="0">
-                <a:solidFill>
-                  <a:srgbClr val="1E2A4A"/>
-                </a:solidFill>
-                <a:latin typeface="Trebuchet MS" pitchFamily="34" charset="0"/>
-                <a:ea typeface="Trebuchet MS" pitchFamily="34" charset="-122"/>
-                <a:cs typeface="Trebuchet MS" pitchFamily="34" charset="-120"/>
-              </a:rPr>
-              <a:t>Batch + tensor bridge</a:t>
-            </a:r>
-            <a:endParaRPr lang="en-US" sz="1450" dirty="0"/>
-          </a:p>
-        </p:txBody>
-      </p:sp>
-      <p:sp>
-        <p:nvSpPr>
-          <p:cNvPr id="19" name="Text 17"/>
-          <p:cNvSpPr/>
-          <p:nvPr/>
-        </p:nvSpPr>
-        <p:spPr>
-          <a:xfrm>
-            <a:off x="6487668" y="3685032"/>
-            <a:ext cx="4914900" cy="777240"/>
-          </a:xfrm>
-          <a:prstGeom prst="rect">
-            <a:avLst/>
-          </a:prstGeom>
-          <a:noFill/>
-          <a:ln/>
-        </p:spPr>
-        <p:txBody>
-          <a:bodyPr wrap="square" lIns="0" tIns="0" rIns="0" bIns="0" rtlCol="0" anchor="t"/>
-          <a:lstStyle/>
-          <a:p>
-            <a:pPr marL="0" indent="0">
-              <a:buNone/>
-            </a:pPr>
-            <a:r>
-              <a:rPr lang="en-US" sz="1200" dirty="0">
-                <a:solidFill>
-                  <a:srgbClr val="475569"/>
-                </a:solidFill>
-                <a:latin typeface="Calibri" pitchFamily="34" charset="0"/>
-                <a:ea typeface="Calibri" pitchFamily="34" charset="-122"/>
-                <a:cs typeface="Calibri" pitchFamily="34" charset="-120"/>
-              </a:rPr>
-              <a:t>Handles ComfyUI 4-D [B,H,W,C] tensors with a single GPU↔CPU transfer per batch — video / sequence friendly.</a:t>
-            </a:r>
-            <a:endParaRPr lang="en-US" sz="1200" dirty="0"/>
-          </a:p>
-        </p:txBody>
-      </p:sp>
-      <p:sp>
-        <p:nvSpPr>
-          <p:cNvPr id="20" name="Shape 18"/>
-          <p:cNvSpPr/>
-          <p:nvPr/>
-        </p:nvSpPr>
-        <p:spPr>
-          <a:xfrm>
-            <a:off x="566928" y="4736592"/>
-            <a:ext cx="5372100" cy="1371600"/>
-          </a:xfrm>
-          <a:prstGeom prst="rect">
-            <a:avLst/>
-          </a:prstGeom>
-          <a:solidFill>
-            <a:srgbClr val="FFFFFF"/>
-          </a:solidFill>
-          <a:ln w="12700">
-            <a:solidFill>
-              <a:srgbClr val="E2E8F0"/>
-            </a:solidFill>
-            <a:prstDash val="solid"/>
-          </a:ln>
-          <a:effectLst>
-            <a:outerShdw blurRad="88900" dist="38100" dir="8100000" algn="bl" rotWithShape="0">
-              <a:srgbClr val="000000">
-                <a:alpha val="10000"/>
-              </a:srgbClr>
-            </a:outerShdw>
-          </a:effectLst>
-        </p:spPr>
-        <p:txBody>
-          <a:bodyPr/>
-          <a:lstStyle/>
-          <a:p>
-            <a:endParaRPr lang="zh-TW" altLang="en-US"/>
-          </a:p>
-        </p:txBody>
-      </p:sp>
-      <p:sp>
-        <p:nvSpPr>
-          <p:cNvPr id="21" name="Shape 19"/>
-          <p:cNvSpPr/>
-          <p:nvPr/>
-        </p:nvSpPr>
-        <p:spPr>
-          <a:xfrm>
-            <a:off x="566928" y="4736592"/>
-            <a:ext cx="82296" cy="1371600"/>
-          </a:xfrm>
-          <a:prstGeom prst="rect">
-            <a:avLst/>
-          </a:prstGeom>
-          <a:solidFill>
-            <a:srgbClr val="2C3E66"/>
-          </a:solidFill>
-          <a:ln/>
-        </p:spPr>
-        <p:txBody>
-          <a:bodyPr/>
-          <a:lstStyle/>
-          <a:p>
-            <a:endParaRPr lang="zh-TW" altLang="en-US"/>
-          </a:p>
-        </p:txBody>
-      </p:sp>
-      <p:sp>
-        <p:nvSpPr>
-          <p:cNvPr id="22" name="Text 20"/>
-          <p:cNvSpPr/>
-          <p:nvPr/>
-        </p:nvSpPr>
-        <p:spPr>
-          <a:xfrm>
-            <a:off x="804672" y="4882896"/>
-            <a:ext cx="4914900" cy="365760"/>
-          </a:xfrm>
-          <a:prstGeom prst="rect">
-            <a:avLst/>
-          </a:prstGeom>
-          <a:noFill/>
-          <a:ln/>
-        </p:spPr>
-        <p:txBody>
-          <a:bodyPr wrap="square" lIns="0" tIns="0" rIns="0" bIns="0" rtlCol="0" anchor="ctr"/>
-          <a:lstStyle/>
-          <a:p>
-            <a:pPr marL="0" indent="0">
-              <a:buNone/>
-            </a:pPr>
-            <a:r>
-              <a:rPr lang="en-US" sz="1450" b="1" dirty="0">
-                <a:solidFill>
-                  <a:srgbClr val="1E2A4A"/>
-                </a:solidFill>
-                <a:latin typeface="Trebuchet MS" pitchFamily="34" charset="0"/>
-                <a:ea typeface="Trebuchet MS" pitchFamily="34" charset="-122"/>
-                <a:cs typeface="Trebuchet MS" pitchFamily="34" charset="-120"/>
-              </a:rPr>
-              <a:t>11 preview modes</a:t>
-            </a:r>
-            <a:endParaRPr lang="en-US" sz="1450" dirty="0"/>
-          </a:p>
-        </p:txBody>
-      </p:sp>
-      <p:sp>
-        <p:nvSpPr>
-          <p:cNvPr id="23" name="Text 21"/>
-          <p:cNvSpPr/>
-          <p:nvPr/>
-        </p:nvSpPr>
-        <p:spPr>
-          <a:xfrm>
-            <a:off x="804672" y="5239512"/>
-            <a:ext cx="4914900" cy="777240"/>
-          </a:xfrm>
-          <a:prstGeom prst="rect">
-            <a:avLst/>
-          </a:prstGeom>
-          <a:noFill/>
-          <a:ln/>
-        </p:spPr>
-        <p:txBody>
-          <a:bodyPr wrap="square" lIns="0" tIns="0" rIns="0" bIns="0" rtlCol="0" anchor="t"/>
-          <a:lstStyle/>
-          <a:p>
-            <a:pPr marL="0" indent="0">
-              <a:buNone/>
-            </a:pPr>
-            <a:r>
-              <a:rPr lang="en-US" sz="1200" dirty="0">
-                <a:solidFill>
-                  <a:srgbClr val="475569"/>
-                </a:solidFill>
-                <a:latin typeface="Calibri" pitchFamily="34" charset="0"/>
-                <a:ea typeface="Calibri" pitchFamily="34" charset="-122"/>
-                <a:cs typeface="Calibri" pitchFamily="34" charset="-120"/>
-              </a:rPr>
-              <a:t>Original, overlay, mask, repaired, side-by-side and every intermediate map — turns parameter tuning into direct inspection.</a:t>
-            </a:r>
-            <a:endParaRPr lang="en-US" sz="1200" dirty="0"/>
-          </a:p>
-        </p:txBody>
-      </p:sp>
-      <p:sp>
-        <p:nvSpPr>
-          <p:cNvPr id="24" name="Shape 22"/>
-          <p:cNvSpPr/>
-          <p:nvPr/>
-        </p:nvSpPr>
-        <p:spPr>
-          <a:xfrm>
-            <a:off x="6249924" y="4736592"/>
-            <a:ext cx="5372100" cy="1371600"/>
-          </a:xfrm>
-          <a:prstGeom prst="rect">
-            <a:avLst/>
-          </a:prstGeom>
-          <a:solidFill>
-            <a:srgbClr val="FFFFFF"/>
-          </a:solidFill>
-          <a:ln w="12700">
-            <a:solidFill>
-              <a:srgbClr val="E2E8F0"/>
-            </a:solidFill>
-            <a:prstDash val="solid"/>
-          </a:ln>
-          <a:effectLst>
-            <a:outerShdw blurRad="88900" dist="38100" dir="8100000" algn="bl" rotWithShape="0">
-              <a:srgbClr val="000000">
-                <a:alpha val="10000"/>
-              </a:srgbClr>
-            </a:outerShdw>
-          </a:effectLst>
-        </p:spPr>
-        <p:txBody>
-          <a:bodyPr/>
-          <a:lstStyle/>
-          <a:p>
-            <a:endParaRPr lang="zh-TW" altLang="en-US"/>
-          </a:p>
-        </p:txBody>
-      </p:sp>
-      <p:sp>
-        <p:nvSpPr>
-          <p:cNvPr id="25" name="Shape 23"/>
-          <p:cNvSpPr/>
-          <p:nvPr/>
-        </p:nvSpPr>
-        <p:spPr>
-          <a:xfrm>
-            <a:off x="6249924" y="4736592"/>
-            <a:ext cx="82296" cy="1371600"/>
-          </a:xfrm>
-          <a:prstGeom prst="rect">
-            <a:avLst/>
-          </a:prstGeom>
-          <a:solidFill>
-            <a:srgbClr val="059669"/>
-          </a:solidFill>
-          <a:ln/>
-        </p:spPr>
-        <p:txBody>
-          <a:bodyPr/>
-          <a:lstStyle/>
-          <a:p>
-            <a:endParaRPr lang="zh-TW" altLang="en-US"/>
-          </a:p>
-        </p:txBody>
-      </p:sp>
-      <p:sp>
-        <p:nvSpPr>
-          <p:cNvPr id="26" name="Text 24"/>
-          <p:cNvSpPr/>
-          <p:nvPr/>
-        </p:nvSpPr>
-        <p:spPr>
-          <a:xfrm>
-            <a:off x="6487668" y="4882896"/>
-            <a:ext cx="4914900" cy="365760"/>
-          </a:xfrm>
-          <a:prstGeom prst="rect">
-            <a:avLst/>
-          </a:prstGeom>
-          <a:noFill/>
-          <a:ln/>
-        </p:spPr>
-        <p:txBody>
-          <a:bodyPr wrap="square" lIns="0" tIns="0" rIns="0" bIns="0" rtlCol="0" anchor="ctr"/>
-          <a:lstStyle/>
-          <a:p>
-            <a:pPr marL="0" indent="0">
-              <a:buNone/>
-            </a:pPr>
-            <a:r>
-              <a:rPr lang="en-US" sz="1450" b="1" dirty="0">
-                <a:solidFill>
-                  <a:srgbClr val="1E2A4A"/>
-                </a:solidFill>
-                <a:latin typeface="Trebuchet MS" pitchFamily="34" charset="0"/>
-                <a:ea typeface="Trebuchet MS" pitchFamily="34" charset="-122"/>
-                <a:cs typeface="Trebuchet MS" pitchFamily="34" charset="-120"/>
-              </a:rPr>
-              <a:t>Two front-ends</a:t>
-            </a:r>
-            <a:endParaRPr lang="en-US" sz="1450" dirty="0"/>
-          </a:p>
-        </p:txBody>
-      </p:sp>
-      <p:sp>
-        <p:nvSpPr>
-          <p:cNvPr id="27" name="Text 25"/>
-          <p:cNvSpPr/>
-          <p:nvPr/>
-        </p:nvSpPr>
-        <p:spPr>
-          <a:xfrm>
-            <a:off x="6487668" y="5239512"/>
-            <a:ext cx="4914900" cy="777240"/>
-          </a:xfrm>
-          <a:prstGeom prst="rect">
-            <a:avLst/>
-          </a:prstGeom>
-          <a:noFill/>
-          <a:ln/>
-        </p:spPr>
-        <p:txBody>
-          <a:bodyPr wrap="square" lIns="0" tIns="0" rIns="0" bIns="0" rtlCol="0" anchor="t"/>
-          <a:lstStyle/>
-          <a:p>
-            <a:pPr marL="0" indent="0">
-              <a:buNone/>
-            </a:pPr>
-            <a:r>
-              <a:rPr lang="en-US" sz="1200" dirty="0">
-                <a:solidFill>
-                  <a:srgbClr val="475569"/>
-                </a:solidFill>
-                <a:latin typeface="Calibri" pitchFamily="34" charset="0"/>
-                <a:ea typeface="Calibri" pitchFamily="34" charset="-122"/>
-                <a:cs typeface="Calibri" pitchFamily="34" charset="-120"/>
-              </a:rPr>
-              <a:t>Standalone OpenCV GUI (live sliders, zoom lens, HUD stats) and a drop-in ComfyUI node exposing IMAGE + reusable MASK.</a:t>
-            </a:r>
-            <a:endParaRPr lang="en-US" sz="1200" dirty="0"/>
-          </a:p>
-        </p:txBody>
-      </p:sp>
-      <p:sp>
-        <p:nvSpPr>
-          <p:cNvPr id="28" name="Text 26"/>
-          <p:cNvSpPr/>
-          <p:nvPr/>
-        </p:nvSpPr>
-        <p:spPr>
-          <a:xfrm>
-            <a:off x="566928" y="6473952"/>
-            <a:ext cx="7315200" cy="274320"/>
-          </a:xfrm>
-          <a:prstGeom prst="rect">
-            <a:avLst/>
-          </a:prstGeom>
-          <a:noFill/>
-          <a:ln/>
-        </p:spPr>
-        <p:txBody>
-          <a:bodyPr wrap="square" lIns="0" tIns="0" rIns="0" bIns="0" rtlCol="0" anchor="ctr"/>
-          <a:lstStyle/>
-          <a:p>
-            <a:pPr marL="0" indent="0">
-              <a:buNone/>
-            </a:pPr>
-            <a:r>
-              <a:rPr lang="en-US" sz="900" dirty="0">
-                <a:solidFill>
-                  <a:srgbClr val="64748B"/>
-                </a:solidFill>
-                <a:latin typeface="Calibri" pitchFamily="34" charset="0"/>
-                <a:ea typeface="Calibri" pitchFamily="34" charset="-122"/>
-                <a:cs typeface="Calibri" pitchFamily="34" charset="-120"/>
-              </a:rPr>
-              <a:t>SDXL VAE Noise-Fix  ·  Traditional-CV ComfyUI Node</a:t>
-            </a:r>
-            <a:endParaRPr lang="en-US" sz="900" dirty="0"/>
-          </a:p>
-        </p:txBody>
-      </p:sp>
-      <p:sp>
-        <p:nvSpPr>
-          <p:cNvPr id="29" name="Text 27"/>
-          <p:cNvSpPr/>
-          <p:nvPr/>
-        </p:nvSpPr>
-        <p:spPr>
-          <a:xfrm>
-            <a:off x="11073384" y="6473952"/>
-            <a:ext cx="548640" cy="274320"/>
-          </a:xfrm>
-          <a:prstGeom prst="rect">
-            <a:avLst/>
-          </a:prstGeom>
-          <a:noFill/>
-          <a:ln/>
-        </p:spPr>
-        <p:txBody>
-          <a:bodyPr wrap="square" lIns="0" tIns="0" rIns="0" bIns="0" rtlCol="0" anchor="ctr"/>
-          <a:lstStyle/>
-          <a:p>
-            <a:pPr marL="0" indent="0" algn="r">
-              <a:buNone/>
-            </a:pPr>
-            <a:r>
-              <a:rPr lang="en-US" sz="900" dirty="0">
-                <a:solidFill>
-                  <a:srgbClr val="64748B"/>
-                </a:solidFill>
-                <a:latin typeface="Calibri" pitchFamily="34" charset="0"/>
-                <a:ea typeface="Calibri" pitchFamily="34" charset="-122"/>
-                <a:cs typeface="Calibri" pitchFamily="34" charset="-120"/>
-              </a:rPr>
-              <a:t>7</a:t>
-            </a:r>
-            <a:endParaRPr lang="en-US" sz="900" dirty="0"/>
-          </a:p>
-        </p:txBody>
-      </p:sp>
-    </p:spTree>
-  </p:cSld>
-  <p:clrMapOvr>
-    <a:masterClrMapping/>
-  </p:clrMapOvr>
-</p:sld>
-</file>
-
-<file path=ppt/slides/slide8.xml><?xml version="1.0" encoding="utf-8"?>
 <p:sld xmlns:a="http://schemas.openxmlformats.org/drawingml/2006/main" xmlns:r="http://schemas.openxmlformats.org/officeDocument/2006/relationships" xmlns:p="http://schemas.openxmlformats.org/presentationml/2006/main">
   <p:cSld name="Slide 8">
     <p:bg>
@@ -12652,7 +9272,7 @@
 </p:sld>
 </file>
 
-<file path=ppt/slides/slide9.xml><?xml version="1.0" encoding="utf-8"?>
+<file path=ppt/slides/slide8.xml><?xml version="1.0" encoding="utf-8"?>
 <p:sld xmlns:a="http://schemas.openxmlformats.org/drawingml/2006/main" xmlns:r="http://schemas.openxmlformats.org/officeDocument/2006/relationships" xmlns:p="http://schemas.openxmlformats.org/presentationml/2006/main">
   <p:cSld name="Slide 9">
     <p:bg>
@@ -13811,6 +10431,617 @@
                 <a:cs typeface="Calibri" pitchFamily="34" charset="-120"/>
               </a:rPr>
               <a:t>9</a:t>
+            </a:r>
+            <a:endParaRPr lang="en-US" sz="900" dirty="0"/>
+          </a:p>
+        </p:txBody>
+      </p:sp>
+    </p:spTree>
+  </p:cSld>
+  <p:clrMapOvr>
+    <a:masterClrMapping/>
+  </p:clrMapOvr>
+</p:sld>
+</file>
+
+<file path=ppt/slides/slide9.xml><?xml version="1.0" encoding="utf-8"?>
+<p:sld xmlns:a="http://schemas.openxmlformats.org/drawingml/2006/main" xmlns:r="http://schemas.openxmlformats.org/officeDocument/2006/relationships" xmlns:p="http://schemas.openxmlformats.org/presentationml/2006/main">
+  <p:cSld name="Slide 10">
+    <p:bg>
+      <p:bgPr>
+        <a:solidFill>
+          <a:srgbClr val="F7F8FA"/>
+        </a:solidFill>
+        <a:effectLst/>
+      </p:bgPr>
+    </p:bg>
+    <p:spTree>
+      <p:nvGrpSpPr>
+        <p:cNvPr id="1" name=""/>
+        <p:cNvGrpSpPr/>
+        <p:nvPr/>
+      </p:nvGrpSpPr>
+      <p:grpSpPr>
+        <a:xfrm>
+          <a:off x="0" y="0"/>
+          <a:ext cx="0" cy="0"/>
+          <a:chOff x="0" y="0"/>
+          <a:chExt cx="0" cy="0"/>
+        </a:xfrm>
+      </p:grpSpPr>
+      <p:sp>
+        <p:nvSpPr>
+          <p:cNvPr id="2" name="Text 0"/>
+          <p:cNvSpPr/>
+          <p:nvPr/>
+        </p:nvSpPr>
+        <p:spPr>
+          <a:xfrm>
+            <a:off x="566928" y="420624"/>
+            <a:ext cx="11055096" cy="292608"/>
+          </a:xfrm>
+          <a:prstGeom prst="rect">
+            <a:avLst/>
+          </a:prstGeom>
+          <a:noFill/>
+          <a:ln/>
+        </p:spPr>
+        <p:txBody>
+          <a:bodyPr wrap="square" lIns="0" tIns="0" rIns="0" bIns="0" rtlCol="0" anchor="ctr"/>
+          <a:lstStyle/>
+          <a:p>
+            <a:pPr marL="0" indent="0" algn="l">
+              <a:buNone/>
+            </a:pPr>
+            <a:r>
+              <a:rPr lang="en-US" sz="1250" b="1" kern="0" spc="300" dirty="0">
+                <a:solidFill>
+                  <a:srgbClr val="059669"/>
+                </a:solidFill>
+                <a:latin typeface="Trebuchet MS" pitchFamily="34" charset="0"/>
+                <a:ea typeface="Trebuchet MS" pitchFamily="34" charset="-122"/>
+                <a:cs typeface="Trebuchet MS" pitchFamily="34" charset="-120"/>
+              </a:rPr>
+              <a:t>05 · DIFFICULTIES &amp; UNIQUENESS</a:t>
+            </a:r>
+            <a:endParaRPr lang="en-US" sz="1250" dirty="0"/>
+          </a:p>
+        </p:txBody>
+      </p:sp>
+      <p:sp>
+        <p:nvSpPr>
+          <p:cNvPr id="3" name="Text 1"/>
+          <p:cNvSpPr/>
+          <p:nvPr/>
+        </p:nvSpPr>
+        <p:spPr>
+          <a:xfrm>
+            <a:off x="566928" y="713232"/>
+            <a:ext cx="11055096" cy="658368"/>
+          </a:xfrm>
+          <a:prstGeom prst="rect">
+            <a:avLst/>
+          </a:prstGeom>
+          <a:noFill/>
+          <a:ln/>
+        </p:spPr>
+        <p:txBody>
+          <a:bodyPr wrap="square" lIns="0" tIns="0" rIns="0" bIns="0" rtlCol="0" anchor="ctr"/>
+          <a:lstStyle/>
+          <a:p>
+            <a:pPr marL="0" indent="0" algn="l">
+              <a:buNone/>
+            </a:pPr>
+            <a:r>
+              <a:rPr lang="en-US" sz="3000" b="1" dirty="0">
+                <a:solidFill>
+                  <a:srgbClr val="1E2A4A"/>
+                </a:solidFill>
+                <a:latin typeface="Trebuchet MS" pitchFamily="34" charset="0"/>
+                <a:ea typeface="Trebuchet MS" pitchFamily="34" charset="-122"/>
+                <a:cs typeface="Trebuchet MS" pitchFamily="34" charset="-120"/>
+              </a:rPr>
+              <a:t>What’s Hard — and What’s New</a:t>
+            </a:r>
+            <a:endParaRPr lang="en-US" sz="3000" dirty="0"/>
+          </a:p>
+        </p:txBody>
+      </p:sp>
+      <p:sp>
+        <p:nvSpPr>
+          <p:cNvPr id="4" name="Shape 2"/>
+          <p:cNvSpPr/>
+          <p:nvPr/>
+        </p:nvSpPr>
+        <p:spPr>
+          <a:xfrm>
+            <a:off x="566928" y="1664208"/>
+            <a:ext cx="5413248" cy="4443984"/>
+          </a:xfrm>
+          <a:prstGeom prst="rect">
+            <a:avLst/>
+          </a:prstGeom>
+          <a:solidFill>
+            <a:srgbClr val="FFFFFF"/>
+          </a:solidFill>
+          <a:ln w="12700">
+            <a:solidFill>
+              <a:srgbClr val="E2E8F0"/>
+            </a:solidFill>
+            <a:prstDash val="solid"/>
+          </a:ln>
+          <a:effectLst>
+            <a:outerShdw blurRad="88900" dist="38100" dir="8100000" algn="bl" rotWithShape="0">
+              <a:srgbClr val="000000">
+                <a:alpha val="10000"/>
+              </a:srgbClr>
+            </a:outerShdw>
+          </a:effectLst>
+        </p:spPr>
+        <p:txBody>
+          <a:bodyPr/>
+          <a:lstStyle/>
+          <a:p>
+            <a:endParaRPr lang="zh-TW" altLang="en-US"/>
+          </a:p>
+        </p:txBody>
+      </p:sp>
+      <p:sp>
+        <p:nvSpPr>
+          <p:cNvPr id="5" name="Shape 3"/>
+          <p:cNvSpPr/>
+          <p:nvPr/>
+        </p:nvSpPr>
+        <p:spPr>
+          <a:xfrm>
+            <a:off x="566928" y="1664208"/>
+            <a:ext cx="82296" cy="4443984"/>
+          </a:xfrm>
+          <a:prstGeom prst="rect">
+            <a:avLst/>
+          </a:prstGeom>
+          <a:solidFill>
+            <a:srgbClr val="059669"/>
+          </a:solidFill>
+          <a:ln/>
+        </p:spPr>
+        <p:txBody>
+          <a:bodyPr/>
+          <a:lstStyle/>
+          <a:p>
+            <a:endParaRPr lang="zh-TW" altLang="en-US"/>
+          </a:p>
+        </p:txBody>
+      </p:sp>
+      <p:sp>
+        <p:nvSpPr>
+          <p:cNvPr id="6" name="Text 4"/>
+          <p:cNvSpPr/>
+          <p:nvPr/>
+        </p:nvSpPr>
+        <p:spPr>
+          <a:xfrm>
+            <a:off x="804672" y="1810512"/>
+            <a:ext cx="4937760" cy="365760"/>
+          </a:xfrm>
+          <a:prstGeom prst="rect">
+            <a:avLst/>
+          </a:prstGeom>
+          <a:noFill/>
+          <a:ln/>
+        </p:spPr>
+        <p:txBody>
+          <a:bodyPr wrap="square" lIns="0" tIns="0" rIns="0" bIns="0" rtlCol="0" anchor="ctr"/>
+          <a:lstStyle/>
+          <a:p>
+            <a:pPr marL="0" indent="0">
+              <a:buNone/>
+            </a:pPr>
+            <a:r>
+              <a:rPr lang="en-US" sz="1700" b="1" dirty="0">
+                <a:solidFill>
+                  <a:srgbClr val="1E2A4A"/>
+                </a:solidFill>
+                <a:latin typeface="Trebuchet MS" pitchFamily="34" charset="0"/>
+                <a:ea typeface="Trebuchet MS" pitchFamily="34" charset="-122"/>
+                <a:cs typeface="Trebuchet MS" pitchFamily="34" charset="-120"/>
+              </a:rPr>
+              <a:t>Uniqueness</a:t>
+            </a:r>
+            <a:endParaRPr lang="en-US" sz="1700" dirty="0"/>
+          </a:p>
+        </p:txBody>
+      </p:sp>
+      <p:sp>
+        <p:nvSpPr>
+          <p:cNvPr id="7" name="Text 5"/>
+          <p:cNvSpPr/>
+          <p:nvPr/>
+        </p:nvSpPr>
+        <p:spPr>
+          <a:xfrm>
+            <a:off x="804672" y="2212848"/>
+            <a:ext cx="4956048" cy="3749040"/>
+          </a:xfrm>
+          <a:prstGeom prst="rect">
+            <a:avLst/>
+          </a:prstGeom>
+          <a:noFill/>
+          <a:ln/>
+        </p:spPr>
+        <p:txBody>
+          <a:bodyPr wrap="square" lIns="0" tIns="0" rIns="0" bIns="0" rtlCol="0" anchor="t"/>
+          <a:lstStyle/>
+          <a:p>
+            <a:pPr marL="177800" indent="-177800">
+              <a:spcAft>
+                <a:spcPts val="700"/>
+              </a:spcAft>
+              <a:buSzPct val="100000"/>
+              <a:buChar char="•"/>
+            </a:pPr>
+            <a:r>
+              <a:rPr lang="en-US" sz="1450" dirty="0">
+                <a:solidFill>
+                  <a:srgbClr val="475569"/>
+                </a:solidFill>
+                <a:latin typeface="Calibri" pitchFamily="34" charset="0"/>
+                <a:ea typeface="Calibri" pitchFamily="34" charset="-122"/>
+                <a:cs typeface="Calibri" pitchFamily="34" charset="-120"/>
+              </a:rPr>
+              <a:t>No existing ComfyUI node combines automatic luminance + area + LAB filtering with integrated CV inpainting in a single drop-in node.</a:t>
+            </a:r>
+            <a:endParaRPr lang="en-US" sz="1450" dirty="0"/>
+          </a:p>
+          <a:p>
+            <a:pPr marL="177800" indent="-177800">
+              <a:spcAft>
+                <a:spcPts val="700"/>
+              </a:spcAft>
+              <a:buSzPct val="100000"/>
+              <a:buChar char="•"/>
+            </a:pPr>
+            <a:r>
+              <a:rPr lang="en-US" sz="1450" dirty="0">
+                <a:solidFill>
+                  <a:srgbClr val="475569"/>
+                </a:solidFill>
+                <a:latin typeface="Calibri" pitchFamily="34" charset="0"/>
+                <a:ea typeface="Calibri" pitchFamily="34" charset="-122"/>
+                <a:cs typeface="Calibri" pitchFamily="34" charset="-120"/>
+              </a:rPr>
+              <a:t>Existing options are either deep-learning detailers (heavy, semantic-only) or manual-mask inpaint nodes — users otherwise wire a fragile “spaghetti” graph.</a:t>
+            </a:r>
+            <a:endParaRPr lang="en-US" sz="1450" dirty="0"/>
+          </a:p>
+          <a:p>
+            <a:pPr marL="177800" indent="-177800">
+              <a:spcAft>
+                <a:spcPts val="700"/>
+              </a:spcAft>
+              <a:buSzPct val="100000"/>
+              <a:buChar char="•"/>
+            </a:pPr>
+            <a:r>
+              <a:rPr lang="en-US" sz="1450" dirty="0">
+                <a:solidFill>
+                  <a:srgbClr val="475569"/>
+                </a:solidFill>
+                <a:latin typeface="Calibri" pitchFamily="34" charset="0"/>
+                <a:ea typeface="Calibri" pitchFamily="34" charset="-122"/>
+                <a:cs typeface="Calibri" pitchFamily="34" charset="-120"/>
+              </a:rPr>
+              <a:t>Hybrid-CV philosophy: encode domain knowledge as explicit, interpretable, deterministic rules instead of a black box.</a:t>
+            </a:r>
+            <a:endParaRPr lang="en-US" sz="1450" dirty="0"/>
+          </a:p>
+          <a:p>
+            <a:pPr marL="177800" indent="-177800">
+              <a:spcAft>
+                <a:spcPts val="700"/>
+              </a:spcAft>
+              <a:buSzPct val="100000"/>
+              <a:buChar char="•"/>
+            </a:pPr>
+            <a:r>
+              <a:rPr lang="en-US" sz="1450" dirty="0">
+                <a:solidFill>
+                  <a:srgbClr val="475569"/>
+                </a:solidFill>
+                <a:latin typeface="Calibri" pitchFamily="34" charset="0"/>
+                <a:ea typeface="Calibri" pitchFamily="34" charset="-122"/>
+                <a:cs typeface="Calibri" pitchFamily="34" charset="-120"/>
+              </a:rPr>
+              <a:t>Reusable MASK output lets downstream nodes share the detection.</a:t>
+            </a:r>
+            <a:endParaRPr lang="en-US" sz="1450" dirty="0"/>
+          </a:p>
+        </p:txBody>
+      </p:sp>
+      <p:sp>
+        <p:nvSpPr>
+          <p:cNvPr id="8" name="Shape 6"/>
+          <p:cNvSpPr/>
+          <p:nvPr/>
+        </p:nvSpPr>
+        <p:spPr>
+          <a:xfrm>
+            <a:off x="6199632" y="1664208"/>
+            <a:ext cx="5422392" cy="4443984"/>
+          </a:xfrm>
+          <a:prstGeom prst="rect">
+            <a:avLst/>
+          </a:prstGeom>
+          <a:solidFill>
+            <a:srgbClr val="FFFFFF"/>
+          </a:solidFill>
+          <a:ln w="12700">
+            <a:solidFill>
+              <a:srgbClr val="E2E8F0"/>
+            </a:solidFill>
+            <a:prstDash val="solid"/>
+          </a:ln>
+          <a:effectLst>
+            <a:outerShdw blurRad="88900" dist="38100" dir="8100000" algn="bl" rotWithShape="0">
+              <a:srgbClr val="000000">
+                <a:alpha val="10000"/>
+              </a:srgbClr>
+            </a:outerShdw>
+          </a:effectLst>
+        </p:spPr>
+        <p:txBody>
+          <a:bodyPr/>
+          <a:lstStyle/>
+          <a:p>
+            <a:endParaRPr lang="zh-TW" altLang="en-US"/>
+          </a:p>
+        </p:txBody>
+      </p:sp>
+      <p:sp>
+        <p:nvSpPr>
+          <p:cNvPr id="9" name="Shape 7"/>
+          <p:cNvSpPr/>
+          <p:nvPr/>
+        </p:nvSpPr>
+        <p:spPr>
+          <a:xfrm>
+            <a:off x="6199632" y="1664208"/>
+            <a:ext cx="82296" cy="4443984"/>
+          </a:xfrm>
+          <a:prstGeom prst="rect">
+            <a:avLst/>
+          </a:prstGeom>
+          <a:solidFill>
+            <a:srgbClr val="D97706"/>
+          </a:solidFill>
+          <a:ln/>
+        </p:spPr>
+        <p:txBody>
+          <a:bodyPr/>
+          <a:lstStyle/>
+          <a:p>
+            <a:endParaRPr lang="zh-TW" altLang="en-US"/>
+          </a:p>
+        </p:txBody>
+      </p:sp>
+      <p:sp>
+        <p:nvSpPr>
+          <p:cNvPr id="10" name="Text 8"/>
+          <p:cNvSpPr/>
+          <p:nvPr/>
+        </p:nvSpPr>
+        <p:spPr>
+          <a:xfrm>
+            <a:off x="6437376" y="1810512"/>
+            <a:ext cx="4937760" cy="365760"/>
+          </a:xfrm>
+          <a:prstGeom prst="rect">
+            <a:avLst/>
+          </a:prstGeom>
+          <a:noFill/>
+          <a:ln/>
+        </p:spPr>
+        <p:txBody>
+          <a:bodyPr wrap="square" lIns="0" tIns="0" rIns="0" bIns="0" rtlCol="0" anchor="ctr"/>
+          <a:lstStyle/>
+          <a:p>
+            <a:pPr marL="0" indent="0">
+              <a:buNone/>
+            </a:pPr>
+            <a:r>
+              <a:rPr lang="en-US" sz="1700" b="1" dirty="0">
+                <a:solidFill>
+                  <a:srgbClr val="1E2A4A"/>
+                </a:solidFill>
+                <a:latin typeface="Trebuchet MS" pitchFamily="34" charset="0"/>
+                <a:ea typeface="Trebuchet MS" pitchFamily="34" charset="-122"/>
+                <a:cs typeface="Trebuchet MS" pitchFamily="34" charset="-120"/>
+              </a:rPr>
+              <a:t>Difficulties &amp; limitations</a:t>
+            </a:r>
+            <a:endParaRPr lang="en-US" sz="1700" dirty="0"/>
+          </a:p>
+        </p:txBody>
+      </p:sp>
+      <p:sp>
+        <p:nvSpPr>
+          <p:cNvPr id="11" name="Text 9"/>
+          <p:cNvSpPr/>
+          <p:nvPr/>
+        </p:nvSpPr>
+        <p:spPr>
+          <a:xfrm>
+            <a:off x="6437376" y="2212848"/>
+            <a:ext cx="4956048" cy="3749040"/>
+          </a:xfrm>
+          <a:prstGeom prst="rect">
+            <a:avLst/>
+          </a:prstGeom>
+          <a:noFill/>
+          <a:ln/>
+        </p:spPr>
+        <p:txBody>
+          <a:bodyPr wrap="square" lIns="0" tIns="0" rIns="0" bIns="0" rtlCol="0" anchor="t"/>
+          <a:lstStyle/>
+          <a:p>
+            <a:pPr marL="177800" indent="-177800">
+              <a:spcAft>
+                <a:spcPts val="700"/>
+              </a:spcAft>
+              <a:buSzPct val="100000"/>
+              <a:buChar char="•"/>
+            </a:pPr>
+            <a:r>
+              <a:rPr lang="en-US" sz="1450" dirty="0">
+                <a:solidFill>
+                  <a:srgbClr val="475569"/>
+                </a:solidFill>
+                <a:latin typeface="Calibri" pitchFamily="34" charset="0"/>
+                <a:ea typeface="Calibri" pitchFamily="34" charset="-122"/>
+                <a:cs typeface="Calibri" pitchFamily="34" charset="-120"/>
+              </a:rPr>
+              <a:t>Star-vs-noise discrimination is the core challenge — both are small, bright and isolated; solved via the LAB cliff-ratio test.</a:t>
+            </a:r>
+            <a:endParaRPr lang="en-US" sz="1450" dirty="0"/>
+          </a:p>
+          <a:p>
+            <a:pPr marL="177800" indent="-177800">
+              <a:spcAft>
+                <a:spcPts val="700"/>
+              </a:spcAft>
+              <a:buSzPct val="100000"/>
+              <a:buChar char="•"/>
+            </a:pPr>
+            <a:r>
+              <a:rPr lang="en-US" sz="1450" dirty="0">
+                <a:solidFill>
+                  <a:srgbClr val="475569"/>
+                </a:solidFill>
+                <a:latin typeface="Calibri" pitchFamily="34" charset="0"/>
+                <a:ea typeface="Calibri" pitchFamily="34" charset="-122"/>
+                <a:cs typeface="Calibri" pitchFamily="34" charset="-120"/>
+              </a:rPr>
+              <a:t>Truly sharp-edged points (e.g. a 2×2 pure-white star) have no falloff and can still be removed — an inherent edge case.</a:t>
+            </a:r>
+            <a:endParaRPr lang="en-US" sz="1450" dirty="0"/>
+          </a:p>
+          <a:p>
+            <a:pPr marL="177800" indent="-177800">
+              <a:spcAft>
+                <a:spcPts val="700"/>
+              </a:spcAft>
+              <a:buSzPct val="100000"/>
+              <a:buChar char="•"/>
+            </a:pPr>
+            <a:r>
+              <a:rPr lang="en-US" sz="1450" dirty="0">
+                <a:solidFill>
+                  <a:srgbClr val="475569"/>
+                </a:solidFill>
+                <a:latin typeface="Calibri" pitchFamily="34" charset="0"/>
+                <a:ea typeface="Calibri" pitchFamily="34" charset="-122"/>
+                <a:cs typeface="Calibri" pitchFamily="34" charset="-120"/>
+              </a:rPr>
+              <a:t>Severe VAE collapse (large grid-like noise) exceeds a single max_noise_size and needs manual tuning.</a:t>
+            </a:r>
+            <a:endParaRPr lang="en-US" sz="1450" dirty="0"/>
+          </a:p>
+          <a:p>
+            <a:pPr marL="177800" indent="-177800">
+              <a:spcAft>
+                <a:spcPts val="700"/>
+              </a:spcAft>
+              <a:buSzPct val="100000"/>
+              <a:buChar char="•"/>
+            </a:pPr>
+            <a:r>
+              <a:rPr lang="en-US" sz="1450" dirty="0">
+                <a:solidFill>
+                  <a:srgbClr val="475569"/>
+                </a:solidFill>
+                <a:latin typeface="Calibri" pitchFamily="34" charset="0"/>
+                <a:ea typeface="Calibri" pitchFamily="34" charset="-122"/>
+                <a:cs typeface="Calibri" pitchFamily="34" charset="-120"/>
+              </a:rPr>
+              <a:t>4K+ CCA / LAB loops cost extra CPU time (still typically within 1–2 s).</a:t>
+            </a:r>
+            <a:endParaRPr lang="en-US" sz="1450" dirty="0"/>
+          </a:p>
+        </p:txBody>
+      </p:sp>
+      <p:sp>
+        <p:nvSpPr>
+          <p:cNvPr id="12" name="Text 10"/>
+          <p:cNvSpPr/>
+          <p:nvPr/>
+        </p:nvSpPr>
+        <p:spPr>
+          <a:xfrm>
+            <a:off x="566928" y="6473952"/>
+            <a:ext cx="7315200" cy="274320"/>
+          </a:xfrm>
+          <a:prstGeom prst="rect">
+            <a:avLst/>
+          </a:prstGeom>
+          <a:noFill/>
+          <a:ln/>
+        </p:spPr>
+        <p:txBody>
+          <a:bodyPr wrap="square" lIns="0" tIns="0" rIns="0" bIns="0" rtlCol="0" anchor="ctr"/>
+          <a:lstStyle/>
+          <a:p>
+            <a:pPr marL="0" indent="0">
+              <a:buNone/>
+            </a:pPr>
+            <a:r>
+              <a:rPr lang="en-US" sz="900" dirty="0">
+                <a:solidFill>
+                  <a:srgbClr val="64748B"/>
+                </a:solidFill>
+                <a:latin typeface="Calibri" pitchFamily="34" charset="0"/>
+                <a:ea typeface="Calibri" pitchFamily="34" charset="-122"/>
+                <a:cs typeface="Calibri" pitchFamily="34" charset="-120"/>
+              </a:rPr>
+              <a:t>SDXL VAE Noise-Fix  ·  Traditional-CV ComfyUI Node</a:t>
+            </a:r>
+            <a:endParaRPr lang="en-US" sz="900" dirty="0"/>
+          </a:p>
+        </p:txBody>
+      </p:sp>
+      <p:sp>
+        <p:nvSpPr>
+          <p:cNvPr id="13" name="Text 11"/>
+          <p:cNvSpPr/>
+          <p:nvPr/>
+        </p:nvSpPr>
+        <p:spPr>
+          <a:xfrm>
+            <a:off x="11073384" y="6473952"/>
+            <a:ext cx="548640" cy="274320"/>
+          </a:xfrm>
+          <a:prstGeom prst="rect">
+            <a:avLst/>
+          </a:prstGeom>
+          <a:noFill/>
+          <a:ln/>
+        </p:spPr>
+        <p:txBody>
+          <a:bodyPr wrap="square" lIns="0" tIns="0" rIns="0" bIns="0" rtlCol="0" anchor="ctr"/>
+          <a:lstStyle/>
+          <a:p>
+            <a:pPr marL="0" indent="0" algn="r">
+              <a:buNone/>
+            </a:pPr>
+            <a:r>
+              <a:rPr lang="en-US" sz="900" dirty="0">
+                <a:solidFill>
+                  <a:srgbClr val="64748B"/>
+                </a:solidFill>
+                <a:latin typeface="Calibri" pitchFamily="34" charset="0"/>
+                <a:ea typeface="Calibri" pitchFamily="34" charset="-122"/>
+                <a:cs typeface="Calibri" pitchFamily="34" charset="-120"/>
+              </a:rPr>
+              <a:t>10</a:t>
             </a:r>
             <a:endParaRPr lang="en-US" sz="900" dirty="0"/>
           </a:p>

--- a/VAE_NoiseFix_Final_Presentation.pptx
+++ b/VAE_NoiseFix_Final_Presentation.pptx
@@ -828,8 +828,54 @@
               <a:rPr lang="zh-TW" altLang="en-US" dirty="0"/>
               <a:t>供即時參數調整甚至讓使用者對遮罩進行編輯；</a:t>
             </a:r>
-          </a:p>
-          <a:p>
+            <a:endParaRPr lang="en-US" altLang="zh-TW" dirty="0"/>
+          </a:p>
+          <a:p>
+            <a:endParaRPr lang="zh-TW" altLang="en-US" dirty="0"/>
+          </a:p>
+          <a:p>
+            <a:r>
+              <a:rPr lang="en-US" altLang="zh-TW" dirty="0"/>
+              <a:t>The whole system breaks down into three steps.</a:t>
+            </a:r>
+          </a:p>
+          <a:p>
+            <a:r>
+              <a:rPr lang="en-US" altLang="zh-TW" dirty="0"/>
+              <a:t>First, artifact detection. We use the Laplacian and the median residual together, with a brightness threshold, to find the candidate pixels. </a:t>
+            </a:r>
+          </a:p>
+          <a:p>
+            <a:r>
+              <a:rPr lang="en-US" altLang="zh-TW" dirty="0"/>
+              <a:t>Then we clean those candidates up with connected component analysis and a variance check to remove the false positives, and that gives us a precise mask.</a:t>
+            </a:r>
+          </a:p>
+          <a:p>
+            <a:r>
+              <a:rPr lang="en-US" altLang="zh-TW" dirty="0"/>
+              <a:t>Second, repair. We hand that mask to </a:t>
+            </a:r>
+            <a:r>
+              <a:rPr lang="en-US" altLang="zh-TW" dirty="0" err="1"/>
+              <a:t>Telea's</a:t>
+            </a:r>
+            <a:r>
+              <a:rPr lang="en-US" altLang="zh-TW" dirty="0"/>
+              <a:t> Fast Marching Method, which fills the masked regions using the surrounding information.</a:t>
+            </a:r>
+          </a:p>
+          <a:p>
+            <a:r>
+              <a:rPr lang="en-US" altLang="zh-TW" dirty="0"/>
+              <a:t>Third, an interactive GUI. It gives you a red mask overlay preview so you can adjust the parameters in real time, and you can even edit the mask by hand to add, remove, or refine regions.</a:t>
+            </a:r>
+          </a:p>
+          <a:p>
+            <a:r>
+              <a:rPr lang="en-US" altLang="zh-TW" dirty="0"/>
+              <a:t>And because the GUI feeds back into the parameters, you can iterate quickly until the result looks right. Since most of this builds on the related work we already covered, I will keep it brief and move on to how the detection actually works.</a:t>
+            </a:r>
             <a:endParaRPr lang="en-US" dirty="0"/>
           </a:p>
         </p:txBody>
@@ -913,6 +959,178 @@
         <p:txBody>
           <a:bodyPr/>
           <a:lstStyle/>
+          <a:p>
+            <a:r>
+              <a:rPr lang="en-US" altLang="zh-TW" dirty="0"/>
+              <a:t>Next, let me explain the detection logic in this project.</a:t>
+            </a:r>
+          </a:p>
+          <a:p>
+            <a:r>
+              <a:rPr lang="en-US" altLang="zh-TW" dirty="0"/>
+              <a:t>We start from the input image on the far left, and it enters two paths at the same time.</a:t>
+            </a:r>
+          </a:p>
+          <a:p>
+            <a:r>
+              <a:rPr lang="en-US" altLang="zh-TW" dirty="0"/>
+              <a:t>The top one is the Laplacian path, which looks for sharp pixel cues. We first convert the image to grayscale, apply a Laplacian filter, and get an edge energy map. The Laplacian reacts to how sharply the brightness changes, so it fires strongly wherever a pixel differs greatly in luminance from its neighbors. </a:t>
+            </a:r>
+          </a:p>
+          <a:p>
+            <a:r>
+              <a:rPr lang="en-US" altLang="zh-TW" dirty="0"/>
+              <a:t>That is exactly why it is good at catching the hard, sharp dead pixels, whether they are pure white on a dark area or pure black on a bright one, because both are a steep brightness jump.</a:t>
+            </a:r>
+          </a:p>
+          <a:p>
+            <a:r>
+              <a:rPr lang="en-US" altLang="zh-TW" dirty="0"/>
+              <a:t>The bottom one is the median residual path, which looks for color cues. </a:t>
+            </a:r>
+          </a:p>
+          <a:p>
+            <a:r>
+              <a:rPr lang="en-US" altLang="zh-TW" dirty="0"/>
+              <a:t>We first apply a median blur, then subtract it from the original to get the residual, and finally keep the strongest color channel. </a:t>
+            </a:r>
+          </a:p>
+          <a:p>
+            <a:r>
+              <a:rPr lang="en-US" altLang="zh-TW" dirty="0"/>
+              <a:t>Because a median blur ignores lone extreme pixels, this path responds to the smooth blotches that simply do not match the background color, such as the purple and green bleed, and that is the kind of artifact the Laplacian path tends to miss.</a:t>
+            </a:r>
+          </a:p>
+          <a:p>
+            <a:r>
+              <a:rPr lang="en-US" altLang="zh-TW" dirty="0"/>
+              <a:t>The results from both paths are then merged into a single set of candidate pixels.</a:t>
+            </a:r>
+          </a:p>
+          <a:p>
+            <a:r>
+              <a:rPr lang="en-US" altLang="zh-TW" dirty="0"/>
+              <a:t>After that, we use two different thresholds to obtain two things. </a:t>
+            </a:r>
+          </a:p>
+          <a:p>
+            <a:r>
+              <a:rPr lang="en-US" altLang="zh-TW" dirty="0"/>
+              <a:t>The strict threshold asks whether there is a real high energy core here, which lets us pinpoint the precise location of the noise. </a:t>
+            </a:r>
+          </a:p>
+          <a:p>
+            <a:r>
+              <a:rPr lang="en-US" altLang="zh-TW" dirty="0"/>
+              <a:t>The loose threshold asks how far the noise actually extends, which lets us define the extent of the repair mask.</a:t>
+            </a:r>
+          </a:p>
+          <a:p>
+            <a:endParaRPr lang="en-US" altLang="zh-TW" dirty="0"/>
+          </a:p>
+          <a:p>
+            <a:endParaRPr lang="en-US" altLang="zh-TW" dirty="0"/>
+          </a:p>
+          <a:p>
+            <a:endParaRPr lang="en-US" altLang="zh-TW" dirty="0"/>
+          </a:p>
+          <a:p>
+            <a:r>
+              <a:rPr lang="zh-TW" altLang="en-US" dirty="0"/>
+              <a:t>接下來說明專案中的偵測邏輯。</a:t>
+            </a:r>
+          </a:p>
+          <a:p>
+            <a:r>
+              <a:rPr lang="zh-TW" altLang="en-US" dirty="0"/>
+              <a:t>從最左邊的輸入影像開始，它會同時進入兩條路徑。</a:t>
+            </a:r>
+          </a:p>
+          <a:p>
+            <a:r>
+              <a:rPr lang="zh-TW" altLang="en-US" dirty="0"/>
+              <a:t>上面的是 </a:t>
+            </a:r>
+            <a:r>
+              <a:rPr lang="en-US" altLang="zh-TW" dirty="0"/>
+              <a:t>Laplacian </a:t>
+            </a:r>
+            <a:r>
+              <a:rPr lang="zh-TW" altLang="en-US" dirty="0"/>
+              <a:t>路徑，負責抓「銳利的像素線索」。</a:t>
+            </a:r>
+            <a:endParaRPr lang="en-US" altLang="zh-TW" dirty="0"/>
+          </a:p>
+          <a:p>
+            <a:r>
+              <a:rPr lang="zh-TW" altLang="en-US" dirty="0"/>
+              <a:t>先把影像轉成灰階，套用 </a:t>
+            </a:r>
+            <a:r>
+              <a:rPr lang="en-US" altLang="zh-TW" dirty="0"/>
+              <a:t>Laplacian </a:t>
+            </a:r>
+            <a:r>
+              <a:rPr lang="zh-TW" altLang="en-US" dirty="0"/>
+              <a:t>濾鏡，得到一張邊緣能量圖。這條路徑會在某個像素跟周圍鄰居差異很大的地方產生強烈反應，所以它特別擅長抓那種又硬又銳利的死點。</a:t>
+            </a:r>
+          </a:p>
+          <a:p>
+            <a:r>
+              <a:rPr lang="zh-TW" altLang="en-US" dirty="0"/>
+              <a:t>下面這條是中值殘差路徑，負責抓「顏色線索」。先做中值模糊，再用原圖減掉它得到殘差，然後取反應最強的色彩通道。</a:t>
+            </a:r>
+            <a:endParaRPr lang="en-US" altLang="zh-TW" dirty="0"/>
+          </a:p>
+          <a:p>
+            <a:r>
+              <a:rPr lang="zh-TW" altLang="en-US" dirty="0"/>
+              <a:t>因為中值模糊會忽略掉單一的極端像素，所以這條路徑會在那種平滑、跟背景顏色格格不入的色塊上有反應，例如紫色、綠色的溢色，而這正是 </a:t>
+            </a:r>
+            <a:r>
+              <a:rPr lang="en-US" altLang="zh-TW" dirty="0"/>
+              <a:t>Laplacian </a:t>
+            </a:r>
+            <a:r>
+              <a:rPr lang="zh-TW" altLang="en-US" dirty="0"/>
+              <a:t>容易漏掉的部分。</a:t>
+            </a:r>
+          </a:p>
+          <a:p>
+            <a:r>
+              <a:rPr lang="zh-TW" altLang="en-US" dirty="0"/>
+              <a:t>兩條路徑的結果會合併成一組候選像素。</a:t>
+            </a:r>
+            <a:endParaRPr lang="en-US" altLang="zh-TW" dirty="0"/>
+          </a:p>
+          <a:p>
+            <a:r>
+              <a:rPr lang="zh-TW" altLang="en-US" dirty="0"/>
+              <a:t>接著在用兩個不同的門檻得到兩個要件。</a:t>
+            </a:r>
+            <a:endParaRPr lang="en-US" altLang="zh-TW" dirty="0"/>
+          </a:p>
+          <a:p>
+            <a:r>
+              <a:rPr lang="zh-TW" altLang="en-US" dirty="0"/>
+              <a:t>嚴格門檻問的是：這裡有沒有一個真正的高能量核心？這能用來定位</a:t>
+            </a:r>
+            <a:r>
+              <a:rPr lang="en-US" altLang="zh-TW" dirty="0"/>
+              <a:t>noise</a:t>
+            </a:r>
+            <a:r>
+              <a:rPr lang="zh-TW" altLang="en-US" dirty="0"/>
+              <a:t>的精確位置。</a:t>
+            </a:r>
+            <a:endParaRPr lang="en-US" altLang="zh-TW" dirty="0"/>
+          </a:p>
+          <a:p>
+            <a:r>
+              <a:rPr lang="zh-TW" altLang="en-US" dirty="0"/>
+              <a:t>寬鬆門檻問的是：這個噪點實際上延伸到多大範圍？這能用來定位遮罩的範圍。</a:t>
+            </a:r>
+          </a:p>
           <a:p>
             <a:endParaRPr lang="en-US" dirty="0"/>
           </a:p>
@@ -5496,14 +5714,14 @@
       </p:sp>
       <p:sp>
         <p:nvSpPr>
-          <p:cNvPr id="4" name="Text 2"/>
-          <p:cNvSpPr/>
-          <p:nvPr/>
-        </p:nvSpPr>
-        <p:spPr>
-          <a:xfrm>
-            <a:off x="566928" y="1481328"/>
-            <a:ext cx="11055096" cy="384048"/>
+          <p:cNvPr id="21" name="Text 19"/>
+          <p:cNvSpPr/>
+          <p:nvPr/>
+        </p:nvSpPr>
+        <p:spPr>
+          <a:xfrm>
+            <a:off x="566928" y="6473952"/>
+            <a:ext cx="7315200" cy="274320"/>
           </a:xfrm>
           <a:prstGeom prst="rect">
             <a:avLst/>
@@ -5519,96 +5737,30 @@
               <a:buNone/>
             </a:pPr>
             <a:r>
-              <a:rPr lang="en-US" sz="1350" i="1" dirty="0">
-                <a:solidFill>
-                  <a:srgbClr val="475569"/>
+              <a:rPr lang="en-US" sz="900" dirty="0">
+                <a:solidFill>
+                  <a:srgbClr val="64748B"/>
                 </a:solidFill>
                 <a:latin typeface="Calibri" pitchFamily="34" charset="0"/>
                 <a:ea typeface="Calibri" pitchFamily="34" charset="-122"/>
                 <a:cs typeface="Calibri" pitchFamily="34" charset="-120"/>
               </a:rPr>
-              <a:t>No single filter catches both artifact shapes, so two complementary paths run in parallel and are OR-merged.</a:t>
-            </a:r>
-            <a:endParaRPr lang="en-US" sz="1350" dirty="0"/>
-          </a:p>
-        </p:txBody>
-      </p:sp>
-      <p:sp>
-        <p:nvSpPr>
-          <p:cNvPr id="5" name="Shape 3"/>
-          <p:cNvSpPr/>
-          <p:nvPr/>
-        </p:nvSpPr>
-        <p:spPr>
-          <a:xfrm>
-            <a:off x="566928" y="2057400"/>
-            <a:ext cx="5394960" cy="2331720"/>
-          </a:xfrm>
-          <a:prstGeom prst="rect">
-            <a:avLst/>
-          </a:prstGeom>
-          <a:solidFill>
-            <a:srgbClr val="FFFFFF"/>
-          </a:solidFill>
-          <a:ln w="12700">
-            <a:solidFill>
-              <a:srgbClr val="E2E8F0"/>
-            </a:solidFill>
-            <a:prstDash val="solid"/>
-          </a:ln>
-          <a:effectLst>
-            <a:outerShdw blurRad="88900" dist="38100" dir="8100000" algn="bl" rotWithShape="0">
-              <a:srgbClr val="000000">
-                <a:alpha val="10000"/>
-              </a:srgbClr>
-            </a:outerShdw>
-          </a:effectLst>
-        </p:spPr>
-        <p:txBody>
-          <a:bodyPr/>
-          <a:lstStyle/>
-          <a:p>
-            <a:endParaRPr lang="zh-TW" altLang="en-US"/>
-          </a:p>
-        </p:txBody>
-      </p:sp>
-      <p:sp>
-        <p:nvSpPr>
-          <p:cNvPr id="6" name="Shape 4"/>
-          <p:cNvSpPr/>
-          <p:nvPr/>
-        </p:nvSpPr>
-        <p:spPr>
-          <a:xfrm>
-            <a:off x="566928" y="2057400"/>
-            <a:ext cx="82296" cy="2331720"/>
-          </a:xfrm>
-          <a:prstGeom prst="rect">
-            <a:avLst/>
-          </a:prstGeom>
-          <a:solidFill>
-            <a:srgbClr val="2C3E66"/>
-          </a:solidFill>
-          <a:ln/>
-        </p:spPr>
-        <p:txBody>
-          <a:bodyPr/>
-          <a:lstStyle/>
-          <a:p>
-            <a:endParaRPr lang="zh-TW" altLang="en-US"/>
-          </a:p>
-        </p:txBody>
-      </p:sp>
-      <p:sp>
-        <p:nvSpPr>
-          <p:cNvPr id="7" name="Text 5"/>
-          <p:cNvSpPr/>
-          <p:nvPr/>
-        </p:nvSpPr>
-        <p:spPr>
-          <a:xfrm>
-            <a:off x="804672" y="2240280"/>
-            <a:ext cx="4937760" cy="365760"/>
+              <a:t>SDXL VAE Noise-Fix  ·  Traditional-CV ComfyUI Node</a:t>
+            </a:r>
+            <a:endParaRPr lang="en-US" sz="900" dirty="0"/>
+          </a:p>
+        </p:txBody>
+      </p:sp>
+      <p:sp>
+        <p:nvSpPr>
+          <p:cNvPr id="22" name="Text 20"/>
+          <p:cNvSpPr/>
+          <p:nvPr/>
+        </p:nvSpPr>
+        <p:spPr>
+          <a:xfrm>
+            <a:off x="11073384" y="6473952"/>
+            <a:ext cx="548640" cy="274320"/>
           </a:xfrm>
           <a:prstGeom prst="rect">
             <a:avLst/>
@@ -5620,600 +5772,55 @@
           <a:bodyPr wrap="square" lIns="0" tIns="0" rIns="0" bIns="0" rtlCol="0" anchor="ctr"/>
           <a:lstStyle/>
           <a:p>
-            <a:pPr marL="0" indent="0">
+            <a:pPr marL="0" indent="0" algn="r">
               <a:buNone/>
             </a:pPr>
             <a:r>
-              <a:rPr lang="en-US" sz="1700" b="1" dirty="0">
-                <a:solidFill>
-                  <a:srgbClr val="1E2A4A"/>
-                </a:solidFill>
-                <a:latin typeface="Trebuchet MS" pitchFamily="34" charset="0"/>
-                <a:ea typeface="Trebuchet MS" pitchFamily="34" charset="-122"/>
-                <a:cs typeface="Trebuchet MS" pitchFamily="34" charset="-120"/>
-              </a:rPr>
-              <a:t>Laplacian energy path</a:t>
-            </a:r>
-            <a:endParaRPr lang="en-US" sz="1700" dirty="0"/>
-          </a:p>
-        </p:txBody>
-      </p:sp>
-      <p:sp>
-        <p:nvSpPr>
-          <p:cNvPr id="8" name="Text 6"/>
-          <p:cNvSpPr/>
-          <p:nvPr/>
-        </p:nvSpPr>
-        <p:spPr>
-          <a:xfrm>
-            <a:off x="804672" y="2624328"/>
-            <a:ext cx="4937760" cy="914400"/>
-          </a:xfrm>
-          <a:prstGeom prst="rect">
-            <a:avLst/>
-          </a:prstGeom>
-          <a:noFill/>
-          <a:ln/>
-        </p:spPr>
-        <p:txBody>
-          <a:bodyPr wrap="square" lIns="0" tIns="0" rIns="0" bIns="0" rtlCol="0" anchor="ctr"/>
-          <a:lstStyle/>
-          <a:p>
-            <a:pPr marL="0" indent="0">
-              <a:buNone/>
-            </a:pPr>
-            <a:r>
-              <a:rPr lang="en-US" sz="1300" dirty="0">
-                <a:solidFill>
-                  <a:srgbClr val="475569"/>
+              <a:rPr lang="en-US" sz="900" dirty="0">
+                <a:solidFill>
+                  <a:srgbClr val="64748B"/>
                 </a:solidFill>
                 <a:latin typeface="Calibri" pitchFamily="34" charset="0"/>
                 <a:ea typeface="Calibri" pitchFamily="34" charset="-122"/>
                 <a:cs typeface="Calibri" pitchFamily="34" charset="-120"/>
               </a:rPr>
-              <a:t>2nd-derivative filter on BT.709 grayscale. Reacts wherever a pixel differs sharply from its neighbors — catches sharp-edged white / black dead pixels regardless of brightness.</a:t>
-            </a:r>
-            <a:endParaRPr lang="en-US" sz="1300" dirty="0"/>
-          </a:p>
-        </p:txBody>
-      </p:sp>
-      <p:sp>
-        <p:nvSpPr>
-          <p:cNvPr id="9" name="Shape 7"/>
-          <p:cNvSpPr/>
-          <p:nvPr/>
-        </p:nvSpPr>
-        <p:spPr>
-          <a:xfrm>
-            <a:off x="804672" y="3785616"/>
-            <a:ext cx="4919472" cy="420624"/>
-          </a:xfrm>
-          <a:prstGeom prst="rect">
-            <a:avLst/>
-          </a:prstGeom>
-          <a:solidFill>
-            <a:srgbClr val="EEF2F8"/>
-          </a:solidFill>
-          <a:ln/>
-        </p:spPr>
-        <p:txBody>
-          <a:bodyPr/>
-          <a:lstStyle/>
-          <a:p>
-            <a:endParaRPr lang="zh-TW" altLang="en-US"/>
-          </a:p>
-        </p:txBody>
-      </p:sp>
-      <p:sp>
-        <p:nvSpPr>
-          <p:cNvPr id="10" name="Text 8"/>
-          <p:cNvSpPr/>
-          <p:nvPr/>
-        </p:nvSpPr>
-        <p:spPr>
-          <a:xfrm>
-            <a:off x="804672" y="3785616"/>
-            <a:ext cx="4919472" cy="420624"/>
-          </a:xfrm>
-          <a:prstGeom prst="rect">
-            <a:avLst/>
-          </a:prstGeom>
-          <a:noFill/>
-          <a:ln/>
-        </p:spPr>
-        <p:txBody>
-          <a:bodyPr wrap="square" lIns="0" tIns="0" rIns="0" bIns="0" rtlCol="0" anchor="ctr"/>
-          <a:lstStyle/>
-          <a:p>
-            <a:pPr marL="0" indent="0" algn="ctr">
-              <a:buNone/>
-            </a:pPr>
-            <a:r>
-              <a:rPr lang="en-US" sz="1350" b="1" dirty="0">
-                <a:solidFill>
-                  <a:srgbClr val="1E2A4A"/>
-                </a:solidFill>
-                <a:latin typeface="Courier New" pitchFamily="34" charset="0"/>
-                <a:ea typeface="Courier New" pitchFamily="34" charset="-122"/>
-                <a:cs typeface="Courier New" pitchFamily="34" charset="-120"/>
-              </a:rPr>
-              <a:t>T_lap  =  sensitivity × 255</a:t>
-            </a:r>
-            <a:endParaRPr lang="en-US" sz="1350" dirty="0"/>
-          </a:p>
-        </p:txBody>
-      </p:sp>
-      <p:sp>
-        <p:nvSpPr>
-          <p:cNvPr id="11" name="Shape 9"/>
-          <p:cNvSpPr/>
-          <p:nvPr/>
-        </p:nvSpPr>
-        <p:spPr>
-          <a:xfrm>
-            <a:off x="6227064" y="2057400"/>
-            <a:ext cx="5394960" cy="2331720"/>
-          </a:xfrm>
-          <a:prstGeom prst="rect">
-            <a:avLst/>
-          </a:prstGeom>
-          <a:solidFill>
-            <a:srgbClr val="FFFFFF"/>
-          </a:solidFill>
-          <a:ln w="12700">
-            <a:solidFill>
-              <a:srgbClr val="E2E8F0"/>
-            </a:solidFill>
-            <a:prstDash val="solid"/>
-          </a:ln>
-          <a:effectLst>
-            <a:outerShdw blurRad="88900" dist="38100" dir="8100000" algn="bl" rotWithShape="0">
-              <a:srgbClr val="000000">
-                <a:alpha val="10000"/>
-              </a:srgbClr>
-            </a:outerShdw>
-          </a:effectLst>
-        </p:spPr>
-        <p:txBody>
-          <a:bodyPr/>
-          <a:lstStyle/>
-          <a:p>
-            <a:endParaRPr lang="zh-TW" altLang="en-US"/>
-          </a:p>
-        </p:txBody>
-      </p:sp>
-      <p:sp>
-        <p:nvSpPr>
-          <p:cNvPr id="12" name="Shape 10"/>
-          <p:cNvSpPr/>
-          <p:nvPr/>
-        </p:nvSpPr>
-        <p:spPr>
-          <a:xfrm>
-            <a:off x="6227064" y="2057400"/>
-            <a:ext cx="82296" cy="2331720"/>
-          </a:xfrm>
-          <a:prstGeom prst="rect">
-            <a:avLst/>
-          </a:prstGeom>
-          <a:solidFill>
-            <a:srgbClr val="D97706"/>
-          </a:solidFill>
-          <a:ln/>
-        </p:spPr>
-        <p:txBody>
-          <a:bodyPr/>
-          <a:lstStyle/>
-          <a:p>
-            <a:endParaRPr lang="zh-TW" altLang="en-US"/>
-          </a:p>
-        </p:txBody>
-      </p:sp>
-      <p:sp>
-        <p:nvSpPr>
-          <p:cNvPr id="13" name="Text 11"/>
-          <p:cNvSpPr/>
-          <p:nvPr/>
-        </p:nvSpPr>
-        <p:spPr>
-          <a:xfrm>
-            <a:off x="6464808" y="2240280"/>
-            <a:ext cx="4937760" cy="365760"/>
-          </a:xfrm>
-          <a:prstGeom prst="rect">
-            <a:avLst/>
-          </a:prstGeom>
-          <a:noFill/>
-          <a:ln/>
-        </p:spPr>
-        <p:txBody>
-          <a:bodyPr wrap="square" lIns="0" tIns="0" rIns="0" bIns="0" rtlCol="0" anchor="ctr"/>
-          <a:lstStyle/>
-          <a:p>
-            <a:pPr marL="0" indent="0">
-              <a:buNone/>
-            </a:pPr>
-            <a:r>
-              <a:rPr lang="en-US" sz="1700" b="1" dirty="0">
-                <a:solidFill>
-                  <a:srgbClr val="1E2A4A"/>
-                </a:solidFill>
-                <a:latin typeface="Trebuchet MS" pitchFamily="34" charset="0"/>
-                <a:ea typeface="Trebuchet MS" pitchFamily="34" charset="-122"/>
-                <a:cs typeface="Trebuchet MS" pitchFamily="34" charset="-120"/>
-              </a:rPr>
-              <a:t>Median residual path</a:t>
-            </a:r>
-            <a:endParaRPr lang="en-US" sz="1700" dirty="0"/>
-          </a:p>
-        </p:txBody>
-      </p:sp>
-      <p:sp>
-        <p:nvSpPr>
-          <p:cNvPr id="14" name="Text 12"/>
-          <p:cNvSpPr/>
-          <p:nvPr/>
-        </p:nvSpPr>
-        <p:spPr>
-          <a:xfrm>
-            <a:off x="6464808" y="2624328"/>
-            <a:ext cx="4937760" cy="914400"/>
-          </a:xfrm>
-          <a:prstGeom prst="rect">
-            <a:avLst/>
-          </a:prstGeom>
-          <a:noFill/>
-          <a:ln/>
-        </p:spPr>
-        <p:txBody>
-          <a:bodyPr wrap="square" lIns="0" tIns="0" rIns="0" bIns="0" rtlCol="0" anchor="ctr"/>
-          <a:lstStyle/>
-          <a:p>
-            <a:pPr marL="0" indent="0">
-              <a:buNone/>
-            </a:pPr>
-            <a:r>
-              <a:rPr lang="en-US" sz="1300" dirty="0">
-                <a:solidFill>
-                  <a:srgbClr val="475569"/>
-                </a:solidFill>
-                <a:latin typeface="Calibri" pitchFamily="34" charset="0"/>
-                <a:ea typeface="Calibri" pitchFamily="34" charset="-122"/>
-                <a:cs typeface="Calibri" pitchFamily="34" charset="-120"/>
-              </a:rPr>
-              <a:t>|source − median-blur|, per-pixel max channel. Median is immune to lone extremes, so the residual lights up flat, off-color blobs (purple / green bleed) that Laplacian misses.</a:t>
-            </a:r>
-            <a:endParaRPr lang="en-US" sz="1300" dirty="0"/>
-          </a:p>
-        </p:txBody>
-      </p:sp>
-      <p:sp>
-        <p:nvSpPr>
-          <p:cNvPr id="15" name="Shape 13"/>
-          <p:cNvSpPr/>
-          <p:nvPr/>
-        </p:nvSpPr>
-        <p:spPr>
-          <a:xfrm>
-            <a:off x="6464808" y="3785616"/>
-            <a:ext cx="4919472" cy="420624"/>
-          </a:xfrm>
-          <a:prstGeom prst="rect">
-            <a:avLst/>
-          </a:prstGeom>
-          <a:solidFill>
-            <a:srgbClr val="EEF2F8"/>
-          </a:solidFill>
-          <a:ln/>
-        </p:spPr>
-        <p:txBody>
-          <a:bodyPr/>
-          <a:lstStyle/>
-          <a:p>
-            <a:endParaRPr lang="zh-TW" altLang="en-US"/>
-          </a:p>
-        </p:txBody>
-      </p:sp>
-      <p:sp>
-        <p:nvSpPr>
-          <p:cNvPr id="16" name="Text 14"/>
-          <p:cNvSpPr/>
-          <p:nvPr/>
-        </p:nvSpPr>
-        <p:spPr>
-          <a:xfrm>
-            <a:off x="6464808" y="3785616"/>
-            <a:ext cx="4919472" cy="420624"/>
-          </a:xfrm>
-          <a:prstGeom prst="rect">
-            <a:avLst/>
-          </a:prstGeom>
-          <a:noFill/>
-          <a:ln/>
-        </p:spPr>
-        <p:txBody>
-          <a:bodyPr wrap="square" lIns="0" tIns="0" rIns="0" bIns="0" rtlCol="0" anchor="ctr"/>
-          <a:lstStyle/>
-          <a:p>
-            <a:pPr marL="0" indent="0" algn="ctr">
-              <a:buNone/>
-            </a:pPr>
-            <a:r>
-              <a:rPr lang="en-US" sz="1350" b="1" dirty="0">
-                <a:solidFill>
-                  <a:srgbClr val="1E2A4A"/>
-                </a:solidFill>
-                <a:latin typeface="Courier New" pitchFamily="34" charset="0"/>
-                <a:ea typeface="Courier New" pitchFamily="34" charset="-122"/>
-                <a:cs typeface="Courier New" pitchFamily="34" charset="-120"/>
-              </a:rPr>
-              <a:t>T_med  =  20 + sensitivity × 80</a:t>
-            </a:r>
-            <a:endParaRPr lang="en-US" sz="1350" dirty="0"/>
-          </a:p>
-        </p:txBody>
-      </p:sp>
-      <p:sp>
-        <p:nvSpPr>
-          <p:cNvPr id="17" name="Shape 15"/>
-          <p:cNvSpPr/>
-          <p:nvPr/>
-        </p:nvSpPr>
-        <p:spPr>
-          <a:xfrm>
-            <a:off x="566928" y="4617720"/>
-            <a:ext cx="11055096" cy="1463040"/>
-          </a:xfrm>
-          <a:prstGeom prst="rect">
-            <a:avLst/>
-          </a:prstGeom>
-          <a:solidFill>
-            <a:srgbClr val="FFFFFF"/>
-          </a:solidFill>
-          <a:ln w="12700">
-            <a:solidFill>
-              <a:srgbClr val="E2E8F0"/>
-            </a:solidFill>
-            <a:prstDash val="solid"/>
-          </a:ln>
-          <a:effectLst>
-            <a:outerShdw blurRad="88900" dist="38100" dir="8100000" algn="bl" rotWithShape="0">
-              <a:srgbClr val="000000">
-                <a:alpha val="10000"/>
-              </a:srgbClr>
-            </a:outerShdw>
-          </a:effectLst>
-        </p:spPr>
-        <p:txBody>
-          <a:bodyPr/>
-          <a:lstStyle/>
-          <a:p>
-            <a:endParaRPr lang="zh-TW" altLang="en-US"/>
-          </a:p>
-        </p:txBody>
-      </p:sp>
-      <p:sp>
-        <p:nvSpPr>
-          <p:cNvPr id="18" name="Shape 16"/>
-          <p:cNvSpPr/>
-          <p:nvPr/>
-        </p:nvSpPr>
-        <p:spPr>
-          <a:xfrm>
-            <a:off x="566928" y="4617720"/>
-            <a:ext cx="82296" cy="1463040"/>
-          </a:xfrm>
-          <a:prstGeom prst="rect">
-            <a:avLst/>
-          </a:prstGeom>
-          <a:solidFill>
-            <a:srgbClr val="059669"/>
-          </a:solidFill>
-          <a:ln/>
-        </p:spPr>
-        <p:txBody>
-          <a:bodyPr/>
-          <a:lstStyle/>
-          <a:p>
-            <a:endParaRPr lang="zh-TW" altLang="en-US"/>
-          </a:p>
-        </p:txBody>
-      </p:sp>
-      <p:sp>
-        <p:nvSpPr>
-          <p:cNvPr id="19" name="Text 17"/>
-          <p:cNvSpPr/>
-          <p:nvPr/>
-        </p:nvSpPr>
-        <p:spPr>
-          <a:xfrm>
-            <a:off x="822960" y="4782312"/>
-            <a:ext cx="10506456" cy="329184"/>
-          </a:xfrm>
-          <a:prstGeom prst="rect">
-            <a:avLst/>
-          </a:prstGeom>
-          <a:noFill/>
-          <a:ln/>
-        </p:spPr>
-        <p:txBody>
-          <a:bodyPr wrap="square" lIns="0" tIns="0" rIns="0" bIns="0" rtlCol="0" anchor="ctr"/>
-          <a:lstStyle/>
-          <a:p>
-            <a:pPr marL="0" indent="0">
-              <a:buNone/>
-            </a:pPr>
-            <a:r>
-              <a:rPr lang="en-US" sz="1500" b="1" dirty="0">
-                <a:solidFill>
-                  <a:srgbClr val="1E2A4A"/>
-                </a:solidFill>
-                <a:latin typeface="Trebuchet MS" pitchFamily="34" charset="0"/>
-                <a:ea typeface="Trebuchet MS" pitchFamily="34" charset="-122"/>
-                <a:cs typeface="Trebuchet MS" pitchFamily="34" charset="-120"/>
-              </a:rPr>
-              <a:t>Two thresholds, two questions</a:t>
-            </a:r>
-            <a:endParaRPr lang="en-US" sz="1500" dirty="0"/>
-          </a:p>
-        </p:txBody>
-      </p:sp>
-      <p:sp>
-        <p:nvSpPr>
-          <p:cNvPr id="20" name="Text 18"/>
-          <p:cNvSpPr/>
-          <p:nvPr/>
-        </p:nvSpPr>
-        <p:spPr>
-          <a:xfrm>
-            <a:off x="822960" y="5129784"/>
-            <a:ext cx="10506456" cy="868680"/>
-          </a:xfrm>
-          <a:prstGeom prst="rect">
-            <a:avLst/>
-          </a:prstGeom>
-          <a:noFill/>
-          <a:ln/>
-        </p:spPr>
-        <p:txBody>
-          <a:bodyPr wrap="square" lIns="0" tIns="0" rIns="0" bIns="0" rtlCol="0" anchor="t"/>
-          <a:lstStyle/>
-          <a:p>
-            <a:pPr marL="0" indent="0">
-              <a:buNone/>
-            </a:pPr>
-            <a:r>
-              <a:rPr lang="en-US" sz="1350" b="1" dirty="0">
-                <a:solidFill>
-                  <a:srgbClr val="059669"/>
-                </a:solidFill>
-                <a:latin typeface="Calibri" pitchFamily="34" charset="0"/>
-                <a:ea typeface="Calibri" pitchFamily="34" charset="-122"/>
-                <a:cs typeface="Calibri" pitchFamily="34" charset="-120"/>
-              </a:rPr>
-              <a:t>Seed mask (strict)  </a:t>
-            </a:r>
-            <a:r>
-              <a:rPr lang="en-US" sz="1350" dirty="0">
-                <a:solidFill>
-                  <a:srgbClr val="475569"/>
-                </a:solidFill>
-                <a:latin typeface="Calibri" pitchFamily="34" charset="0"/>
-                <a:ea typeface="Calibri" pitchFamily="34" charset="-122"/>
-                <a:cs typeface="Calibri" pitchFamily="34" charset="-120"/>
-              </a:rPr>
-              <a:t>— “is there a real high-energy core here?”  Marks only the strongest pixels.</a:t>
-            </a:r>
-            <a:endParaRPr lang="en-US" sz="1350" dirty="0"/>
-          </a:p>
-          <a:p>
-            <a:pPr marL="0" indent="0">
-              <a:buNone/>
-            </a:pPr>
-            <a:r>
-              <a:rPr lang="en-US" sz="1350" b="1" dirty="0">
-                <a:solidFill>
-                  <a:srgbClr val="D97706"/>
-                </a:solidFill>
-                <a:latin typeface="Calibri" pitchFamily="34" charset="0"/>
-                <a:ea typeface="Calibri" pitchFamily="34" charset="-122"/>
-                <a:cs typeface="Calibri" pitchFamily="34" charset="-120"/>
-              </a:rPr>
-              <a:t>Context mask (loose, 0.25×)  </a:t>
-            </a:r>
-            <a:r>
-              <a:rPr lang="en-US" sz="1350" dirty="0">
-                <a:solidFill>
-                  <a:srgbClr val="475569"/>
-                </a:solidFill>
-                <a:latin typeface="Calibri" pitchFamily="34" charset="0"/>
-                <a:ea typeface="Calibri" pitchFamily="34" charset="-122"/>
-                <a:cs typeface="Calibri" pitchFamily="34" charset="-120"/>
-              </a:rPr>
-              <a:t>— “how far does the halo extend?”  Captures the full artifact outline for clean repair.</a:t>
-            </a:r>
-            <a:endParaRPr lang="en-US" sz="1350" dirty="0"/>
-          </a:p>
-        </p:txBody>
-      </p:sp>
-      <p:sp>
-        <p:nvSpPr>
-          <p:cNvPr id="21" name="Text 19"/>
-          <p:cNvSpPr/>
-          <p:nvPr/>
-        </p:nvSpPr>
-        <p:spPr>
-          <a:xfrm>
-            <a:off x="566928" y="6473952"/>
-            <a:ext cx="7315200" cy="274320"/>
-          </a:xfrm>
-          <a:prstGeom prst="rect">
-            <a:avLst/>
-          </a:prstGeom>
-          <a:noFill/>
-          <a:ln/>
-        </p:spPr>
-        <p:txBody>
-          <a:bodyPr wrap="square" lIns="0" tIns="0" rIns="0" bIns="0" rtlCol="0" anchor="ctr"/>
-          <a:lstStyle/>
-          <a:p>
-            <a:pPr marL="0" indent="0">
-              <a:buNone/>
-            </a:pPr>
-            <a:r>
-              <a:rPr lang="en-US" sz="900" dirty="0">
-                <a:solidFill>
-                  <a:srgbClr val="64748B"/>
-                </a:solidFill>
-                <a:latin typeface="Calibri" pitchFamily="34" charset="0"/>
-                <a:ea typeface="Calibri" pitchFamily="34" charset="-122"/>
-                <a:cs typeface="Calibri" pitchFamily="34" charset="-120"/>
-              </a:rPr>
-              <a:t>SDXL VAE Noise-Fix  ·  Traditional-CV ComfyUI Node</a:t>
+              <a:t>5</a:t>
             </a:r>
             <a:endParaRPr lang="en-US" sz="900" dirty="0"/>
           </a:p>
         </p:txBody>
       </p:sp>
-      <p:sp>
-        <p:nvSpPr>
-          <p:cNvPr id="22" name="Text 20"/>
-          <p:cNvSpPr/>
-          <p:nvPr/>
-        </p:nvSpPr>
-        <p:spPr>
-          <a:xfrm>
-            <a:off x="11073384" y="6473952"/>
-            <a:ext cx="548640" cy="274320"/>
-          </a:xfrm>
-          <a:prstGeom prst="rect">
-            <a:avLst/>
-          </a:prstGeom>
-          <a:noFill/>
-          <a:ln/>
-        </p:spPr>
-        <p:txBody>
-          <a:bodyPr wrap="square" lIns="0" tIns="0" rIns="0" bIns="0" rtlCol="0" anchor="ctr"/>
-          <a:lstStyle/>
-          <a:p>
-            <a:pPr marL="0" indent="0" algn="r">
-              <a:buNone/>
-            </a:pPr>
-            <a:r>
-              <a:rPr lang="en-US" sz="900" dirty="0">
-                <a:solidFill>
-                  <a:srgbClr val="64748B"/>
-                </a:solidFill>
-                <a:latin typeface="Calibri" pitchFamily="34" charset="0"/>
-                <a:ea typeface="Calibri" pitchFamily="34" charset="-122"/>
-                <a:cs typeface="Calibri" pitchFamily="34" charset="-120"/>
-              </a:rPr>
-              <a:t>5</a:t>
-            </a:r>
-            <a:endParaRPr lang="en-US" sz="900" dirty="0"/>
-          </a:p>
-        </p:txBody>
-      </p:sp>
+      <p:pic>
+        <p:nvPicPr>
+          <p:cNvPr id="24" name="圖片 23">
+            <a:extLst>
+              <a:ext uri="{FF2B5EF4-FFF2-40B4-BE49-F238E27FC236}">
+                <a16:creationId xmlns:a16="http://schemas.microsoft.com/office/drawing/2014/main" id="{0AD1C7E5-FEA5-B340-6AED-91AD9DEA5398}"/>
+              </a:ext>
+            </a:extLst>
+          </p:cNvPr>
+          <p:cNvPicPr>
+            <a:picLocks noChangeAspect="1"/>
+          </p:cNvPicPr>
+          <p:nvPr/>
+        </p:nvPicPr>
+        <p:blipFill>
+          <a:blip r:embed="rId3"/>
+          <a:srcRect t="6075" b="5327"/>
+          <a:stretch>
+            <a:fillRect/>
+          </a:stretch>
+        </p:blipFill>
+        <p:spPr>
+          <a:xfrm>
+            <a:off x="99752" y="1261873"/>
+            <a:ext cx="11859491" cy="5253644"/>
+          </a:xfrm>
+          <a:prstGeom prst="rect">
+            <a:avLst/>
+          </a:prstGeom>
+        </p:spPr>
+      </p:pic>
     </p:spTree>
   </p:cSld>
   <p:clrMapOvr>

--- a/VAE_NoiseFix_Final_Presentation.pptx
+++ b/VAE_NoiseFix_Final_Presentation.pptx
@@ -4958,7 +4958,7 @@
                 <a:ea typeface="Trebuchet MS" pitchFamily="34" charset="-122"/>
                 <a:cs typeface="Trebuchet MS" pitchFamily="34" charset="-120"/>
               </a:rPr>
-              <a:t>Live Demo	</a:t>
+              <a:t>Live Demo</a:t>
             </a:r>
             <a:endParaRPr lang="en-US" sz="3000" dirty="0"/>
           </a:p>
@@ -5042,63 +5042,13 @@
           </a:p>
         </p:txBody>
       </p:sp>
-      <p:sp>
-        <p:nvSpPr>
-          <p:cNvPr id="5" name="文字方塊 4">
-            <a:extLst>
-              <a:ext uri="{FF2B5EF4-FFF2-40B4-BE49-F238E27FC236}">
-                <a16:creationId xmlns:a16="http://schemas.microsoft.com/office/drawing/2014/main" id="{1AC045BA-8687-564C-D00C-B937744BB3F3}"/>
-              </a:ext>
-            </a:extLst>
-          </p:cNvPr>
-          <p:cNvSpPr txBox="1"/>
-          <p:nvPr/>
-        </p:nvSpPr>
-        <p:spPr>
-          <a:xfrm>
-            <a:off x="7980023" y="911032"/>
-            <a:ext cx="4210453" cy="369332"/>
-          </a:xfrm>
-          <a:prstGeom prst="rect">
-            <a:avLst/>
-          </a:prstGeom>
-          <a:noFill/>
-        </p:spPr>
-        <p:txBody>
-          <a:bodyPr wrap="square" rtlCol="0">
-            <a:spAutoFit/>
-          </a:bodyPr>
-          <a:lstStyle/>
-          <a:p>
-            <a:r>
-              <a:rPr lang="en-US" altLang="zh-TW" dirty="0">
-                <a:hlinkClick r:id="rId4"/>
-              </a:rPr>
-              <a:t>Demo Link</a:t>
-            </a:r>
-            <a:r>
-              <a:rPr lang="zh-TW" altLang="en-US" dirty="0">
-                <a:hlinkClick r:id="rId4"/>
-              </a:rPr>
-              <a:t>：</a:t>
-            </a:r>
-            <a:r>
-              <a:rPr lang="en-US" altLang="zh-TW" dirty="0">
-                <a:hlinkClick r:id="rId4"/>
-              </a:rPr>
-              <a:t>https://youtu.be/qqUrk4OyEfI</a:t>
-            </a:r>
-            <a:endParaRPr lang="zh-TW" altLang="en-US" dirty="0"/>
-          </a:p>
-        </p:txBody>
-      </p:sp>
       <p:pic>
         <p:nvPicPr>
-          <p:cNvPr id="6" name="線上媒體 5" title="VAE_NoiseFix_Final_Presentation_Demo">
+          <p:cNvPr id="5" name="線上媒體 4" title="VAE_NoiseFix_Final_Presentation_Demo">
             <a:hlinkClick r:id="" action="ppaction://media"/>
             <a:extLst>
               <a:ext uri="{FF2B5EF4-FFF2-40B4-BE49-F238E27FC236}">
-                <a16:creationId xmlns:a16="http://schemas.microsoft.com/office/drawing/2014/main" id="{8400CA31-2728-D7BE-B5D9-2F9491F1806B}"/>
+                <a16:creationId xmlns:a16="http://schemas.microsoft.com/office/drawing/2014/main" id="{32DF78C1-5039-FF50-A6B0-65A480DC5567}"/>
               </a:ext>
             </a:extLst>
           </p:cNvPr>
@@ -5110,15 +5060,15 @@
           </p:nvPr>
         </p:nvPicPr>
         <p:blipFill>
-          <a:blip r:embed="rId5"/>
+          <a:blip r:embed="rId4"/>
           <a:stretch>
             <a:fillRect/>
           </a:stretch>
         </p:blipFill>
         <p:spPr>
           <a:xfrm>
-            <a:off x="1437256" y="1245823"/>
-            <a:ext cx="9314439" cy="5262670"/>
+            <a:off x="1532425" y="1282247"/>
+            <a:ext cx="9124102" cy="5155129"/>
           </a:xfrm>
           <a:prstGeom prst="rect">
             <a:avLst/>
@@ -5160,7 +5110,7 @@
                                       <p:cBhvr>
                                         <p:cTn id="6" dur="1" fill="hold"/>
                                         <p:tgtEl>
-                                          <p:spTgt spid="6"/>
+                                          <p:spTgt spid="5"/>
                                         </p:tgtEl>
                                       </p:cBhvr>
                                     </p:cmd>
@@ -5198,7 +5148,7 @@
                   </p:stCondLst>
                 </p:cTn>
                 <p:tgtEl>
-                  <p:spTgt spid="6"/>
+                  <p:spTgt spid="5"/>
                 </p:tgtEl>
               </p:cMediaNode>
             </p:video>
@@ -5207,7 +5157,7 @@
                 <p:stCondLst>
                   <p:cond evt="onClick" delay="0">
                     <p:tgtEl>
-                      <p:spTgt spid="6"/>
+                      <p:spTgt spid="5"/>
                     </p:tgtEl>
                   </p:cond>
                 </p:stCondLst>
@@ -5237,7 +5187,7 @@
                                       <p:cBhvr>
                                         <p:cTn id="12" dur="1" fill="hold"/>
                                         <p:tgtEl>
-                                          <p:spTgt spid="6"/>
+                                          <p:spTgt spid="5"/>
                                         </p:tgtEl>
                                       </p:cBhvr>
                                     </p:cmd>
@@ -5255,7 +5205,7 @@
               <p:nextCondLst>
                 <p:cond evt="onClick" delay="0">
                   <p:tgtEl>
-                    <p:spTgt spid="6"/>
+                    <p:spTgt spid="5"/>
                   </p:tgtEl>
                 </p:cond>
               </p:nextCondLst>
@@ -5835,68 +5785,6 @@
               <a:t>范家齊  ·  NYCU  ·  Spring 2026</a:t>
             </a:r>
             <a:endParaRPr lang="en-US" sz="1200" dirty="0"/>
-          </a:p>
-        </p:txBody>
-      </p:sp>
-      <p:sp>
-        <p:nvSpPr>
-          <p:cNvPr id="16" name="Text 19">
-            <a:extLst>
-              <a:ext uri="{FF2B5EF4-FFF2-40B4-BE49-F238E27FC236}">
-                <a16:creationId xmlns:a16="http://schemas.microsoft.com/office/drawing/2014/main" id="{8308C6BC-246A-97C9-250B-6BF106710A7D}"/>
-              </a:ext>
-            </a:extLst>
-          </p:cNvPr>
-          <p:cNvSpPr/>
-          <p:nvPr/>
-        </p:nvSpPr>
-        <p:spPr>
-          <a:xfrm>
-            <a:off x="841247" y="6135878"/>
-            <a:ext cx="8219625" cy="548640"/>
-          </a:xfrm>
-          <a:prstGeom prst="rect">
-            <a:avLst/>
-          </a:prstGeom>
-          <a:noFill/>
-          <a:ln/>
-        </p:spPr>
-        <p:txBody>
-          <a:bodyPr wrap="square" lIns="0" tIns="0" rIns="0" bIns="0" rtlCol="0" anchor="ctr"/>
-          <a:lstStyle/>
-          <a:p>
-            <a:r>
-              <a:rPr lang="en-US" sz="2200" b="1" dirty="0">
-                <a:solidFill>
-                  <a:schemeClr val="bg1"/>
-                </a:solidFill>
-                <a:hlinkClick r:id="rId3"/>
-              </a:rPr>
-              <a:t>Repo Link</a:t>
-            </a:r>
-            <a:r>
-              <a:rPr lang="zh-TW" altLang="en-US" sz="2200" b="1" dirty="0">
-                <a:solidFill>
-                  <a:schemeClr val="bg1"/>
-                </a:solidFill>
-                <a:hlinkClick r:id="rId3"/>
-              </a:rPr>
-              <a:t>：</a:t>
-            </a:r>
-            <a:r>
-              <a:rPr lang="en-US" altLang="zh-TW" sz="2200" b="1" dirty="0">
-                <a:solidFill>
-                  <a:schemeClr val="bg1"/>
-                </a:solidFill>
-                <a:hlinkClick r:id="rId3"/>
-              </a:rPr>
-              <a:t>https://github.com/megrez33281/ComfyUI-VAE-Noise-Fix</a:t>
-            </a:r>
-            <a:endParaRPr lang="en-US" sz="2200" b="1" dirty="0">
-              <a:solidFill>
-                <a:schemeClr val="bg1"/>
-              </a:solidFill>
-            </a:endParaRPr>
           </a:p>
         </p:txBody>
       </p:sp>
